--- a/All_materials/20230528_School_outreach/Outreach.pptx
+++ b/All_materials/20230528_School_outreach/Outreach.pptx
@@ -5,7 +5,7 @@
     <p:sldMasterId id="2147483773" r:id="rId5"/>
   </p:sldMasterIdLst>
   <p:notesMasterIdLst>
-    <p:notesMasterId r:id="rId16"/>
+    <p:notesMasterId r:id="rId15"/>
   </p:notesMasterIdLst>
   <p:sldIdLst>
     <p:sldId id="1923" r:id="rId6"/>
@@ -16,8 +16,7 @@
     <p:sldId id="2145707275" r:id="rId11"/>
     <p:sldId id="2145707272" r:id="rId12"/>
     <p:sldId id="2145707281" r:id="rId13"/>
-    <p:sldId id="2145707282" r:id="rId14"/>
-    <p:sldId id="2145707283" r:id="rId15"/>
+    <p:sldId id="2145707283" r:id="rId14"/>
   </p:sldIdLst>
   <p:sldSz cx="12192000" cy="6858000"/>
   <p:notesSz cx="6858000" cy="9144000"/>
@@ -139,134 +138,204 @@
 <file path=ppt/changesInfos/changesInfo1.xml><?xml version="1.0" encoding="utf-8"?>
 <pc:chgInfo xmlns:a="http://schemas.openxmlformats.org/drawingml/2006/main" xmlns:r="http://schemas.openxmlformats.org/officeDocument/2006/relationships" xmlns:ac="http://schemas.microsoft.com/office/drawing/2013/main/command" xmlns:pc="http://schemas.microsoft.com/office/powerpoint/2013/main/command">
   <pc:docChgLst>
-    <pc:chgData name="Kenneth Quan" userId="8574030e-edbf-4370-b155-0677d3997c73" providerId="ADAL" clId="{AFD3F409-7F05-4E79-BF89-036E703EDDDA}"/>
-    <pc:docChg chg="undo redo custSel addSld delSld modSld sldOrd">
-      <pc:chgData name="Kenneth Quan" userId="8574030e-edbf-4370-b155-0677d3997c73" providerId="ADAL" clId="{AFD3F409-7F05-4E79-BF89-036E703EDDDA}" dt="2023-06-13T14:29:59.682" v="1870" actId="313"/>
+    <pc:chgData name="QUAN, Kenneth (NHS ENGLAND)" userId="95065793-f978-4ba4-bbf9-569df750104a" providerId="ADAL" clId="{065F1351-36F9-48D8-BE8E-FBCB121BCDBE}"/>
+    <pc:docChg chg="undo custSel delSld modSld">
+      <pc:chgData name="QUAN, Kenneth (NHS ENGLAND)" userId="95065793-f978-4ba4-bbf9-569df750104a" providerId="ADAL" clId="{065F1351-36F9-48D8-BE8E-FBCB121BCDBE}" dt="2026-05-15T10:41:24.581" v="157" actId="47"/>
       <pc:docMkLst>
         <pc:docMk/>
       </pc:docMkLst>
       <pc:sldChg chg="modSp mod">
-        <pc:chgData name="Kenneth Quan" userId="8574030e-edbf-4370-b155-0677d3997c73" providerId="ADAL" clId="{AFD3F409-7F05-4E79-BF89-036E703EDDDA}" dt="2023-06-07T14:29:52.924" v="26" actId="20577"/>
+        <pc:chgData name="QUAN, Kenneth (NHS ENGLAND)" userId="95065793-f978-4ba4-bbf9-569df750104a" providerId="ADAL" clId="{065F1351-36F9-48D8-BE8E-FBCB121BCDBE}" dt="2026-05-15T10:00:23.867" v="40" actId="20577"/>
         <pc:sldMkLst>
           <pc:docMk/>
           <pc:sldMk cId="3830231407" sldId="1923"/>
         </pc:sldMkLst>
+        <pc:spChg chg="mod">
+          <ac:chgData name="QUAN, Kenneth (NHS ENGLAND)" userId="95065793-f978-4ba4-bbf9-569df750104a" providerId="ADAL" clId="{065F1351-36F9-48D8-BE8E-FBCB121BCDBE}" dt="2026-05-15T09:59:54.772" v="36" actId="20577"/>
+          <ac:spMkLst>
+            <pc:docMk/>
+            <pc:sldMk cId="3830231407" sldId="1923"/>
+            <ac:spMk id="2" creationId="{623499A9-ADAE-F54A-B49E-F294E7BCE9E8}"/>
+          </ac:spMkLst>
+        </pc:spChg>
+        <pc:spChg chg="mod">
+          <ac:chgData name="QUAN, Kenneth (NHS ENGLAND)" userId="95065793-f978-4ba4-bbf9-569df750104a" providerId="ADAL" clId="{065F1351-36F9-48D8-BE8E-FBCB121BCDBE}" dt="2026-05-15T10:00:01.293" v="37"/>
+          <ac:spMkLst>
+            <pc:docMk/>
+            <pc:sldMk cId="3830231407" sldId="1923"/>
+            <ac:spMk id="3" creationId="{2AB96998-8BA0-CF4D-B57F-DEBCAD1141C5}"/>
+          </ac:spMkLst>
+        </pc:spChg>
+        <pc:spChg chg="mod">
+          <ac:chgData name="QUAN, Kenneth (NHS ENGLAND)" userId="95065793-f978-4ba4-bbf9-569df750104a" providerId="ADAL" clId="{065F1351-36F9-48D8-BE8E-FBCB121BCDBE}" dt="2026-05-15T10:00:23.867" v="40" actId="20577"/>
+          <ac:spMkLst>
+            <pc:docMk/>
+            <pc:sldMk cId="3830231407" sldId="1923"/>
+            <ac:spMk id="9" creationId="{E4F63B5F-2944-6B41-9332-74DB2CCA6FCA}"/>
+          </ac:spMkLst>
+        </pc:spChg>
       </pc:sldChg>
-      <pc:sldChg chg="addSp delSp modSp mod">
-        <pc:chgData name="Kenneth Quan" userId="8574030e-edbf-4370-b155-0677d3997c73" providerId="ADAL" clId="{AFD3F409-7F05-4E79-BF89-036E703EDDDA}" dt="2023-06-07T14:15:29.191" v="1" actId="478"/>
+      <pc:sldChg chg="modSp mod">
+        <pc:chgData name="QUAN, Kenneth (NHS ENGLAND)" userId="95065793-f978-4ba4-bbf9-569df750104a" providerId="ADAL" clId="{065F1351-36F9-48D8-BE8E-FBCB121BCDBE}" dt="2026-05-15T09:59:35.342" v="33" actId="20577"/>
         <pc:sldMkLst>
           <pc:docMk/>
-          <pc:sldMk cId="3418343003" sldId="1946"/>
+          <pc:sldMk cId="230310781" sldId="2145707269"/>
         </pc:sldMkLst>
-      </pc:sldChg>
-      <pc:sldChg chg="add del">
-        <pc:chgData name="Kenneth Quan" userId="8574030e-edbf-4370-b155-0677d3997c73" providerId="ADAL" clId="{AFD3F409-7F05-4E79-BF89-036E703EDDDA}" dt="2023-06-12T21:36:45.734" v="1308" actId="47"/>
-        <pc:sldMkLst>
-          <pc:docMk/>
-          <pc:sldMk cId="969681748" sldId="2032"/>
-        </pc:sldMkLst>
-      </pc:sldChg>
-      <pc:sldChg chg="addSp delSp modSp add del mod">
-        <pc:chgData name="Kenneth Quan" userId="8574030e-edbf-4370-b155-0677d3997c73" providerId="ADAL" clId="{AFD3F409-7F05-4E79-BF89-036E703EDDDA}" dt="2023-06-12T21:36:45.734" v="1308" actId="47"/>
-        <pc:sldMkLst>
-          <pc:docMk/>
-          <pc:sldMk cId="328827611" sldId="2141411182"/>
-        </pc:sldMkLst>
+        <pc:spChg chg="mod">
+          <ac:chgData name="QUAN, Kenneth (NHS ENGLAND)" userId="95065793-f978-4ba4-bbf9-569df750104a" providerId="ADAL" clId="{065F1351-36F9-48D8-BE8E-FBCB121BCDBE}" dt="2026-05-15T09:59:35.342" v="33" actId="20577"/>
+          <ac:spMkLst>
+            <pc:docMk/>
+            <pc:sldMk cId="230310781" sldId="2145707269"/>
+            <ac:spMk id="54" creationId="{C8DE7AD2-D274-4121-A246-2F79C9BD3400}"/>
+          </ac:spMkLst>
+        </pc:spChg>
       </pc:sldChg>
       <pc:sldChg chg="modSp mod">
-        <pc:chgData name="Kenneth Quan" userId="8574030e-edbf-4370-b155-0677d3997c73" providerId="ADAL" clId="{AFD3F409-7F05-4E79-BF89-036E703EDDDA}" dt="2023-06-08T22:29:31.143" v="213" actId="20577"/>
+        <pc:chgData name="QUAN, Kenneth (NHS ENGLAND)" userId="95065793-f978-4ba4-bbf9-569df750104a" providerId="ADAL" clId="{065F1351-36F9-48D8-BE8E-FBCB121BCDBE}" dt="2026-05-15T10:23:24.903" v="41" actId="20577"/>
         <pc:sldMkLst>
           <pc:docMk/>
           <pc:sldMk cId="914888462" sldId="2145707270"/>
         </pc:sldMkLst>
+        <pc:spChg chg="mod">
+          <ac:chgData name="QUAN, Kenneth (NHS ENGLAND)" userId="95065793-f978-4ba4-bbf9-569df750104a" providerId="ADAL" clId="{065F1351-36F9-48D8-BE8E-FBCB121BCDBE}" dt="2026-05-15T10:23:24.903" v="41" actId="20577"/>
+          <ac:spMkLst>
+            <pc:docMk/>
+            <pc:sldMk cId="914888462" sldId="2145707270"/>
+            <ac:spMk id="13" creationId="{598E524B-F6FA-F142-B71B-23326E628FE2}"/>
+          </ac:spMkLst>
+        </pc:spChg>
       </pc:sldChg>
-      <pc:sldChg chg="ord">
-        <pc:chgData name="Kenneth Quan" userId="8574030e-edbf-4370-b155-0677d3997c73" providerId="ADAL" clId="{AFD3F409-7F05-4E79-BF89-036E703EDDDA}" dt="2023-06-12T21:49:30.375" v="1746"/>
-        <pc:sldMkLst>
-          <pc:docMk/>
-          <pc:sldMk cId="524537779" sldId="2145707271"/>
-        </pc:sldMkLst>
-      </pc:sldChg>
-      <pc:sldChg chg="addSp delSp modSp add mod">
-        <pc:chgData name="Kenneth Quan" userId="8574030e-edbf-4370-b155-0677d3997c73" providerId="ADAL" clId="{AFD3F409-7F05-4E79-BF89-036E703EDDDA}" dt="2023-06-13T14:29:59.682" v="1870" actId="313"/>
+      <pc:sldChg chg="modSp mod">
+        <pc:chgData name="QUAN, Kenneth (NHS ENGLAND)" userId="95065793-f978-4ba4-bbf9-569df750104a" providerId="ADAL" clId="{065F1351-36F9-48D8-BE8E-FBCB121BCDBE}" dt="2026-05-15T10:28:11.066" v="111"/>
         <pc:sldMkLst>
           <pc:docMk/>
           <pc:sldMk cId="3686196430" sldId="2145707272"/>
         </pc:sldMkLst>
+        <pc:spChg chg="mod">
+          <ac:chgData name="QUAN, Kenneth (NHS ENGLAND)" userId="95065793-f978-4ba4-bbf9-569df750104a" providerId="ADAL" clId="{065F1351-36F9-48D8-BE8E-FBCB121BCDBE}" dt="2026-05-15T10:24:57.733" v="76" actId="115"/>
+          <ac:spMkLst>
+            <pc:docMk/>
+            <pc:sldMk cId="3686196430" sldId="2145707272"/>
+            <ac:spMk id="9" creationId="{F9F6492B-0A61-7040-89C7-A6104116E80B}"/>
+          </ac:spMkLst>
+        </pc:spChg>
+        <pc:spChg chg="mod">
+          <ac:chgData name="QUAN, Kenneth (NHS ENGLAND)" userId="95065793-f978-4ba4-bbf9-569df750104a" providerId="ADAL" clId="{065F1351-36F9-48D8-BE8E-FBCB121BCDBE}" dt="2026-05-15T10:25:31.054" v="85" actId="13926"/>
+          <ac:spMkLst>
+            <pc:docMk/>
+            <pc:sldMk cId="3686196430" sldId="2145707272"/>
+            <ac:spMk id="11" creationId="{99BE8F26-1565-8745-82ED-69ADF059BB80}"/>
+          </ac:spMkLst>
+        </pc:spChg>
+        <pc:spChg chg="mod">
+          <ac:chgData name="QUAN, Kenneth (NHS ENGLAND)" userId="95065793-f978-4ba4-bbf9-569df750104a" providerId="ADAL" clId="{065F1351-36F9-48D8-BE8E-FBCB121BCDBE}" dt="2026-05-15T10:27:39.251" v="102" actId="1037"/>
+          <ac:spMkLst>
+            <pc:docMk/>
+            <pc:sldMk cId="3686196430" sldId="2145707272"/>
+            <ac:spMk id="18" creationId="{D9AB7454-1CA7-69C4-ED16-2A1ECD1A3AD9}"/>
+          </ac:spMkLst>
+        </pc:spChg>
+        <pc:spChg chg="mod">
+          <ac:chgData name="QUAN, Kenneth (NHS ENGLAND)" userId="95065793-f978-4ba4-bbf9-569df750104a" providerId="ADAL" clId="{065F1351-36F9-48D8-BE8E-FBCB121BCDBE}" dt="2026-05-15T10:27:39.251" v="102" actId="1037"/>
+          <ac:spMkLst>
+            <pc:docMk/>
+            <pc:sldMk cId="3686196430" sldId="2145707272"/>
+            <ac:spMk id="23" creationId="{6317C261-60AA-A38B-DB36-09BCCF8071C4}"/>
+          </ac:spMkLst>
+        </pc:spChg>
+        <pc:graphicFrameChg chg="mod modGraphic">
+          <ac:chgData name="QUAN, Kenneth (NHS ENGLAND)" userId="95065793-f978-4ba4-bbf9-569df750104a" providerId="ADAL" clId="{065F1351-36F9-48D8-BE8E-FBCB121BCDBE}" dt="2026-05-15T10:27:52.207" v="107" actId="20577"/>
+          <ac:graphicFrameMkLst>
+            <pc:docMk/>
+            <pc:sldMk cId="3686196430" sldId="2145707272"/>
+            <ac:graphicFrameMk id="21" creationId="{9577B1BE-56B2-AD18-00D0-C8FD2E74C774}"/>
+          </ac:graphicFrameMkLst>
+        </pc:graphicFrameChg>
+        <pc:graphicFrameChg chg="mod modGraphic">
+          <ac:chgData name="QUAN, Kenneth (NHS ENGLAND)" userId="95065793-f978-4ba4-bbf9-569df750104a" providerId="ADAL" clId="{065F1351-36F9-48D8-BE8E-FBCB121BCDBE}" dt="2026-05-15T10:28:11.066" v="111"/>
+          <ac:graphicFrameMkLst>
+            <pc:docMk/>
+            <pc:sldMk cId="3686196430" sldId="2145707272"/>
+            <ac:graphicFrameMk id="22" creationId="{AD3C039E-F8B8-1CC8-E2B5-EB05185B37EB}"/>
+          </ac:graphicFrameMkLst>
+        </pc:graphicFrameChg>
       </pc:sldChg>
-      <pc:sldChg chg="addSp delSp modSp mod">
-        <pc:chgData name="Kenneth Quan" userId="8574030e-edbf-4370-b155-0677d3997c73" providerId="ADAL" clId="{AFD3F409-7F05-4E79-BF89-036E703EDDDA}" dt="2023-06-07T22:38:43.741" v="34" actId="20577"/>
+      <pc:sldChg chg="modSp mod">
+        <pc:chgData name="QUAN, Kenneth (NHS ENGLAND)" userId="95065793-f978-4ba4-bbf9-569df750104a" providerId="ADAL" clId="{065F1351-36F9-48D8-BE8E-FBCB121BCDBE}" dt="2026-05-15T10:40:37.150" v="156" actId="115"/>
         <pc:sldMkLst>
           <pc:docMk/>
-          <pc:sldMk cId="2913792469" sldId="2145707274"/>
+          <pc:sldMk cId="3245685508" sldId="2145707281"/>
         </pc:sldMkLst>
-      </pc:sldChg>
-      <pc:sldChg chg="addSp delSp modSp mod">
-        <pc:chgData name="Kenneth Quan" userId="8574030e-edbf-4370-b155-0677d3997c73" providerId="ADAL" clId="{AFD3F409-7F05-4E79-BF89-036E703EDDDA}" dt="2023-06-12T20:52:06.656" v="379" actId="22"/>
-        <pc:sldMkLst>
-          <pc:docMk/>
-          <pc:sldMk cId="2551687250" sldId="2145707275"/>
-        </pc:sldMkLst>
-      </pc:sldChg>
-      <pc:sldChg chg="modSp del mod">
-        <pc:chgData name="Kenneth Quan" userId="8574030e-edbf-4370-b155-0677d3997c73" providerId="ADAL" clId="{AFD3F409-7F05-4E79-BF89-036E703EDDDA}" dt="2023-06-12T21:36:42.193" v="1307" actId="47"/>
-        <pc:sldMkLst>
-          <pc:docMk/>
-          <pc:sldMk cId="3940452994" sldId="2145707280"/>
-        </pc:sldMkLst>
-      </pc:sldChg>
-      <pc:sldChg chg="modSp mod">
-        <pc:chgData name="Kenneth Quan" userId="8574030e-edbf-4370-b155-0677d3997c73" providerId="ADAL" clId="{AFD3F409-7F05-4E79-BF89-036E703EDDDA}" dt="2023-06-07T22:40:27.590" v="56" actId="20577"/>
-        <pc:sldMkLst>
-          <pc:docMk/>
-          <pc:sldMk cId="2080379326" sldId="2145707282"/>
-        </pc:sldMkLst>
-      </pc:sldChg>
-      <pc:sldChg chg="addSp delSp modSp new del mod modClrScheme chgLayout">
-        <pc:chgData name="Kenneth Quan" userId="8574030e-edbf-4370-b155-0677d3997c73" providerId="ADAL" clId="{AFD3F409-7F05-4E79-BF89-036E703EDDDA}" dt="2023-06-09T13:12:04.004" v="339" actId="47"/>
-        <pc:sldMkLst>
-          <pc:docMk/>
-          <pc:sldMk cId="3574537247" sldId="2145707284"/>
-        </pc:sldMkLst>
+        <pc:spChg chg="mod">
+          <ac:chgData name="QUAN, Kenneth (NHS ENGLAND)" userId="95065793-f978-4ba4-bbf9-569df750104a" providerId="ADAL" clId="{065F1351-36F9-48D8-BE8E-FBCB121BCDBE}" dt="2026-05-15T10:40:19.798" v="150" actId="115"/>
+          <ac:spMkLst>
+            <pc:docMk/>
+            <pc:sldMk cId="3245685508" sldId="2145707281"/>
+            <ac:spMk id="3" creationId="{7D5DC6DE-4CC6-384C-9943-60C1476E4858}"/>
+          </ac:spMkLst>
+        </pc:spChg>
+        <pc:spChg chg="mod">
+          <ac:chgData name="QUAN, Kenneth (NHS ENGLAND)" userId="95065793-f978-4ba4-bbf9-569df750104a" providerId="ADAL" clId="{065F1351-36F9-48D8-BE8E-FBCB121BCDBE}" dt="2026-05-15T10:40:28.302" v="153" actId="115"/>
+          <ac:spMkLst>
+            <pc:docMk/>
+            <pc:sldMk cId="3245685508" sldId="2145707281"/>
+            <ac:spMk id="4" creationId="{21F0801A-07C5-2C40-A3F1-CAD1B3CCBB94}"/>
+          </ac:spMkLst>
+        </pc:spChg>
+        <pc:spChg chg="mod">
+          <ac:chgData name="QUAN, Kenneth (NHS ENGLAND)" userId="95065793-f978-4ba4-bbf9-569df750104a" providerId="ADAL" clId="{065F1351-36F9-48D8-BE8E-FBCB121BCDBE}" dt="2026-05-15T10:40:37.150" v="156" actId="115"/>
+          <ac:spMkLst>
+            <pc:docMk/>
+            <pc:sldMk cId="3245685508" sldId="2145707281"/>
+            <ac:spMk id="5" creationId="{FC870246-F5B2-0444-9560-50AA6A44115A}"/>
+          </ac:spMkLst>
+        </pc:spChg>
       </pc:sldChg>
       <pc:sldMasterChg chg="delSldLayout">
-        <pc:chgData name="Kenneth Quan" userId="8574030e-edbf-4370-b155-0677d3997c73" providerId="ADAL" clId="{AFD3F409-7F05-4E79-BF89-036E703EDDDA}" dt="2023-06-12T21:36:45.734" v="1308" actId="47"/>
+        <pc:chgData name="QUAN, Kenneth (NHS ENGLAND)" userId="95065793-f978-4ba4-bbf9-569df750104a" providerId="ADAL" clId="{065F1351-36F9-48D8-BE8E-FBCB121BCDBE}" dt="2026-05-15T10:41:24.581" v="157" actId="47"/>
         <pc:sldMasterMkLst>
           <pc:docMk/>
           <pc:sldMasterMk cId="945044896" sldId="2147483773"/>
         </pc:sldMasterMkLst>
-        <pc:sldLayoutChg chg="del">
-          <pc:chgData name="Kenneth Quan" userId="8574030e-edbf-4370-b155-0677d3997c73" providerId="ADAL" clId="{AFD3F409-7F05-4E79-BF89-036E703EDDDA}" dt="2023-06-12T21:36:42.193" v="1307" actId="47"/>
-          <pc:sldLayoutMkLst>
-            <pc:docMk/>
-            <pc:sldMasterMk cId="945044896" sldId="2147483773"/>
-            <pc:sldLayoutMk cId="2719736198" sldId="2147483803"/>
-          </pc:sldLayoutMkLst>
-        </pc:sldLayoutChg>
-        <pc:sldLayoutChg chg="del">
-          <pc:chgData name="Kenneth Quan" userId="8574030e-edbf-4370-b155-0677d3997c73" providerId="ADAL" clId="{AFD3F409-7F05-4E79-BF89-036E703EDDDA}" dt="2023-06-12T21:36:45.734" v="1308" actId="47"/>
-          <pc:sldLayoutMkLst>
-            <pc:docMk/>
-            <pc:sldMasterMk cId="945044896" sldId="2147483773"/>
-            <pc:sldLayoutMk cId="2728740394" sldId="2147483926"/>
-          </pc:sldLayoutMkLst>
-        </pc:sldLayoutChg>
       </pc:sldMasterChg>
     </pc:docChg>
   </pc:docChgLst>
   <pc:docChgLst>
-    <pc:chgData name="QUAN, Kenneth (NHS ENGLAND)" userId="95065793-f978-4ba4-bbf9-569df750104a" providerId="ADAL" clId="{065F1351-36F9-48D8-BE8E-FBCB121BCDBE}"/>
-    <pc:docChg chg="delSld">
-      <pc:chgData name="QUAN, Kenneth (NHS ENGLAND)" userId="95065793-f978-4ba4-bbf9-569df750104a" providerId="ADAL" clId="{065F1351-36F9-48D8-BE8E-FBCB121BCDBE}" dt="2025-11-17T17:25:55.749" v="0" actId="47"/>
+    <pc:chgData name="QUAN, Kenneth (NHS ENGLAND)" userId="95065793-f978-4ba4-bbf9-569df750104a" providerId="ADAL" clId="{314DC861-081D-4D43-B8AE-4D73C31C07D7}"/>
+    <pc:docChg chg="modSld">
+      <pc:chgData name="QUAN, Kenneth (NHS ENGLAND)" userId="95065793-f978-4ba4-bbf9-569df750104a" providerId="ADAL" clId="{314DC861-081D-4D43-B8AE-4D73C31C07D7}" dt="2026-06-02T08:39:49.389" v="53" actId="20577"/>
       <pc:docMkLst>
         <pc:docMk/>
       </pc:docMkLst>
-      <pc:sldChg chg="del">
-        <pc:chgData name="QUAN, Kenneth (NHS ENGLAND)" userId="95065793-f978-4ba4-bbf9-569df750104a" providerId="ADAL" clId="{065F1351-36F9-48D8-BE8E-FBCB121BCDBE}" dt="2025-11-17T17:25:55.749" v="0" actId="47"/>
+      <pc:sldChg chg="modSp mod">
+        <pc:chgData name="QUAN, Kenneth (NHS ENGLAND)" userId="95065793-f978-4ba4-bbf9-569df750104a" providerId="ADAL" clId="{314DC861-081D-4D43-B8AE-4D73C31C07D7}" dt="2026-06-02T08:26:59.664" v="0" actId="20577"/>
         <pc:sldMkLst>
           <pc:docMk/>
-          <pc:sldMk cId="3418343003" sldId="1946"/>
+          <pc:sldMk cId="230310781" sldId="2145707269"/>
         </pc:sldMkLst>
+        <pc:spChg chg="mod">
+          <ac:chgData name="QUAN, Kenneth (NHS ENGLAND)" userId="95065793-f978-4ba4-bbf9-569df750104a" providerId="ADAL" clId="{314DC861-081D-4D43-B8AE-4D73C31C07D7}" dt="2026-06-02T08:26:59.664" v="0" actId="20577"/>
+          <ac:spMkLst>
+            <pc:docMk/>
+            <pc:sldMk cId="230310781" sldId="2145707269"/>
+            <ac:spMk id="54" creationId="{C8DE7AD2-D274-4121-A246-2F79C9BD3400}"/>
+          </ac:spMkLst>
+        </pc:spChg>
+      </pc:sldChg>
+      <pc:sldChg chg="modSp mod">
+        <pc:chgData name="QUAN, Kenneth (NHS ENGLAND)" userId="95065793-f978-4ba4-bbf9-569df750104a" providerId="ADAL" clId="{314DC861-081D-4D43-B8AE-4D73C31C07D7}" dt="2026-06-02T08:39:49.389" v="53" actId="20577"/>
+        <pc:sldMkLst>
+          <pc:docMk/>
+          <pc:sldMk cId="3686196430" sldId="2145707272"/>
+        </pc:sldMkLst>
+        <pc:spChg chg="mod">
+          <ac:chgData name="QUAN, Kenneth (NHS ENGLAND)" userId="95065793-f978-4ba4-bbf9-569df750104a" providerId="ADAL" clId="{314DC861-081D-4D43-B8AE-4D73C31C07D7}" dt="2026-06-02T08:39:49.389" v="53" actId="20577"/>
+          <ac:spMkLst>
+            <pc:docMk/>
+            <pc:sldMk cId="3686196430" sldId="2145707272"/>
+            <ac:spMk id="23" creationId="{6317C261-60AA-A38B-DB36-09BCCF8071C4}"/>
+          </ac:spMkLst>
+        </pc:spChg>
       </pc:sldChg>
     </pc:docChg>
   </pc:docChgLst>
@@ -355,7 +424,7 @@
           <a:p>
             <a:fld id="{E9EED4C3-48B6-4E4A-9B0F-8051E56348DC}" type="datetimeFigureOut">
               <a:rPr lang="en-GB" smtClean="0"/>
-              <a:t>17/11/2025</a:t>
+              <a:t>02/06/2026</a:t>
             </a:fld>
             <a:endParaRPr lang="en-GB"/>
           </a:p>
@@ -1008,7 +1077,7 @@
                 <a:tabLst/>
                 <a:defRPr/>
               </a:pPr>
-              <a:t>10</a:t>
+              <a:t>9</a:t>
             </a:fld>
             <a:endParaRPr kumimoji="0" lang="en-GB" sz="1200" b="0" i="0" u="none" strike="noStrike" kern="1200" cap="none" spc="0" normalizeH="0" baseline="0" noProof="0">
               <a:ln>
@@ -8504,998 +8573,6 @@
 </file>
 
 <file path=ppt/slideLayouts/slideLayout16.xml><?xml version="1.0" encoding="utf-8"?>
-<p:sldLayout xmlns:a="http://schemas.openxmlformats.org/drawingml/2006/main" xmlns:r="http://schemas.openxmlformats.org/officeDocument/2006/relationships" xmlns:p="http://schemas.openxmlformats.org/presentationml/2006/main" userDrawn="1">
-  <p:cSld name="Quote and image 2">
-    <p:spTree>
-      <p:nvGrpSpPr>
-        <p:cNvPr id="1" name=""/>
-        <p:cNvGrpSpPr/>
-        <p:nvPr/>
-      </p:nvGrpSpPr>
-      <p:grpSpPr>
-        <a:xfrm>
-          <a:off x="0" y="0"/>
-          <a:ext cx="0" cy="0"/>
-          <a:chOff x="0" y="0"/>
-          <a:chExt cx="0" cy="0"/>
-        </a:xfrm>
-      </p:grpSpPr>
-      <p:sp>
-        <p:nvSpPr>
-          <p:cNvPr id="16" name="Hexagon 3">
-            <a:extLst>
-              <a:ext uri="{FF2B5EF4-FFF2-40B4-BE49-F238E27FC236}">
-                <a16:creationId xmlns:a16="http://schemas.microsoft.com/office/drawing/2014/main" id="{76BD5EE1-3E1C-3F40-B887-1FDDC729A5D1}"/>
-              </a:ext>
-            </a:extLst>
-          </p:cNvPr>
-          <p:cNvSpPr/>
-          <p:nvPr userDrawn="1"/>
-        </p:nvSpPr>
-        <p:spPr>
-          <a:xfrm rot="16200000">
-            <a:off x="-605612" y="596720"/>
-            <a:ext cx="6864922" cy="5671482"/>
-          </a:xfrm>
-          <a:custGeom>
-            <a:avLst/>
-            <a:gdLst>
-              <a:gd name="connsiteX0" fmla="*/ 0 w 7261412"/>
-              <a:gd name="connsiteY0" fmla="*/ 3059206 h 6118412"/>
-              <a:gd name="connsiteX1" fmla="*/ 1005194 w 7261412"/>
-              <a:gd name="connsiteY1" fmla="*/ 1 h 6118412"/>
-              <a:gd name="connsiteX2" fmla="*/ 6256218 w 7261412"/>
-              <a:gd name="connsiteY2" fmla="*/ 1 h 6118412"/>
-              <a:gd name="connsiteX3" fmla="*/ 7261412 w 7261412"/>
-              <a:gd name="connsiteY3" fmla="*/ 3059206 h 6118412"/>
-              <a:gd name="connsiteX4" fmla="*/ 6256218 w 7261412"/>
-              <a:gd name="connsiteY4" fmla="*/ 6118411 h 6118412"/>
-              <a:gd name="connsiteX5" fmla="*/ 1005194 w 7261412"/>
-              <a:gd name="connsiteY5" fmla="*/ 6118411 h 6118412"/>
-              <a:gd name="connsiteX6" fmla="*/ 0 w 7261412"/>
-              <a:gd name="connsiteY6" fmla="*/ 3059206 h 6118412"/>
-              <a:gd name="connsiteX0" fmla="*/ 0 w 7267350"/>
-              <a:gd name="connsiteY0" fmla="*/ 3059205 h 6118410"/>
-              <a:gd name="connsiteX1" fmla="*/ 1005194 w 7267350"/>
-              <a:gd name="connsiteY1" fmla="*/ 0 h 6118410"/>
-              <a:gd name="connsiteX2" fmla="*/ 6256218 w 7267350"/>
-              <a:gd name="connsiteY2" fmla="*/ 0 h 6118410"/>
-              <a:gd name="connsiteX3" fmla="*/ 7267350 w 7267350"/>
-              <a:gd name="connsiteY3" fmla="*/ 4341740 h 6118410"/>
-              <a:gd name="connsiteX4" fmla="*/ 6256218 w 7267350"/>
-              <a:gd name="connsiteY4" fmla="*/ 6118410 h 6118410"/>
-              <a:gd name="connsiteX5" fmla="*/ 1005194 w 7267350"/>
-              <a:gd name="connsiteY5" fmla="*/ 6118410 h 6118410"/>
-              <a:gd name="connsiteX6" fmla="*/ 0 w 7267350"/>
-              <a:gd name="connsiteY6" fmla="*/ 3059205 h 6118410"/>
-              <a:gd name="connsiteX0" fmla="*/ 0 w 7277496"/>
-              <a:gd name="connsiteY0" fmla="*/ 3059205 h 6118410"/>
-              <a:gd name="connsiteX1" fmla="*/ 1005194 w 7277496"/>
-              <a:gd name="connsiteY1" fmla="*/ 0 h 6118410"/>
-              <a:gd name="connsiteX2" fmla="*/ 7277496 w 7277496"/>
-              <a:gd name="connsiteY2" fmla="*/ 457200 h 6118410"/>
-              <a:gd name="connsiteX3" fmla="*/ 7267350 w 7277496"/>
-              <a:gd name="connsiteY3" fmla="*/ 4341740 h 6118410"/>
-              <a:gd name="connsiteX4" fmla="*/ 6256218 w 7277496"/>
-              <a:gd name="connsiteY4" fmla="*/ 6118410 h 6118410"/>
-              <a:gd name="connsiteX5" fmla="*/ 1005194 w 7277496"/>
-              <a:gd name="connsiteY5" fmla="*/ 6118410 h 6118410"/>
-              <a:gd name="connsiteX6" fmla="*/ 0 w 7277496"/>
-              <a:gd name="connsiteY6" fmla="*/ 3059205 h 6118410"/>
-              <a:gd name="connsiteX0" fmla="*/ 0 w 7277496"/>
-              <a:gd name="connsiteY0" fmla="*/ 2607943 h 5667148"/>
-              <a:gd name="connsiteX1" fmla="*/ 405490 w 7277496"/>
-              <a:gd name="connsiteY1" fmla="*/ 0 h 5667148"/>
-              <a:gd name="connsiteX2" fmla="*/ 7277496 w 7277496"/>
-              <a:gd name="connsiteY2" fmla="*/ 5938 h 5667148"/>
-              <a:gd name="connsiteX3" fmla="*/ 7267350 w 7277496"/>
-              <a:gd name="connsiteY3" fmla="*/ 3890478 h 5667148"/>
-              <a:gd name="connsiteX4" fmla="*/ 6256218 w 7277496"/>
-              <a:gd name="connsiteY4" fmla="*/ 5667148 h 5667148"/>
-              <a:gd name="connsiteX5" fmla="*/ 1005194 w 7277496"/>
-              <a:gd name="connsiteY5" fmla="*/ 5667148 h 5667148"/>
-              <a:gd name="connsiteX6" fmla="*/ 0 w 7277496"/>
-              <a:gd name="connsiteY6" fmla="*/ 2607943 h 5667148"/>
-              <a:gd name="connsiteX0" fmla="*/ 4209 w 6872006"/>
-              <a:gd name="connsiteY0" fmla="*/ 3462966 h 5667148"/>
-              <a:gd name="connsiteX1" fmla="*/ 0 w 6872006"/>
-              <a:gd name="connsiteY1" fmla="*/ 0 h 5667148"/>
-              <a:gd name="connsiteX2" fmla="*/ 6872006 w 6872006"/>
-              <a:gd name="connsiteY2" fmla="*/ 5938 h 5667148"/>
-              <a:gd name="connsiteX3" fmla="*/ 6861860 w 6872006"/>
-              <a:gd name="connsiteY3" fmla="*/ 3890478 h 5667148"/>
-              <a:gd name="connsiteX4" fmla="*/ 5850728 w 6872006"/>
-              <a:gd name="connsiteY4" fmla="*/ 5667148 h 5667148"/>
-              <a:gd name="connsiteX5" fmla="*/ 599704 w 6872006"/>
-              <a:gd name="connsiteY5" fmla="*/ 5667148 h 5667148"/>
-              <a:gd name="connsiteX6" fmla="*/ 4209 w 6872006"/>
-              <a:gd name="connsiteY6" fmla="*/ 3462966 h 5667148"/>
-              <a:gd name="connsiteX0" fmla="*/ 4209 w 6872006"/>
-              <a:gd name="connsiteY0" fmla="*/ 3462966 h 5667148"/>
-              <a:gd name="connsiteX1" fmla="*/ 0 w 6872006"/>
-              <a:gd name="connsiteY1" fmla="*/ 0 h 5667148"/>
-              <a:gd name="connsiteX2" fmla="*/ 6872006 w 6872006"/>
-              <a:gd name="connsiteY2" fmla="*/ 5938 h 5667148"/>
-              <a:gd name="connsiteX3" fmla="*/ 6861860 w 6872006"/>
-              <a:gd name="connsiteY3" fmla="*/ 3890478 h 5667148"/>
-              <a:gd name="connsiteX4" fmla="*/ 5850728 w 6872006"/>
-              <a:gd name="connsiteY4" fmla="*/ 5667148 h 5667148"/>
-              <a:gd name="connsiteX5" fmla="*/ 1300348 w 6872006"/>
-              <a:gd name="connsiteY5" fmla="*/ 5661210 h 5667148"/>
-              <a:gd name="connsiteX6" fmla="*/ 4209 w 6872006"/>
-              <a:gd name="connsiteY6" fmla="*/ 3462966 h 5667148"/>
-              <a:gd name="connsiteX0" fmla="*/ 4209 w 6872006"/>
-              <a:gd name="connsiteY0" fmla="*/ 3462966 h 5667148"/>
-              <a:gd name="connsiteX1" fmla="*/ 0 w 6872006"/>
-              <a:gd name="connsiteY1" fmla="*/ 0 h 5667148"/>
-              <a:gd name="connsiteX2" fmla="*/ 6872006 w 6872006"/>
-              <a:gd name="connsiteY2" fmla="*/ 5938 h 5667148"/>
-              <a:gd name="connsiteX3" fmla="*/ 6861860 w 6872006"/>
-              <a:gd name="connsiteY3" fmla="*/ 3890478 h 5667148"/>
-              <a:gd name="connsiteX4" fmla="*/ 5860353 w 6872006"/>
-              <a:gd name="connsiteY4" fmla="*/ 5667148 h 5667148"/>
-              <a:gd name="connsiteX5" fmla="*/ 1300348 w 6872006"/>
-              <a:gd name="connsiteY5" fmla="*/ 5661210 h 5667148"/>
-              <a:gd name="connsiteX6" fmla="*/ 4209 w 6872006"/>
-              <a:gd name="connsiteY6" fmla="*/ 3462966 h 5667148"/>
-              <a:gd name="connsiteX0" fmla="*/ 4209 w 6872006"/>
-              <a:gd name="connsiteY0" fmla="*/ 3462966 h 5667148"/>
-              <a:gd name="connsiteX1" fmla="*/ 0 w 6872006"/>
-              <a:gd name="connsiteY1" fmla="*/ 0 h 5667148"/>
-              <a:gd name="connsiteX2" fmla="*/ 6872006 w 6872006"/>
-              <a:gd name="connsiteY2" fmla="*/ 5938 h 5667148"/>
-              <a:gd name="connsiteX3" fmla="*/ 6566227 w 6872006"/>
-              <a:gd name="connsiteY3" fmla="*/ 3257961 h 5667148"/>
-              <a:gd name="connsiteX4" fmla="*/ 5860353 w 6872006"/>
-              <a:gd name="connsiteY4" fmla="*/ 5667148 h 5667148"/>
-              <a:gd name="connsiteX5" fmla="*/ 1300348 w 6872006"/>
-              <a:gd name="connsiteY5" fmla="*/ 5661210 h 5667148"/>
-              <a:gd name="connsiteX6" fmla="*/ 4209 w 6872006"/>
-              <a:gd name="connsiteY6" fmla="*/ 3462966 h 5667148"/>
-              <a:gd name="connsiteX0" fmla="*/ 4209 w 6872006"/>
-              <a:gd name="connsiteY0" fmla="*/ 3462966 h 5667148"/>
-              <a:gd name="connsiteX1" fmla="*/ 0 w 6872006"/>
-              <a:gd name="connsiteY1" fmla="*/ 0 h 5667148"/>
-              <a:gd name="connsiteX2" fmla="*/ 6872006 w 6872006"/>
-              <a:gd name="connsiteY2" fmla="*/ 5938 h 5667148"/>
-              <a:gd name="connsiteX3" fmla="*/ 6861860 w 6872006"/>
-              <a:gd name="connsiteY3" fmla="*/ 3443591 h 5667148"/>
-              <a:gd name="connsiteX4" fmla="*/ 5860353 w 6872006"/>
-              <a:gd name="connsiteY4" fmla="*/ 5667148 h 5667148"/>
-              <a:gd name="connsiteX5" fmla="*/ 1300348 w 6872006"/>
-              <a:gd name="connsiteY5" fmla="*/ 5661210 h 5667148"/>
-              <a:gd name="connsiteX6" fmla="*/ 4209 w 6872006"/>
-              <a:gd name="connsiteY6" fmla="*/ 3462966 h 5667148"/>
-              <a:gd name="connsiteX0" fmla="*/ 4209 w 6872006"/>
-              <a:gd name="connsiteY0" fmla="*/ 3462966 h 5661210"/>
-              <a:gd name="connsiteX1" fmla="*/ 0 w 6872006"/>
-              <a:gd name="connsiteY1" fmla="*/ 0 h 5661210"/>
-              <a:gd name="connsiteX2" fmla="*/ 6872006 w 6872006"/>
-              <a:gd name="connsiteY2" fmla="*/ 5938 h 5661210"/>
-              <a:gd name="connsiteX3" fmla="*/ 6861860 w 6872006"/>
-              <a:gd name="connsiteY3" fmla="*/ 3443591 h 5661210"/>
-              <a:gd name="connsiteX4" fmla="*/ 4973453 w 6872006"/>
-              <a:gd name="connsiteY4" fmla="*/ 5089632 h 5661210"/>
-              <a:gd name="connsiteX5" fmla="*/ 1300348 w 6872006"/>
-              <a:gd name="connsiteY5" fmla="*/ 5661210 h 5661210"/>
-              <a:gd name="connsiteX6" fmla="*/ 4209 w 6872006"/>
-              <a:gd name="connsiteY6" fmla="*/ 3462966 h 5661210"/>
-              <a:gd name="connsiteX0" fmla="*/ 4209 w 6872006"/>
-              <a:gd name="connsiteY0" fmla="*/ 3462966 h 5667148"/>
-              <a:gd name="connsiteX1" fmla="*/ 0 w 6872006"/>
-              <a:gd name="connsiteY1" fmla="*/ 0 h 5667148"/>
-              <a:gd name="connsiteX2" fmla="*/ 6872006 w 6872006"/>
-              <a:gd name="connsiteY2" fmla="*/ 5938 h 5667148"/>
-              <a:gd name="connsiteX3" fmla="*/ 6861860 w 6872006"/>
-              <a:gd name="connsiteY3" fmla="*/ 3443591 h 5667148"/>
-              <a:gd name="connsiteX4" fmla="*/ 5571595 w 6872006"/>
-              <a:gd name="connsiteY4" fmla="*/ 5667148 h 5667148"/>
-              <a:gd name="connsiteX5" fmla="*/ 1300348 w 6872006"/>
-              <a:gd name="connsiteY5" fmla="*/ 5661210 h 5667148"/>
-              <a:gd name="connsiteX6" fmla="*/ 4209 w 6872006"/>
-              <a:gd name="connsiteY6" fmla="*/ 3462966 h 5667148"/>
-              <a:gd name="connsiteX0" fmla="*/ 4209 w 6872006"/>
-              <a:gd name="connsiteY0" fmla="*/ 3462966 h 5667148"/>
-              <a:gd name="connsiteX1" fmla="*/ 0 w 6872006"/>
-              <a:gd name="connsiteY1" fmla="*/ 0 h 5667148"/>
-              <a:gd name="connsiteX2" fmla="*/ 6872006 w 6872006"/>
-              <a:gd name="connsiteY2" fmla="*/ 5938 h 5667148"/>
-              <a:gd name="connsiteX3" fmla="*/ 6861860 w 6872006"/>
-              <a:gd name="connsiteY3" fmla="*/ 3443591 h 5667148"/>
-              <a:gd name="connsiteX4" fmla="*/ 5571595 w 6872006"/>
-              <a:gd name="connsiteY4" fmla="*/ 5667148 h 5667148"/>
-              <a:gd name="connsiteX5" fmla="*/ 1018466 w 6872006"/>
-              <a:gd name="connsiteY5" fmla="*/ 5661210 h 5667148"/>
-              <a:gd name="connsiteX6" fmla="*/ 4209 w 6872006"/>
-              <a:gd name="connsiteY6" fmla="*/ 3462966 h 5667148"/>
-              <a:gd name="connsiteX0" fmla="*/ 4209 w 6872006"/>
-              <a:gd name="connsiteY0" fmla="*/ 3861727 h 5667148"/>
-              <a:gd name="connsiteX1" fmla="*/ 0 w 6872006"/>
-              <a:gd name="connsiteY1" fmla="*/ 0 h 5667148"/>
-              <a:gd name="connsiteX2" fmla="*/ 6872006 w 6872006"/>
-              <a:gd name="connsiteY2" fmla="*/ 5938 h 5667148"/>
-              <a:gd name="connsiteX3" fmla="*/ 6861860 w 6872006"/>
-              <a:gd name="connsiteY3" fmla="*/ 3443591 h 5667148"/>
-              <a:gd name="connsiteX4" fmla="*/ 5571595 w 6872006"/>
-              <a:gd name="connsiteY4" fmla="*/ 5667148 h 5667148"/>
-              <a:gd name="connsiteX5" fmla="*/ 1018466 w 6872006"/>
-              <a:gd name="connsiteY5" fmla="*/ 5661210 h 5667148"/>
-              <a:gd name="connsiteX6" fmla="*/ 4209 w 6872006"/>
-              <a:gd name="connsiteY6" fmla="*/ 3861727 h 5667148"/>
-              <a:gd name="connsiteX0" fmla="*/ 0 w 6889363"/>
-              <a:gd name="connsiteY0" fmla="*/ 3844474 h 5667148"/>
-              <a:gd name="connsiteX1" fmla="*/ 17357 w 6889363"/>
-              <a:gd name="connsiteY1" fmla="*/ 0 h 5667148"/>
-              <a:gd name="connsiteX2" fmla="*/ 6889363 w 6889363"/>
-              <a:gd name="connsiteY2" fmla="*/ 5938 h 5667148"/>
-              <a:gd name="connsiteX3" fmla="*/ 6879217 w 6889363"/>
-              <a:gd name="connsiteY3" fmla="*/ 3443591 h 5667148"/>
-              <a:gd name="connsiteX4" fmla="*/ 5588952 w 6889363"/>
-              <a:gd name="connsiteY4" fmla="*/ 5667148 h 5667148"/>
-              <a:gd name="connsiteX5" fmla="*/ 1035823 w 6889363"/>
-              <a:gd name="connsiteY5" fmla="*/ 5661210 h 5667148"/>
-              <a:gd name="connsiteX6" fmla="*/ 0 w 6889363"/>
-              <a:gd name="connsiteY6" fmla="*/ 3844474 h 5667148"/>
-              <a:gd name="connsiteX0" fmla="*/ 0 w 6910929"/>
-              <a:gd name="connsiteY0" fmla="*/ 3831537 h 5667148"/>
-              <a:gd name="connsiteX1" fmla="*/ 38923 w 6910929"/>
-              <a:gd name="connsiteY1" fmla="*/ 0 h 5667148"/>
-              <a:gd name="connsiteX2" fmla="*/ 6910929 w 6910929"/>
-              <a:gd name="connsiteY2" fmla="*/ 5938 h 5667148"/>
-              <a:gd name="connsiteX3" fmla="*/ 6900783 w 6910929"/>
-              <a:gd name="connsiteY3" fmla="*/ 3443591 h 5667148"/>
-              <a:gd name="connsiteX4" fmla="*/ 5610518 w 6910929"/>
-              <a:gd name="connsiteY4" fmla="*/ 5667148 h 5667148"/>
-              <a:gd name="connsiteX5" fmla="*/ 1057389 w 6910929"/>
-              <a:gd name="connsiteY5" fmla="*/ 5661210 h 5667148"/>
-              <a:gd name="connsiteX6" fmla="*/ 0 w 6910929"/>
-              <a:gd name="connsiteY6" fmla="*/ 3831537 h 5667148"/>
-              <a:gd name="connsiteX0" fmla="*/ 0 w 6910929"/>
-              <a:gd name="connsiteY0" fmla="*/ 3831537 h 5667148"/>
-              <a:gd name="connsiteX1" fmla="*/ 13042 w 6910929"/>
-              <a:gd name="connsiteY1" fmla="*/ 0 h 5667148"/>
-              <a:gd name="connsiteX2" fmla="*/ 6910929 w 6910929"/>
-              <a:gd name="connsiteY2" fmla="*/ 5938 h 5667148"/>
-              <a:gd name="connsiteX3" fmla="*/ 6900783 w 6910929"/>
-              <a:gd name="connsiteY3" fmla="*/ 3443591 h 5667148"/>
-              <a:gd name="connsiteX4" fmla="*/ 5610518 w 6910929"/>
-              <a:gd name="connsiteY4" fmla="*/ 5667148 h 5667148"/>
-              <a:gd name="connsiteX5" fmla="*/ 1057389 w 6910929"/>
-              <a:gd name="connsiteY5" fmla="*/ 5661210 h 5667148"/>
-              <a:gd name="connsiteX6" fmla="*/ 0 w 6910929"/>
-              <a:gd name="connsiteY6" fmla="*/ 3831537 h 5667148"/>
-              <a:gd name="connsiteX0" fmla="*/ 0 w 6910929"/>
-              <a:gd name="connsiteY0" fmla="*/ 3825962 h 5661573"/>
-              <a:gd name="connsiteX1" fmla="*/ 7423 w 6910929"/>
-              <a:gd name="connsiteY1" fmla="*/ 0 h 5661573"/>
-              <a:gd name="connsiteX2" fmla="*/ 6910929 w 6910929"/>
-              <a:gd name="connsiteY2" fmla="*/ 363 h 5661573"/>
-              <a:gd name="connsiteX3" fmla="*/ 6900783 w 6910929"/>
-              <a:gd name="connsiteY3" fmla="*/ 3438016 h 5661573"/>
-              <a:gd name="connsiteX4" fmla="*/ 5610518 w 6910929"/>
-              <a:gd name="connsiteY4" fmla="*/ 5661573 h 5661573"/>
-              <a:gd name="connsiteX5" fmla="*/ 1057389 w 6910929"/>
-              <a:gd name="connsiteY5" fmla="*/ 5655635 h 5661573"/>
-              <a:gd name="connsiteX6" fmla="*/ 0 w 6910929"/>
-              <a:gd name="connsiteY6" fmla="*/ 3825962 h 5661573"/>
-              <a:gd name="connsiteX0" fmla="*/ 56137 w 6967066"/>
-              <a:gd name="connsiteY0" fmla="*/ 3832564 h 5668175"/>
-              <a:gd name="connsiteX1" fmla="*/ 352 w 6967066"/>
-              <a:gd name="connsiteY1" fmla="*/ 0 h 5668175"/>
-              <a:gd name="connsiteX2" fmla="*/ 6967066 w 6967066"/>
-              <a:gd name="connsiteY2" fmla="*/ 6965 h 5668175"/>
-              <a:gd name="connsiteX3" fmla="*/ 6956920 w 6967066"/>
-              <a:gd name="connsiteY3" fmla="*/ 3444618 h 5668175"/>
-              <a:gd name="connsiteX4" fmla="*/ 5666655 w 6967066"/>
-              <a:gd name="connsiteY4" fmla="*/ 5668175 h 5668175"/>
-              <a:gd name="connsiteX5" fmla="*/ 1113526 w 6967066"/>
-              <a:gd name="connsiteY5" fmla="*/ 5662237 h 5668175"/>
-              <a:gd name="connsiteX6" fmla="*/ 56137 w 6967066"/>
-              <a:gd name="connsiteY6" fmla="*/ 3832564 h 5668175"/>
-              <a:gd name="connsiteX0" fmla="*/ 0 w 6910929"/>
-              <a:gd name="connsiteY0" fmla="*/ 3825599 h 5661210"/>
-              <a:gd name="connsiteX1" fmla="*/ 44012 w 6910929"/>
-              <a:gd name="connsiteY1" fmla="*/ 45852 h 5661210"/>
-              <a:gd name="connsiteX2" fmla="*/ 6910929 w 6910929"/>
-              <a:gd name="connsiteY2" fmla="*/ 0 h 5661210"/>
-              <a:gd name="connsiteX3" fmla="*/ 6900783 w 6910929"/>
-              <a:gd name="connsiteY3" fmla="*/ 3437653 h 5661210"/>
-              <a:gd name="connsiteX4" fmla="*/ 5610518 w 6910929"/>
-              <a:gd name="connsiteY4" fmla="*/ 5661210 h 5661210"/>
-              <a:gd name="connsiteX5" fmla="*/ 1057389 w 6910929"/>
-              <a:gd name="connsiteY5" fmla="*/ 5655272 h 5661210"/>
-              <a:gd name="connsiteX6" fmla="*/ 0 w 6910929"/>
-              <a:gd name="connsiteY6" fmla="*/ 3825599 h 5661210"/>
-              <a:gd name="connsiteX0" fmla="*/ 996 w 6911925"/>
-              <a:gd name="connsiteY0" fmla="*/ 3829263 h 5664874"/>
-              <a:gd name="connsiteX1" fmla="*/ 1763 w 6911925"/>
-              <a:gd name="connsiteY1" fmla="*/ 0 h 5664874"/>
-              <a:gd name="connsiteX2" fmla="*/ 6911925 w 6911925"/>
-              <a:gd name="connsiteY2" fmla="*/ 3664 h 5664874"/>
-              <a:gd name="connsiteX3" fmla="*/ 6901779 w 6911925"/>
-              <a:gd name="connsiteY3" fmla="*/ 3441317 h 5664874"/>
-              <a:gd name="connsiteX4" fmla="*/ 5611514 w 6911925"/>
-              <a:gd name="connsiteY4" fmla="*/ 5664874 h 5664874"/>
-              <a:gd name="connsiteX5" fmla="*/ 1058385 w 6911925"/>
-              <a:gd name="connsiteY5" fmla="*/ 5658936 h 5664874"/>
-              <a:gd name="connsiteX6" fmla="*/ 996 w 6911925"/>
-              <a:gd name="connsiteY6" fmla="*/ 3829263 h 5664874"/>
-              <a:gd name="connsiteX0" fmla="*/ 3982 w 6914911"/>
-              <a:gd name="connsiteY0" fmla="*/ 3835865 h 5671476"/>
-              <a:gd name="connsiteX1" fmla="*/ 1421 w 6914911"/>
-              <a:gd name="connsiteY1" fmla="*/ 0 h 5671476"/>
-              <a:gd name="connsiteX2" fmla="*/ 6914911 w 6914911"/>
-              <a:gd name="connsiteY2" fmla="*/ 10266 h 5671476"/>
-              <a:gd name="connsiteX3" fmla="*/ 6904765 w 6914911"/>
-              <a:gd name="connsiteY3" fmla="*/ 3447919 h 5671476"/>
-              <a:gd name="connsiteX4" fmla="*/ 5614500 w 6914911"/>
-              <a:gd name="connsiteY4" fmla="*/ 5671476 h 5671476"/>
-              <a:gd name="connsiteX5" fmla="*/ 1061371 w 6914911"/>
-              <a:gd name="connsiteY5" fmla="*/ 5665538 h 5671476"/>
-              <a:gd name="connsiteX6" fmla="*/ 3982 w 6914911"/>
-              <a:gd name="connsiteY6" fmla="*/ 3835865 h 5671476"/>
-              <a:gd name="connsiteX0" fmla="*/ 3982 w 6904765"/>
-              <a:gd name="connsiteY0" fmla="*/ 3835865 h 5671476"/>
-              <a:gd name="connsiteX1" fmla="*/ 1421 w 6904765"/>
-              <a:gd name="connsiteY1" fmla="*/ 0 h 5671476"/>
-              <a:gd name="connsiteX2" fmla="*/ 6815114 w 6904765"/>
-              <a:gd name="connsiteY2" fmla="*/ 49879 h 5671476"/>
-              <a:gd name="connsiteX3" fmla="*/ 6904765 w 6904765"/>
-              <a:gd name="connsiteY3" fmla="*/ 3447919 h 5671476"/>
-              <a:gd name="connsiteX4" fmla="*/ 5614500 w 6904765"/>
-              <a:gd name="connsiteY4" fmla="*/ 5671476 h 5671476"/>
-              <a:gd name="connsiteX5" fmla="*/ 1061371 w 6904765"/>
-              <a:gd name="connsiteY5" fmla="*/ 5665538 h 5671476"/>
-              <a:gd name="connsiteX6" fmla="*/ 3982 w 6904765"/>
-              <a:gd name="connsiteY6" fmla="*/ 3835865 h 5671476"/>
-              <a:gd name="connsiteX0" fmla="*/ 3982 w 6914914"/>
-              <a:gd name="connsiteY0" fmla="*/ 3835865 h 5671476"/>
-              <a:gd name="connsiteX1" fmla="*/ 1421 w 6914914"/>
-              <a:gd name="connsiteY1" fmla="*/ 0 h 5671476"/>
-              <a:gd name="connsiteX2" fmla="*/ 6914914 w 6914914"/>
-              <a:gd name="connsiteY2" fmla="*/ 6965 h 5671476"/>
-              <a:gd name="connsiteX3" fmla="*/ 6904765 w 6914914"/>
-              <a:gd name="connsiteY3" fmla="*/ 3447919 h 5671476"/>
-              <a:gd name="connsiteX4" fmla="*/ 5614500 w 6914914"/>
-              <a:gd name="connsiteY4" fmla="*/ 5671476 h 5671476"/>
-              <a:gd name="connsiteX5" fmla="*/ 1061371 w 6914914"/>
-              <a:gd name="connsiteY5" fmla="*/ 5665538 h 5671476"/>
-              <a:gd name="connsiteX6" fmla="*/ 3982 w 6914914"/>
-              <a:gd name="connsiteY6" fmla="*/ 3835865 h 5671476"/>
-              <a:gd name="connsiteX0" fmla="*/ 3982 w 6917563"/>
-              <a:gd name="connsiteY0" fmla="*/ 3835865 h 5671476"/>
-              <a:gd name="connsiteX1" fmla="*/ 1421 w 6917563"/>
-              <a:gd name="connsiteY1" fmla="*/ 0 h 5671476"/>
-              <a:gd name="connsiteX2" fmla="*/ 6914914 w 6917563"/>
-              <a:gd name="connsiteY2" fmla="*/ 6965 h 5671476"/>
-              <a:gd name="connsiteX3" fmla="*/ 6917563 w 6917563"/>
-              <a:gd name="connsiteY3" fmla="*/ 3435219 h 5671476"/>
-              <a:gd name="connsiteX4" fmla="*/ 5614500 w 6917563"/>
-              <a:gd name="connsiteY4" fmla="*/ 5671476 h 5671476"/>
-              <a:gd name="connsiteX5" fmla="*/ 1061371 w 6917563"/>
-              <a:gd name="connsiteY5" fmla="*/ 5665538 h 5671476"/>
-              <a:gd name="connsiteX6" fmla="*/ 3982 w 6917563"/>
-              <a:gd name="connsiteY6" fmla="*/ 3835865 h 5671476"/>
-              <a:gd name="connsiteX0" fmla="*/ 3982 w 6917563"/>
-              <a:gd name="connsiteY0" fmla="*/ 3835865 h 5671476"/>
-              <a:gd name="connsiteX1" fmla="*/ 1421 w 6917563"/>
-              <a:gd name="connsiteY1" fmla="*/ 0 h 5671476"/>
-              <a:gd name="connsiteX2" fmla="*/ 6914917 w 6917563"/>
-              <a:gd name="connsiteY2" fmla="*/ 615 h 5671476"/>
-              <a:gd name="connsiteX3" fmla="*/ 6917563 w 6917563"/>
-              <a:gd name="connsiteY3" fmla="*/ 3435219 h 5671476"/>
-              <a:gd name="connsiteX4" fmla="*/ 5614500 w 6917563"/>
-              <a:gd name="connsiteY4" fmla="*/ 5671476 h 5671476"/>
-              <a:gd name="connsiteX5" fmla="*/ 1061371 w 6917563"/>
-              <a:gd name="connsiteY5" fmla="*/ 5665538 h 5671476"/>
-              <a:gd name="connsiteX6" fmla="*/ 3982 w 6917563"/>
-              <a:gd name="connsiteY6" fmla="*/ 3835865 h 5671476"/>
-              <a:gd name="connsiteX0" fmla="*/ 998 w 6917905"/>
-              <a:gd name="connsiteY0" fmla="*/ 3862276 h 5671476"/>
-              <a:gd name="connsiteX1" fmla="*/ 1763 w 6917905"/>
-              <a:gd name="connsiteY1" fmla="*/ 0 h 5671476"/>
-              <a:gd name="connsiteX2" fmla="*/ 6915259 w 6917905"/>
-              <a:gd name="connsiteY2" fmla="*/ 615 h 5671476"/>
-              <a:gd name="connsiteX3" fmla="*/ 6917905 w 6917905"/>
-              <a:gd name="connsiteY3" fmla="*/ 3435219 h 5671476"/>
-              <a:gd name="connsiteX4" fmla="*/ 5614842 w 6917905"/>
-              <a:gd name="connsiteY4" fmla="*/ 5671476 h 5671476"/>
-              <a:gd name="connsiteX5" fmla="*/ 1061713 w 6917905"/>
-              <a:gd name="connsiteY5" fmla="*/ 5665538 h 5671476"/>
-              <a:gd name="connsiteX6" fmla="*/ 998 w 6917905"/>
-              <a:gd name="connsiteY6" fmla="*/ 3862276 h 5671476"/>
-              <a:gd name="connsiteX0" fmla="*/ 998 w 6917905"/>
-              <a:gd name="connsiteY0" fmla="*/ 3862276 h 5671476"/>
-              <a:gd name="connsiteX1" fmla="*/ 1763 w 6917905"/>
-              <a:gd name="connsiteY1" fmla="*/ 0 h 5671476"/>
-              <a:gd name="connsiteX2" fmla="*/ 6915259 w 6917905"/>
-              <a:gd name="connsiteY2" fmla="*/ 615 h 5671476"/>
-              <a:gd name="connsiteX3" fmla="*/ 6917905 w 6917905"/>
-              <a:gd name="connsiteY3" fmla="*/ 3435219 h 5671476"/>
-              <a:gd name="connsiteX4" fmla="*/ 5614842 w 6917905"/>
-              <a:gd name="connsiteY4" fmla="*/ 5671476 h 5671476"/>
-              <a:gd name="connsiteX5" fmla="*/ 1045081 w 6917905"/>
-              <a:gd name="connsiteY5" fmla="*/ 5668839 h 5671476"/>
-              <a:gd name="connsiteX6" fmla="*/ 998 w 6917905"/>
-              <a:gd name="connsiteY6" fmla="*/ 3862276 h 5671476"/>
-              <a:gd name="connsiteX0" fmla="*/ 998 w 6917905"/>
-              <a:gd name="connsiteY0" fmla="*/ 3862276 h 5668839"/>
-              <a:gd name="connsiteX1" fmla="*/ 1763 w 6917905"/>
-              <a:gd name="connsiteY1" fmla="*/ 0 h 5668839"/>
-              <a:gd name="connsiteX2" fmla="*/ 6915259 w 6917905"/>
-              <a:gd name="connsiteY2" fmla="*/ 615 h 5668839"/>
-              <a:gd name="connsiteX3" fmla="*/ 6917905 w 6917905"/>
-              <a:gd name="connsiteY3" fmla="*/ 3435219 h 5668839"/>
-              <a:gd name="connsiteX4" fmla="*/ 5511718 w 6917905"/>
-              <a:gd name="connsiteY4" fmla="*/ 5588948 h 5668839"/>
-              <a:gd name="connsiteX5" fmla="*/ 1045081 w 6917905"/>
-              <a:gd name="connsiteY5" fmla="*/ 5668839 h 5668839"/>
-              <a:gd name="connsiteX6" fmla="*/ 998 w 6917905"/>
-              <a:gd name="connsiteY6" fmla="*/ 3862276 h 5668839"/>
-              <a:gd name="connsiteX0" fmla="*/ 998 w 6917905"/>
-              <a:gd name="connsiteY0" fmla="*/ 3862276 h 5674780"/>
-              <a:gd name="connsiteX1" fmla="*/ 1763 w 6917905"/>
-              <a:gd name="connsiteY1" fmla="*/ 0 h 5674780"/>
-              <a:gd name="connsiteX2" fmla="*/ 6915259 w 6917905"/>
-              <a:gd name="connsiteY2" fmla="*/ 615 h 5674780"/>
-              <a:gd name="connsiteX3" fmla="*/ 6917905 w 6917905"/>
-              <a:gd name="connsiteY3" fmla="*/ 3435219 h 5674780"/>
-              <a:gd name="connsiteX4" fmla="*/ 5614843 w 6917905"/>
-              <a:gd name="connsiteY4" fmla="*/ 5674780 h 5674780"/>
-              <a:gd name="connsiteX5" fmla="*/ 1045081 w 6917905"/>
-              <a:gd name="connsiteY5" fmla="*/ 5668839 h 5674780"/>
-              <a:gd name="connsiteX6" fmla="*/ 998 w 6917905"/>
-              <a:gd name="connsiteY6" fmla="*/ 3862276 h 5674780"/>
-              <a:gd name="connsiteX0" fmla="*/ 998 w 6917905"/>
-              <a:gd name="connsiteY0" fmla="*/ 3862276 h 5668839"/>
-              <a:gd name="connsiteX1" fmla="*/ 1763 w 6917905"/>
-              <a:gd name="connsiteY1" fmla="*/ 0 h 5668839"/>
-              <a:gd name="connsiteX2" fmla="*/ 6915259 w 6917905"/>
-              <a:gd name="connsiteY2" fmla="*/ 615 h 5668839"/>
-              <a:gd name="connsiteX3" fmla="*/ 6917905 w 6917905"/>
-              <a:gd name="connsiteY3" fmla="*/ 3435219 h 5668839"/>
-              <a:gd name="connsiteX4" fmla="*/ 5608190 w 6917905"/>
-              <a:gd name="connsiteY4" fmla="*/ 5645070 h 5668839"/>
-              <a:gd name="connsiteX5" fmla="*/ 1045081 w 6917905"/>
-              <a:gd name="connsiteY5" fmla="*/ 5668839 h 5668839"/>
-              <a:gd name="connsiteX6" fmla="*/ 998 w 6917905"/>
-              <a:gd name="connsiteY6" fmla="*/ 3862276 h 5668839"/>
-              <a:gd name="connsiteX0" fmla="*/ 998 w 6917905"/>
-              <a:gd name="connsiteY0" fmla="*/ 3862276 h 5671482"/>
-              <a:gd name="connsiteX1" fmla="*/ 1763 w 6917905"/>
-              <a:gd name="connsiteY1" fmla="*/ 0 h 5671482"/>
-              <a:gd name="connsiteX2" fmla="*/ 6915259 w 6917905"/>
-              <a:gd name="connsiteY2" fmla="*/ 615 h 5671482"/>
-              <a:gd name="connsiteX3" fmla="*/ 6917905 w 6917905"/>
-              <a:gd name="connsiteY3" fmla="*/ 3435219 h 5671482"/>
-              <a:gd name="connsiteX4" fmla="*/ 5614844 w 6917905"/>
-              <a:gd name="connsiteY4" fmla="*/ 5671482 h 5671482"/>
-              <a:gd name="connsiteX5" fmla="*/ 1045081 w 6917905"/>
-              <a:gd name="connsiteY5" fmla="*/ 5668839 h 5671482"/>
-              <a:gd name="connsiteX6" fmla="*/ 998 w 6917905"/>
-              <a:gd name="connsiteY6" fmla="*/ 3862276 h 5671482"/>
-              <a:gd name="connsiteX0" fmla="*/ 998 w 6917905"/>
-              <a:gd name="connsiteY0" fmla="*/ 3862276 h 5671482"/>
-              <a:gd name="connsiteX1" fmla="*/ 1763 w 6917905"/>
-              <a:gd name="connsiteY1" fmla="*/ 0 h 5671482"/>
-              <a:gd name="connsiteX2" fmla="*/ 6915259 w 6917905"/>
-              <a:gd name="connsiteY2" fmla="*/ 615 h 5671482"/>
-              <a:gd name="connsiteX3" fmla="*/ 6917905 w 6917905"/>
-              <a:gd name="connsiteY3" fmla="*/ 3435219 h 5671482"/>
-              <a:gd name="connsiteX4" fmla="*/ 5614844 w 6917905"/>
-              <a:gd name="connsiteY4" fmla="*/ 5671482 h 5671482"/>
-              <a:gd name="connsiteX5" fmla="*/ 1038428 w 6917905"/>
-              <a:gd name="connsiteY5" fmla="*/ 5668839 h 5671482"/>
-              <a:gd name="connsiteX6" fmla="*/ 998 w 6917905"/>
-              <a:gd name="connsiteY6" fmla="*/ 3862276 h 5671482"/>
-            </a:gdLst>
-            <a:ahLst/>
-            <a:cxnLst>
-              <a:cxn ang="0">
-                <a:pos x="connsiteX0" y="connsiteY0"/>
-              </a:cxn>
-              <a:cxn ang="0">
-                <a:pos x="connsiteX1" y="connsiteY1"/>
-              </a:cxn>
-              <a:cxn ang="0">
-                <a:pos x="connsiteX2" y="connsiteY2"/>
-              </a:cxn>
-              <a:cxn ang="0">
-                <a:pos x="connsiteX3" y="connsiteY3"/>
-              </a:cxn>
-              <a:cxn ang="0">
-                <a:pos x="connsiteX4" y="connsiteY4"/>
-              </a:cxn>
-              <a:cxn ang="0">
-                <a:pos x="connsiteX5" y="connsiteY5"/>
-              </a:cxn>
-              <a:cxn ang="0">
-                <a:pos x="connsiteX6" y="connsiteY6"/>
-              </a:cxn>
-            </a:cxnLst>
-            <a:rect l="l" t="t" r="r" b="b"/>
-            <a:pathLst>
-              <a:path w="6917905" h="5671482">
-                <a:moveTo>
-                  <a:pt x="998" y="3862276"/>
-                </a:moveTo>
-                <a:cubicBezTo>
-                  <a:pt x="6784" y="2580785"/>
-                  <a:pt x="-4023" y="1281491"/>
-                  <a:pt x="1763" y="0"/>
-                </a:cubicBezTo>
-                <a:lnTo>
-                  <a:pt x="6915259" y="615"/>
-                </a:lnTo>
-                <a:lnTo>
-                  <a:pt x="6917905" y="3435219"/>
-                </a:lnTo>
-                <a:lnTo>
-                  <a:pt x="5614844" y="5671482"/>
-                </a:lnTo>
-                <a:lnTo>
-                  <a:pt x="1038428" y="5668839"/>
-                </a:lnTo>
-                <a:lnTo>
-                  <a:pt x="998" y="3862276"/>
-                </a:lnTo>
-                <a:close/>
-              </a:path>
-            </a:pathLst>
-          </a:custGeom>
-          <a:solidFill>
-            <a:srgbClr val="FAE100"/>
-          </a:solidFill>
-          <a:ln>
-            <a:noFill/>
-          </a:ln>
-        </p:spPr>
-        <p:style>
-          <a:lnRef idx="2">
-            <a:schemeClr val="accent1">
-              <a:shade val="50000"/>
-            </a:schemeClr>
-          </a:lnRef>
-          <a:fillRef idx="1">
-            <a:schemeClr val="accent1"/>
-          </a:fillRef>
-          <a:effectRef idx="0">
-            <a:schemeClr val="accent1"/>
-          </a:effectRef>
-          <a:fontRef idx="minor">
-            <a:schemeClr val="lt1"/>
-          </a:fontRef>
-        </p:style>
-        <p:txBody>
-          <a:bodyPr rtlCol="0" anchor="ctr"/>
-          <a:lstStyle/>
-          <a:p>
-            <a:pPr algn="ctr"/>
-            <a:endParaRPr lang="en-GB" dirty="0"/>
-          </a:p>
-        </p:txBody>
-      </p:sp>
-      <p:cxnSp>
-        <p:nvCxnSpPr>
-          <p:cNvPr id="9" name="Straight Connector 8">
-            <a:extLst>
-              <a:ext uri="{FF2B5EF4-FFF2-40B4-BE49-F238E27FC236}">
-                <a16:creationId xmlns:a16="http://schemas.microsoft.com/office/drawing/2014/main" id="{F9D383FB-0467-4241-BEF0-D636E886723B}"/>
-              </a:ext>
-            </a:extLst>
-          </p:cNvPr>
-          <p:cNvCxnSpPr/>
-          <p:nvPr userDrawn="1"/>
-        </p:nvCxnSpPr>
-        <p:spPr>
-          <a:xfrm>
-            <a:off x="612000" y="516181"/>
-            <a:ext cx="865108" cy="0"/>
-          </a:xfrm>
-          <a:prstGeom prst="line">
-            <a:avLst/>
-          </a:prstGeom>
-          <a:ln w="38100">
-            <a:solidFill>
-              <a:schemeClr val="tx1"/>
-            </a:solidFill>
-          </a:ln>
-        </p:spPr>
-        <p:style>
-          <a:lnRef idx="1">
-            <a:schemeClr val="accent1"/>
-          </a:lnRef>
-          <a:fillRef idx="0">
-            <a:schemeClr val="accent1"/>
-          </a:fillRef>
-          <a:effectRef idx="0">
-            <a:schemeClr val="accent1"/>
-          </a:effectRef>
-          <a:fontRef idx="minor">
-            <a:schemeClr val="tx1"/>
-          </a:fontRef>
-        </p:style>
-      </p:cxnSp>
-      <p:sp>
-        <p:nvSpPr>
-          <p:cNvPr id="10" name="Rectangle 9">
-            <a:extLst>
-              <a:ext uri="{FF2B5EF4-FFF2-40B4-BE49-F238E27FC236}">
-                <a16:creationId xmlns:a16="http://schemas.microsoft.com/office/drawing/2014/main" id="{93DACDB8-C05A-C540-BF85-5FDDA3660A2E}"/>
-              </a:ext>
-            </a:extLst>
-          </p:cNvPr>
-          <p:cNvSpPr/>
-          <p:nvPr userDrawn="1"/>
-        </p:nvSpPr>
-        <p:spPr>
-          <a:xfrm>
-            <a:off x="11444644" y="6404977"/>
-            <a:ext cx="372218" cy="276999"/>
-          </a:xfrm>
-          <a:prstGeom prst="rect">
-            <a:avLst/>
-          </a:prstGeom>
-        </p:spPr>
-        <p:txBody>
-          <a:bodyPr wrap="none">
-            <a:spAutoFit/>
-          </a:bodyPr>
-          <a:lstStyle/>
-          <a:p>
-            <a:pPr algn="r"/>
-            <a:fld id="{BA3B713D-1FBB-0E4F-91D0-D2B735266E79}" type="slidenum">
-              <a:rPr lang="en-GB" sz="1200" smtClean="0">
-                <a:solidFill>
-                  <a:schemeClr val="accent6"/>
-                </a:solidFill>
-              </a:rPr>
-              <a:t>‹#›</a:t>
-            </a:fld>
-            <a:endParaRPr lang="en-GB" sz="1200" dirty="0">
-              <a:solidFill>
-                <a:schemeClr val="accent6"/>
-              </a:solidFill>
-            </a:endParaRPr>
-          </a:p>
-        </p:txBody>
-      </p:sp>
-      <p:sp>
-        <p:nvSpPr>
-          <p:cNvPr id="11" name="Text Placeholder 7">
-            <a:extLst>
-              <a:ext uri="{FF2B5EF4-FFF2-40B4-BE49-F238E27FC236}">
-                <a16:creationId xmlns:a16="http://schemas.microsoft.com/office/drawing/2014/main" id="{9F1649F8-C95E-B04E-A0E7-F89193CC9718}"/>
-              </a:ext>
-            </a:extLst>
-          </p:cNvPr>
-          <p:cNvSpPr>
-            <a:spLocks noGrp="1"/>
-          </p:cNvSpPr>
-          <p:nvPr>
-            <p:ph type="body" sz="quarter" idx="14" hasCustomPrompt="1"/>
-          </p:nvPr>
-        </p:nvSpPr>
-        <p:spPr>
-          <a:xfrm>
-            <a:off x="612774" y="1926629"/>
-            <a:ext cx="4428148" cy="3001565"/>
-          </a:xfrm>
-          <a:prstGeom prst="rect">
-            <a:avLst/>
-          </a:prstGeom>
-        </p:spPr>
-        <p:txBody>
-          <a:bodyPr lIns="0" tIns="0" rIns="0" bIns="0">
-            <a:noAutofit/>
-          </a:bodyPr>
-          <a:lstStyle>
-            <a:lvl1pPr marL="216000" indent="-216000">
-              <a:buNone/>
-              <a:defRPr sz="3000" b="1">
-                <a:solidFill>
-                  <a:schemeClr val="tx1"/>
-                </a:solidFill>
-              </a:defRPr>
-            </a:lvl1pPr>
-            <a:lvl2pPr marL="357188" indent="0">
-              <a:buNone/>
-              <a:defRPr>
-                <a:solidFill>
-                  <a:schemeClr val="tx1"/>
-                </a:solidFill>
-              </a:defRPr>
-            </a:lvl2pPr>
-            <a:lvl3pPr marL="714375" indent="0">
-              <a:buNone/>
-              <a:defRPr>
-                <a:solidFill>
-                  <a:schemeClr val="tx1"/>
-                </a:solidFill>
-              </a:defRPr>
-            </a:lvl3pPr>
-            <a:lvl4pPr marL="1081087" indent="0">
-              <a:buNone/>
-              <a:defRPr>
-                <a:solidFill>
-                  <a:schemeClr val="tx1"/>
-                </a:solidFill>
-              </a:defRPr>
-            </a:lvl4pPr>
-            <a:lvl5pPr marL="1438275" indent="0">
-              <a:buNone/>
-              <a:defRPr>
-                <a:solidFill>
-                  <a:schemeClr val="tx1"/>
-                </a:solidFill>
-              </a:defRPr>
-            </a:lvl5pPr>
-          </a:lstStyle>
-          <a:p>
-            <a:pPr lvl="0"/>
-            <a:r>
-              <a:rPr lang="en-GB" dirty="0"/>
-              <a:t>“	quote text here, quote text here, quote text here, keep it short across 6 lines maximum”</a:t>
-            </a:r>
-          </a:p>
-        </p:txBody>
-      </p:sp>
-      <p:sp>
-        <p:nvSpPr>
-          <p:cNvPr id="5" name="TextBox 4">
-            <a:extLst>
-              <a:ext uri="{FF2B5EF4-FFF2-40B4-BE49-F238E27FC236}">
-                <a16:creationId xmlns:a16="http://schemas.microsoft.com/office/drawing/2014/main" id="{7BB6C65A-583E-CC43-8A40-D9FE20EAC65C}"/>
-              </a:ext>
-            </a:extLst>
-          </p:cNvPr>
-          <p:cNvSpPr txBox="1"/>
-          <p:nvPr userDrawn="1"/>
-        </p:nvSpPr>
-        <p:spPr>
-          <a:xfrm>
-            <a:off x="1963271" y="-1210235"/>
-            <a:ext cx="0" cy="0"/>
-          </a:xfrm>
-          <a:prstGeom prst="rect">
-            <a:avLst/>
-          </a:prstGeom>
-          <a:noFill/>
-        </p:spPr>
-        <p:txBody>
-          <a:bodyPr wrap="none" lIns="0" tIns="0" rIns="0" bIns="0" rtlCol="0">
-            <a:noAutofit/>
-          </a:bodyPr>
-          <a:lstStyle/>
-          <a:p>
-            <a:endParaRPr lang="en-GB" sz="1200" b="1">
-              <a:solidFill>
-                <a:schemeClr val="accent1"/>
-              </a:solidFill>
-            </a:endParaRPr>
-          </a:p>
-        </p:txBody>
-      </p:sp>
-      <p:sp>
-        <p:nvSpPr>
-          <p:cNvPr id="17" name="Picture Placeholder 16">
-            <a:extLst>
-              <a:ext uri="{FF2B5EF4-FFF2-40B4-BE49-F238E27FC236}">
-                <a16:creationId xmlns:a16="http://schemas.microsoft.com/office/drawing/2014/main" id="{91FA0591-6C50-4042-A2CC-243B5CAE5316}"/>
-              </a:ext>
-            </a:extLst>
-          </p:cNvPr>
-          <p:cNvSpPr>
-            <a:spLocks noGrp="1"/>
-          </p:cNvSpPr>
-          <p:nvPr>
-            <p:ph type="pic" sz="quarter" idx="15" hasCustomPrompt="1"/>
-          </p:nvPr>
-        </p:nvSpPr>
-        <p:spPr>
-          <a:xfrm>
-            <a:off x="3302000" y="-3175"/>
-            <a:ext cx="8890000" cy="6861175"/>
-          </a:xfrm>
-          <a:custGeom>
-            <a:avLst/>
-            <a:gdLst>
-              <a:gd name="connsiteX0" fmla="*/ 0 w 8890000"/>
-              <a:gd name="connsiteY0" fmla="*/ 0 h 6861175"/>
-              <a:gd name="connsiteX1" fmla="*/ 8890000 w 8890000"/>
-              <a:gd name="connsiteY1" fmla="*/ 0 h 6861175"/>
-              <a:gd name="connsiteX2" fmla="*/ 8890000 w 8890000"/>
-              <a:gd name="connsiteY2" fmla="*/ 6861175 h 6861175"/>
-              <a:gd name="connsiteX3" fmla="*/ 561739 w 8890000"/>
-              <a:gd name="connsiteY3" fmla="*/ 6861175 h 6861175"/>
-              <a:gd name="connsiteX4" fmla="*/ 2362512 w 8890000"/>
-              <a:gd name="connsiteY4" fmla="*/ 5834990 h 6861175"/>
-              <a:gd name="connsiteX5" fmla="*/ 2365155 w 8890000"/>
-              <a:gd name="connsiteY5" fmla="*/ 1293624 h 6861175"/>
-              <a:gd name="connsiteX6" fmla="*/ 128892 w 8890000"/>
-              <a:gd name="connsiteY6" fmla="*/ 543 h 6861175"/>
-              <a:gd name="connsiteX7" fmla="*/ 0 w 8890000"/>
-              <a:gd name="connsiteY7" fmla="*/ 642 h 6861175"/>
-            </a:gdLst>
-            <a:ahLst/>
-            <a:cxnLst>
-              <a:cxn ang="0">
-                <a:pos x="connsiteX0" y="connsiteY0"/>
-              </a:cxn>
-              <a:cxn ang="0">
-                <a:pos x="connsiteX1" y="connsiteY1"/>
-              </a:cxn>
-              <a:cxn ang="0">
-                <a:pos x="connsiteX2" y="connsiteY2"/>
-              </a:cxn>
-              <a:cxn ang="0">
-                <a:pos x="connsiteX3" y="connsiteY3"/>
-              </a:cxn>
-              <a:cxn ang="0">
-                <a:pos x="connsiteX4" y="connsiteY4"/>
-              </a:cxn>
-              <a:cxn ang="0">
-                <a:pos x="connsiteX5" y="connsiteY5"/>
-              </a:cxn>
-              <a:cxn ang="0">
-                <a:pos x="connsiteX6" y="connsiteY6"/>
-              </a:cxn>
-              <a:cxn ang="0">
-                <a:pos x="connsiteX7" y="connsiteY7"/>
-              </a:cxn>
-            </a:cxnLst>
-            <a:rect l="l" t="t" r="r" b="b"/>
-            <a:pathLst>
-              <a:path w="8890000" h="6861175">
-                <a:moveTo>
-                  <a:pt x="0" y="0"/>
-                </a:moveTo>
-                <a:lnTo>
-                  <a:pt x="8890000" y="0"/>
-                </a:lnTo>
-                <a:lnTo>
-                  <a:pt x="8890000" y="6861175"/>
-                </a:lnTo>
-                <a:lnTo>
-                  <a:pt x="561739" y="6861175"/>
-                </a:lnTo>
-                <a:lnTo>
-                  <a:pt x="2362512" y="5834990"/>
-                </a:lnTo>
-                <a:lnTo>
-                  <a:pt x="2365155" y="1293624"/>
-                </a:lnTo>
-                <a:lnTo>
-                  <a:pt x="128892" y="543"/>
-                </a:lnTo>
-                <a:lnTo>
-                  <a:pt x="0" y="642"/>
-                </a:lnTo>
-                <a:close/>
-              </a:path>
-            </a:pathLst>
-          </a:custGeom>
-          <a:solidFill>
-            <a:srgbClr val="F6F8F8"/>
-          </a:solidFill>
-        </p:spPr>
-        <p:txBody>
-          <a:bodyPr wrap="square" lIns="2160000" tIns="720000" rIns="1080000" bIns="2880000" anchor="ctr">
-            <a:noAutofit/>
-          </a:bodyPr>
-          <a:lstStyle>
-            <a:lvl1pPr algn="ctr">
-              <a:buNone/>
-              <a:defRPr/>
-            </a:lvl1pPr>
-          </a:lstStyle>
-          <a:p>
-            <a:r>
-              <a:rPr lang="en-GB" dirty="0"/>
-              <a:t>Click on icon to insert image (include Alt Text)</a:t>
-            </a:r>
-          </a:p>
-        </p:txBody>
-      </p:sp>
-      <p:sp>
-        <p:nvSpPr>
-          <p:cNvPr id="12" name="Text Placeholder 3">
-            <a:extLst>
-              <a:ext uri="{FF2B5EF4-FFF2-40B4-BE49-F238E27FC236}">
-                <a16:creationId xmlns:a16="http://schemas.microsoft.com/office/drawing/2014/main" id="{43CB6BF9-1102-B546-83EC-2B6828263C83}"/>
-              </a:ext>
-            </a:extLst>
-          </p:cNvPr>
-          <p:cNvSpPr>
-            <a:spLocks noGrp="1"/>
-          </p:cNvSpPr>
-          <p:nvPr>
-            <p:ph type="body" sz="quarter" idx="16" hasCustomPrompt="1"/>
-          </p:nvPr>
-        </p:nvSpPr>
-        <p:spPr>
-          <a:xfrm>
-            <a:off x="612775" y="604838"/>
-            <a:ext cx="3217820" cy="508000"/>
-          </a:xfrm>
-        </p:spPr>
-        <p:txBody>
-          <a:bodyPr lIns="0" tIns="0" rIns="0" bIns="0"/>
-          <a:lstStyle>
-            <a:lvl1pPr>
-              <a:buNone/>
-              <a:defRPr sz="2400" b="1">
-                <a:solidFill>
-                  <a:schemeClr val="tx1"/>
-                </a:solidFill>
-              </a:defRPr>
-            </a:lvl1pPr>
-          </a:lstStyle>
-          <a:p>
-            <a:pPr lvl="0"/>
-            <a:r>
-              <a:rPr lang="en-GB" dirty="0"/>
-              <a:t>Heading label</a:t>
-            </a:r>
-          </a:p>
-        </p:txBody>
-      </p:sp>
-      <p:pic>
-        <p:nvPicPr>
-          <p:cNvPr id="15" name="Picture 14" descr="Icon&#10;&#10;Description automatically generated with medium confidence">
-            <a:extLst>
-              <a:ext uri="{FF2B5EF4-FFF2-40B4-BE49-F238E27FC236}">
-                <a16:creationId xmlns:a16="http://schemas.microsoft.com/office/drawing/2014/main" id="{460B1737-DB51-6F40-8E3E-CF01D40DFD79}"/>
-              </a:ext>
-            </a:extLst>
-          </p:cNvPr>
-          <p:cNvPicPr>
-            <a:picLocks noChangeAspect="1"/>
-          </p:cNvPicPr>
-          <p:nvPr userDrawn="1"/>
-        </p:nvPicPr>
-        <p:blipFill>
-          <a:blip r:embed="rId2"/>
-          <a:stretch>
-            <a:fillRect/>
-          </a:stretch>
-        </p:blipFill>
-        <p:spPr>
-          <a:xfrm>
-            <a:off x="347413" y="6341795"/>
-            <a:ext cx="376428" cy="376428"/>
-          </a:xfrm>
-          <a:prstGeom prst="rect">
-            <a:avLst/>
-          </a:prstGeom>
-        </p:spPr>
-      </p:pic>
-    </p:spTree>
-    <p:extLst>
-      <p:ext uri="{BB962C8B-B14F-4D97-AF65-F5344CB8AC3E}">
-        <p14:creationId xmlns:p14="http://schemas.microsoft.com/office/powerpoint/2010/main" val="387334489"/>
-      </p:ext>
-    </p:extLst>
-  </p:cSld>
-  <p:clrMapOvr>
-    <a:masterClrMapping/>
-  </p:clrMapOvr>
-  <mc:AlternateContent xmlns:mc="http://schemas.openxmlformats.org/markup-compatibility/2006" xmlns:p14="http://schemas.microsoft.com/office/powerpoint/2010/main">
-    <mc:Choice Requires="p14">
-      <p:transition spd="med" p14:dur="700">
-        <p:fade/>
-      </p:transition>
-    </mc:Choice>
-    <mc:Fallback xmlns="">
-      <p:transition spd="med">
-        <p:fade/>
-      </p:transition>
-    </mc:Fallback>
-  </mc:AlternateContent>
-</p:sldLayout>
-</file>
-
-<file path=ppt/slideLayouts/slideLayout17.xml><?xml version="1.0" encoding="utf-8"?>
 <p:sldLayout xmlns:a="http://schemas.openxmlformats.org/drawingml/2006/main" xmlns:r="http://schemas.openxmlformats.org/officeDocument/2006/relationships" xmlns:p="http://schemas.openxmlformats.org/presentationml/2006/main" preserve="1" userDrawn="1">
   <p:cSld name="Quote and image 3">
     <p:spTree>
@@ -10338,7 +9415,7 @@
 </p:sldLayout>
 </file>
 
-<file path=ppt/slideLayouts/slideLayout18.xml><?xml version="1.0" encoding="utf-8"?>
+<file path=ppt/slideLayouts/slideLayout17.xml><?xml version="1.0" encoding="utf-8"?>
 <p:sldLayout xmlns:a="http://schemas.openxmlformats.org/drawingml/2006/main" xmlns:r="http://schemas.openxmlformats.org/officeDocument/2006/relationships" xmlns:p="http://schemas.openxmlformats.org/presentationml/2006/main" preserve="1" userDrawn="1">
   <p:cSld name="Quote and image 4">
     <p:spTree>
@@ -11178,7 +10255,7 @@
 </p:sldLayout>
 </file>
 
-<file path=ppt/slideLayouts/slideLayout19.xml><?xml version="1.0" encoding="utf-8"?>
+<file path=ppt/slideLayouts/slideLayout18.xml><?xml version="1.0" encoding="utf-8"?>
 <p:sldLayout xmlns:a="http://schemas.openxmlformats.org/drawingml/2006/main" xmlns:r="http://schemas.openxmlformats.org/officeDocument/2006/relationships" xmlns:p="http://schemas.openxmlformats.org/presentationml/2006/main" preserve="1" userDrawn="1">
   <p:cSld name="Headline and image with header 1">
     <p:spTree>
@@ -12170,431 +11247,7 @@
 </p:sldLayout>
 </file>
 
-<file path=ppt/slideLayouts/slideLayout2.xml><?xml version="1.0" encoding="utf-8"?>
-<p:sldLayout xmlns:a="http://schemas.openxmlformats.org/drawingml/2006/main" xmlns:r="http://schemas.openxmlformats.org/officeDocument/2006/relationships" xmlns:p="http://schemas.openxmlformats.org/presentationml/2006/main" showMasterSp="0" preserve="1" userDrawn="1">
-  <p:cSld name="Heading, content, basic text one col">
-    <p:spTree>
-      <p:nvGrpSpPr>
-        <p:cNvPr id="1" name=""/>
-        <p:cNvGrpSpPr/>
-        <p:nvPr/>
-      </p:nvGrpSpPr>
-      <p:grpSpPr>
-        <a:xfrm>
-          <a:off x="0" y="0"/>
-          <a:ext cx="0" cy="0"/>
-          <a:chOff x="0" y="0"/>
-          <a:chExt cx="0" cy="0"/>
-        </a:xfrm>
-      </p:grpSpPr>
-      <p:sp>
-        <p:nvSpPr>
-          <p:cNvPr id="13" name="Rectangle 12">
-            <a:extLst>
-              <a:ext uri="{FF2B5EF4-FFF2-40B4-BE49-F238E27FC236}">
-                <a16:creationId xmlns:a16="http://schemas.microsoft.com/office/drawing/2014/main" id="{632DDCA5-A307-96EA-64A8-CCBA8E5F6393}"/>
-              </a:ext>
-            </a:extLst>
-          </p:cNvPr>
-          <p:cNvSpPr/>
-          <p:nvPr userDrawn="1"/>
-        </p:nvSpPr>
-        <p:spPr>
-          <a:xfrm>
-            <a:off x="0" y="0"/>
-            <a:ext cx="12206636" cy="6872615"/>
-          </a:xfrm>
-          <a:prstGeom prst="rect">
-            <a:avLst/>
-          </a:prstGeom>
-          <a:solidFill>
-            <a:srgbClr val="F6F8F8"/>
-          </a:solidFill>
-          <a:ln>
-            <a:noFill/>
-          </a:ln>
-        </p:spPr>
-        <p:style>
-          <a:lnRef idx="2">
-            <a:schemeClr val="accent1">
-              <a:shade val="50000"/>
-            </a:schemeClr>
-          </a:lnRef>
-          <a:fillRef idx="1">
-            <a:schemeClr val="accent1"/>
-          </a:fillRef>
-          <a:effectRef idx="0">
-            <a:schemeClr val="accent1"/>
-          </a:effectRef>
-          <a:fontRef idx="minor">
-            <a:schemeClr val="lt1"/>
-          </a:fontRef>
-        </p:style>
-        <p:txBody>
-          <a:bodyPr rtlCol="0" anchor="ctr"/>
-          <a:lstStyle/>
-          <a:p>
-            <a:pPr algn="ctr"/>
-            <a:endParaRPr lang="en-GB" dirty="0"/>
-          </a:p>
-        </p:txBody>
-      </p:sp>
-      <p:sp>
-        <p:nvSpPr>
-          <p:cNvPr id="2" name="Title 1"/>
-          <p:cNvSpPr>
-            <a:spLocks noGrp="1"/>
-          </p:cNvSpPr>
-          <p:nvPr>
-            <p:ph type="title" hasCustomPrompt="1"/>
-          </p:nvPr>
-        </p:nvSpPr>
-        <p:spPr>
-          <a:xfrm>
-            <a:off x="432000" y="432000"/>
-            <a:ext cx="11404154" cy="865186"/>
-          </a:xfrm>
-          <a:prstGeom prst="rect">
-            <a:avLst/>
-          </a:prstGeom>
-        </p:spPr>
-        <p:txBody>
-          <a:bodyPr lIns="0" tIns="0" rIns="0" bIns="0">
-            <a:normAutofit/>
-          </a:bodyPr>
-          <a:lstStyle>
-            <a:lvl1pPr>
-              <a:defRPr sz="3600" b="1">
-                <a:solidFill>
-                  <a:schemeClr val="tx1"/>
-                </a:solidFill>
-              </a:defRPr>
-            </a:lvl1pPr>
-          </a:lstStyle>
-          <a:p>
-            <a:r>
-              <a:rPr lang="en-GB" dirty="0"/>
-              <a:t>Heading</a:t>
-            </a:r>
-          </a:p>
-        </p:txBody>
-      </p:sp>
-      <p:sp>
-        <p:nvSpPr>
-          <p:cNvPr id="3" name="Content Placeholder 2"/>
-          <p:cNvSpPr>
-            <a:spLocks noGrp="1"/>
-          </p:cNvSpPr>
-          <p:nvPr>
-            <p:ph idx="1" hasCustomPrompt="1"/>
-          </p:nvPr>
-        </p:nvSpPr>
-        <p:spPr>
-          <a:xfrm>
-            <a:off x="412708" y="2106000"/>
-            <a:ext cx="7632000" cy="4026443"/>
-          </a:xfrm>
-          <a:prstGeom prst="rect">
-            <a:avLst/>
-          </a:prstGeom>
-        </p:spPr>
-        <p:txBody>
-          <a:bodyPr lIns="0" tIns="0" rIns="0" bIns="0">
-            <a:normAutofit/>
-          </a:bodyPr>
-          <a:lstStyle>
-            <a:lvl1pPr marL="0" indent="0">
-              <a:lnSpc>
-                <a:spcPct val="100000"/>
-              </a:lnSpc>
-              <a:spcBef>
-                <a:spcPts val="0"/>
-              </a:spcBef>
-              <a:spcAft>
-                <a:spcPts val="600"/>
-              </a:spcAft>
-              <a:buClr>
-                <a:schemeClr val="tx1"/>
-              </a:buClr>
-              <a:buFont typeface="Arial" panose="020B0604020202020204" pitchFamily="34" charset="0"/>
-              <a:buNone/>
-              <a:defRPr sz="2200" b="0">
-                <a:solidFill>
-                  <a:schemeClr val="accent6"/>
-                </a:solidFill>
-              </a:defRPr>
-            </a:lvl1pPr>
-            <a:lvl2pPr>
-              <a:buClr>
-                <a:schemeClr val="tx1"/>
-              </a:buClr>
-              <a:defRPr sz="2200">
-                <a:solidFill>
-                  <a:schemeClr val="tx1"/>
-                </a:solidFill>
-              </a:defRPr>
-            </a:lvl2pPr>
-            <a:lvl3pPr>
-              <a:buClr>
-                <a:schemeClr val="tx1"/>
-              </a:buClr>
-              <a:defRPr sz="2200">
-                <a:solidFill>
-                  <a:schemeClr val="tx1"/>
-                </a:solidFill>
-              </a:defRPr>
-            </a:lvl3pPr>
-            <a:lvl4pPr>
-              <a:buClr>
-                <a:schemeClr val="tx1"/>
-              </a:buClr>
-              <a:defRPr sz="2200">
-                <a:solidFill>
-                  <a:schemeClr val="tx1"/>
-                </a:solidFill>
-              </a:defRPr>
-            </a:lvl4pPr>
-            <a:lvl5pPr>
-              <a:buClr>
-                <a:schemeClr val="tx1"/>
-              </a:buClr>
-              <a:defRPr sz="2200">
-                <a:solidFill>
-                  <a:schemeClr val="tx1"/>
-                </a:solidFill>
-              </a:defRPr>
-            </a:lvl5pPr>
-          </a:lstStyle>
-          <a:p>
-            <a:pPr lvl="0"/>
-            <a:r>
-              <a:rPr lang="en-GB" dirty="0"/>
-              <a:t>Click to add text</a:t>
-            </a:r>
-          </a:p>
-        </p:txBody>
-      </p:sp>
-      <p:sp>
-        <p:nvSpPr>
-          <p:cNvPr id="9" name="TextBox 8">
-            <a:extLst>
-              <a:ext uri="{FF2B5EF4-FFF2-40B4-BE49-F238E27FC236}">
-                <a16:creationId xmlns:a16="http://schemas.microsoft.com/office/drawing/2014/main" id="{990784B1-AA1E-DC4B-BEB4-EC05249AFE00}"/>
-              </a:ext>
-            </a:extLst>
-          </p:cNvPr>
-          <p:cNvSpPr txBox="1"/>
-          <p:nvPr userDrawn="1"/>
-        </p:nvSpPr>
-        <p:spPr>
-          <a:xfrm>
-            <a:off x="4700954" y="4232031"/>
-            <a:ext cx="0" cy="0"/>
-          </a:xfrm>
-          <a:prstGeom prst="rect">
-            <a:avLst/>
-          </a:prstGeom>
-          <a:noFill/>
-        </p:spPr>
-        <p:txBody>
-          <a:bodyPr wrap="none" lIns="0" tIns="0" rIns="0" bIns="0" rtlCol="0">
-            <a:noAutofit/>
-          </a:bodyPr>
-          <a:lstStyle/>
-          <a:p>
-            <a:endParaRPr lang="en-GB" sz="1200" b="1">
-              <a:solidFill>
-                <a:schemeClr val="accent1"/>
-              </a:solidFill>
-            </a:endParaRPr>
-          </a:p>
-        </p:txBody>
-      </p:sp>
-      <p:sp>
-        <p:nvSpPr>
-          <p:cNvPr id="10" name="Rectangle 9">
-            <a:extLst>
-              <a:ext uri="{FF2B5EF4-FFF2-40B4-BE49-F238E27FC236}">
-                <a16:creationId xmlns:a16="http://schemas.microsoft.com/office/drawing/2014/main" id="{E42CCDA4-D437-6B48-8BBD-CAC30F281160}"/>
-              </a:ext>
-            </a:extLst>
-          </p:cNvPr>
-          <p:cNvSpPr/>
-          <p:nvPr userDrawn="1"/>
-        </p:nvSpPr>
-        <p:spPr>
-          <a:xfrm>
-            <a:off x="11444644" y="6404977"/>
-            <a:ext cx="372218" cy="276999"/>
-          </a:xfrm>
-          <a:prstGeom prst="rect">
-            <a:avLst/>
-          </a:prstGeom>
-        </p:spPr>
-        <p:txBody>
-          <a:bodyPr wrap="none">
-            <a:spAutoFit/>
-          </a:bodyPr>
-          <a:lstStyle/>
-          <a:p>
-            <a:pPr algn="r"/>
-            <a:fld id="{BA3B713D-1FBB-0E4F-91D0-D2B735266E79}" type="slidenum">
-              <a:rPr lang="en-GB" sz="1200" smtClean="0">
-                <a:solidFill>
-                  <a:schemeClr val="accent6"/>
-                </a:solidFill>
-              </a:rPr>
-              <a:pPr algn="r"/>
-              <a:t>‹#›</a:t>
-            </a:fld>
-            <a:endParaRPr lang="en-GB" sz="1200" dirty="0">
-              <a:solidFill>
-                <a:schemeClr val="accent6"/>
-              </a:solidFill>
-            </a:endParaRPr>
-          </a:p>
-        </p:txBody>
-      </p:sp>
-      <p:cxnSp>
-        <p:nvCxnSpPr>
-          <p:cNvPr id="6" name="Straight Connector 5">
-            <a:extLst>
-              <a:ext uri="{FF2B5EF4-FFF2-40B4-BE49-F238E27FC236}">
-                <a16:creationId xmlns:a16="http://schemas.microsoft.com/office/drawing/2014/main" id="{CDCA3D7C-EA8C-5A4E-9010-4AC84C6EA52F}"/>
-              </a:ext>
-            </a:extLst>
-          </p:cNvPr>
-          <p:cNvCxnSpPr/>
-          <p:nvPr userDrawn="1"/>
-        </p:nvCxnSpPr>
-        <p:spPr>
-          <a:xfrm>
-            <a:off x="432000" y="324000"/>
-            <a:ext cx="432118" cy="0"/>
-          </a:xfrm>
-          <a:prstGeom prst="line">
-            <a:avLst/>
-          </a:prstGeom>
-          <a:ln w="25400">
-            <a:solidFill>
-              <a:schemeClr val="bg2"/>
-            </a:solidFill>
-          </a:ln>
-        </p:spPr>
-        <p:style>
-          <a:lnRef idx="1">
-            <a:schemeClr val="accent1"/>
-          </a:lnRef>
-          <a:fillRef idx="0">
-            <a:schemeClr val="accent1"/>
-          </a:fillRef>
-          <a:effectRef idx="0">
-            <a:schemeClr val="accent1"/>
-          </a:effectRef>
-          <a:fontRef idx="minor">
-            <a:schemeClr val="tx1"/>
-          </a:fontRef>
-        </p:style>
-      </p:cxnSp>
-      <p:cxnSp>
-        <p:nvCxnSpPr>
-          <p:cNvPr id="11" name="Straight Connector 10">
-            <a:extLst>
-              <a:ext uri="{FF2B5EF4-FFF2-40B4-BE49-F238E27FC236}">
-                <a16:creationId xmlns:a16="http://schemas.microsoft.com/office/drawing/2014/main" id="{5591C7AB-7F8B-2041-80C3-EE781F24EB94}"/>
-              </a:ext>
-            </a:extLst>
-          </p:cNvPr>
-          <p:cNvCxnSpPr>
-            <a:cxnSpLocks/>
-          </p:cNvCxnSpPr>
-          <p:nvPr userDrawn="1"/>
-        </p:nvCxnSpPr>
-        <p:spPr>
-          <a:xfrm>
-            <a:off x="432000" y="6336000"/>
-            <a:ext cx="11376000" cy="0"/>
-          </a:xfrm>
-          <a:prstGeom prst="line">
-            <a:avLst/>
-          </a:prstGeom>
-          <a:ln w="6350">
-            <a:solidFill>
-              <a:schemeClr val="accent2"/>
-            </a:solidFill>
-          </a:ln>
-        </p:spPr>
-        <p:style>
-          <a:lnRef idx="1">
-            <a:schemeClr val="accent1"/>
-          </a:lnRef>
-          <a:fillRef idx="0">
-            <a:schemeClr val="accent1"/>
-          </a:fillRef>
-          <a:effectRef idx="0">
-            <a:schemeClr val="accent1"/>
-          </a:effectRef>
-          <a:fontRef idx="minor">
-            <a:schemeClr val="tx1"/>
-          </a:fontRef>
-        </p:style>
-      </p:cxnSp>
-      <p:pic>
-        <p:nvPicPr>
-          <p:cNvPr id="12" name="Picture 11" descr="Icon&#10;&#10;Description automatically generated with medium confidence">
-            <a:extLst>
-              <a:ext uri="{FF2B5EF4-FFF2-40B4-BE49-F238E27FC236}">
-                <a16:creationId xmlns:a16="http://schemas.microsoft.com/office/drawing/2014/main" id="{25B76462-9988-504D-BEEB-4D901B000C19}"/>
-              </a:ext>
-            </a:extLst>
-          </p:cNvPr>
-          <p:cNvPicPr>
-            <a:picLocks noChangeAspect="1"/>
-          </p:cNvPicPr>
-          <p:nvPr userDrawn="1"/>
-        </p:nvPicPr>
-        <p:blipFill>
-          <a:blip r:embed="rId2"/>
-          <a:stretch>
-            <a:fillRect/>
-          </a:stretch>
-        </p:blipFill>
-        <p:spPr>
-          <a:xfrm>
-            <a:off x="347413" y="6341795"/>
-            <a:ext cx="376428" cy="376428"/>
-          </a:xfrm>
-          <a:prstGeom prst="rect">
-            <a:avLst/>
-          </a:prstGeom>
-        </p:spPr>
-      </p:pic>
-    </p:spTree>
-    <p:extLst>
-      <p:ext uri="{BB962C8B-B14F-4D97-AF65-F5344CB8AC3E}">
-        <p14:creationId xmlns:p14="http://schemas.microsoft.com/office/powerpoint/2010/main" val="2766456805"/>
-      </p:ext>
-    </p:extLst>
-  </p:cSld>
-  <p:clrMapOvr>
-    <a:masterClrMapping/>
-  </p:clrMapOvr>
-  <mc:AlternateContent xmlns:mc="http://schemas.openxmlformats.org/markup-compatibility/2006" xmlns:p14="http://schemas.microsoft.com/office/powerpoint/2010/main">
-    <mc:Choice Requires="p14">
-      <p:transition spd="med" p14:dur="700">
-        <p:fade/>
-      </p:transition>
-    </mc:Choice>
-    <mc:Fallback xmlns="">
-      <p:transition spd="med">
-        <p:fade/>
-      </p:transition>
-    </mc:Fallback>
-  </mc:AlternateContent>
-</p:sldLayout>
-</file>
-
-<file path=ppt/slideLayouts/slideLayout20.xml><?xml version="1.0" encoding="utf-8"?>
+<file path=ppt/slideLayouts/slideLayout19.xml><?xml version="1.0" encoding="utf-8"?>
 <p:sldLayout xmlns:a="http://schemas.openxmlformats.org/drawingml/2006/main" xmlns:r="http://schemas.openxmlformats.org/officeDocument/2006/relationships" xmlns:p="http://schemas.openxmlformats.org/presentationml/2006/main" preserve="1" userDrawn="1">
   <p:cSld name="Headline and image with Header 2">
     <p:spTree>
@@ -13589,7 +12242,431 @@
 </p:sldLayout>
 </file>
 
-<file path=ppt/slideLayouts/slideLayout21.xml><?xml version="1.0" encoding="utf-8"?>
+<file path=ppt/slideLayouts/slideLayout2.xml><?xml version="1.0" encoding="utf-8"?>
+<p:sldLayout xmlns:a="http://schemas.openxmlformats.org/drawingml/2006/main" xmlns:r="http://schemas.openxmlformats.org/officeDocument/2006/relationships" xmlns:p="http://schemas.openxmlformats.org/presentationml/2006/main" showMasterSp="0" preserve="1" userDrawn="1">
+  <p:cSld name="Heading, content, basic text one col">
+    <p:spTree>
+      <p:nvGrpSpPr>
+        <p:cNvPr id="1" name=""/>
+        <p:cNvGrpSpPr/>
+        <p:nvPr/>
+      </p:nvGrpSpPr>
+      <p:grpSpPr>
+        <a:xfrm>
+          <a:off x="0" y="0"/>
+          <a:ext cx="0" cy="0"/>
+          <a:chOff x="0" y="0"/>
+          <a:chExt cx="0" cy="0"/>
+        </a:xfrm>
+      </p:grpSpPr>
+      <p:sp>
+        <p:nvSpPr>
+          <p:cNvPr id="13" name="Rectangle 12">
+            <a:extLst>
+              <a:ext uri="{FF2B5EF4-FFF2-40B4-BE49-F238E27FC236}">
+                <a16:creationId xmlns:a16="http://schemas.microsoft.com/office/drawing/2014/main" id="{632DDCA5-A307-96EA-64A8-CCBA8E5F6393}"/>
+              </a:ext>
+            </a:extLst>
+          </p:cNvPr>
+          <p:cNvSpPr/>
+          <p:nvPr userDrawn="1"/>
+        </p:nvSpPr>
+        <p:spPr>
+          <a:xfrm>
+            <a:off x="0" y="0"/>
+            <a:ext cx="12206636" cy="6872615"/>
+          </a:xfrm>
+          <a:prstGeom prst="rect">
+            <a:avLst/>
+          </a:prstGeom>
+          <a:solidFill>
+            <a:srgbClr val="F6F8F8"/>
+          </a:solidFill>
+          <a:ln>
+            <a:noFill/>
+          </a:ln>
+        </p:spPr>
+        <p:style>
+          <a:lnRef idx="2">
+            <a:schemeClr val="accent1">
+              <a:shade val="50000"/>
+            </a:schemeClr>
+          </a:lnRef>
+          <a:fillRef idx="1">
+            <a:schemeClr val="accent1"/>
+          </a:fillRef>
+          <a:effectRef idx="0">
+            <a:schemeClr val="accent1"/>
+          </a:effectRef>
+          <a:fontRef idx="minor">
+            <a:schemeClr val="lt1"/>
+          </a:fontRef>
+        </p:style>
+        <p:txBody>
+          <a:bodyPr rtlCol="0" anchor="ctr"/>
+          <a:lstStyle/>
+          <a:p>
+            <a:pPr algn="ctr"/>
+            <a:endParaRPr lang="en-GB" dirty="0"/>
+          </a:p>
+        </p:txBody>
+      </p:sp>
+      <p:sp>
+        <p:nvSpPr>
+          <p:cNvPr id="2" name="Title 1"/>
+          <p:cNvSpPr>
+            <a:spLocks noGrp="1"/>
+          </p:cNvSpPr>
+          <p:nvPr>
+            <p:ph type="title" hasCustomPrompt="1"/>
+          </p:nvPr>
+        </p:nvSpPr>
+        <p:spPr>
+          <a:xfrm>
+            <a:off x="432000" y="432000"/>
+            <a:ext cx="11404154" cy="865186"/>
+          </a:xfrm>
+          <a:prstGeom prst="rect">
+            <a:avLst/>
+          </a:prstGeom>
+        </p:spPr>
+        <p:txBody>
+          <a:bodyPr lIns="0" tIns="0" rIns="0" bIns="0">
+            <a:normAutofit/>
+          </a:bodyPr>
+          <a:lstStyle>
+            <a:lvl1pPr>
+              <a:defRPr sz="3600" b="1">
+                <a:solidFill>
+                  <a:schemeClr val="tx1"/>
+                </a:solidFill>
+              </a:defRPr>
+            </a:lvl1pPr>
+          </a:lstStyle>
+          <a:p>
+            <a:r>
+              <a:rPr lang="en-GB" dirty="0"/>
+              <a:t>Heading</a:t>
+            </a:r>
+          </a:p>
+        </p:txBody>
+      </p:sp>
+      <p:sp>
+        <p:nvSpPr>
+          <p:cNvPr id="3" name="Content Placeholder 2"/>
+          <p:cNvSpPr>
+            <a:spLocks noGrp="1"/>
+          </p:cNvSpPr>
+          <p:nvPr>
+            <p:ph idx="1" hasCustomPrompt="1"/>
+          </p:nvPr>
+        </p:nvSpPr>
+        <p:spPr>
+          <a:xfrm>
+            <a:off x="412708" y="2106000"/>
+            <a:ext cx="7632000" cy="4026443"/>
+          </a:xfrm>
+          <a:prstGeom prst="rect">
+            <a:avLst/>
+          </a:prstGeom>
+        </p:spPr>
+        <p:txBody>
+          <a:bodyPr lIns="0" tIns="0" rIns="0" bIns="0">
+            <a:normAutofit/>
+          </a:bodyPr>
+          <a:lstStyle>
+            <a:lvl1pPr marL="0" indent="0">
+              <a:lnSpc>
+                <a:spcPct val="100000"/>
+              </a:lnSpc>
+              <a:spcBef>
+                <a:spcPts val="0"/>
+              </a:spcBef>
+              <a:spcAft>
+                <a:spcPts val="600"/>
+              </a:spcAft>
+              <a:buClr>
+                <a:schemeClr val="tx1"/>
+              </a:buClr>
+              <a:buFont typeface="Arial" panose="020B0604020202020204" pitchFamily="34" charset="0"/>
+              <a:buNone/>
+              <a:defRPr sz="2200" b="0">
+                <a:solidFill>
+                  <a:schemeClr val="accent6"/>
+                </a:solidFill>
+              </a:defRPr>
+            </a:lvl1pPr>
+            <a:lvl2pPr>
+              <a:buClr>
+                <a:schemeClr val="tx1"/>
+              </a:buClr>
+              <a:defRPr sz="2200">
+                <a:solidFill>
+                  <a:schemeClr val="tx1"/>
+                </a:solidFill>
+              </a:defRPr>
+            </a:lvl2pPr>
+            <a:lvl3pPr>
+              <a:buClr>
+                <a:schemeClr val="tx1"/>
+              </a:buClr>
+              <a:defRPr sz="2200">
+                <a:solidFill>
+                  <a:schemeClr val="tx1"/>
+                </a:solidFill>
+              </a:defRPr>
+            </a:lvl3pPr>
+            <a:lvl4pPr>
+              <a:buClr>
+                <a:schemeClr val="tx1"/>
+              </a:buClr>
+              <a:defRPr sz="2200">
+                <a:solidFill>
+                  <a:schemeClr val="tx1"/>
+                </a:solidFill>
+              </a:defRPr>
+            </a:lvl4pPr>
+            <a:lvl5pPr>
+              <a:buClr>
+                <a:schemeClr val="tx1"/>
+              </a:buClr>
+              <a:defRPr sz="2200">
+                <a:solidFill>
+                  <a:schemeClr val="tx1"/>
+                </a:solidFill>
+              </a:defRPr>
+            </a:lvl5pPr>
+          </a:lstStyle>
+          <a:p>
+            <a:pPr lvl="0"/>
+            <a:r>
+              <a:rPr lang="en-GB" dirty="0"/>
+              <a:t>Click to add text</a:t>
+            </a:r>
+          </a:p>
+        </p:txBody>
+      </p:sp>
+      <p:sp>
+        <p:nvSpPr>
+          <p:cNvPr id="9" name="TextBox 8">
+            <a:extLst>
+              <a:ext uri="{FF2B5EF4-FFF2-40B4-BE49-F238E27FC236}">
+                <a16:creationId xmlns:a16="http://schemas.microsoft.com/office/drawing/2014/main" id="{990784B1-AA1E-DC4B-BEB4-EC05249AFE00}"/>
+              </a:ext>
+            </a:extLst>
+          </p:cNvPr>
+          <p:cNvSpPr txBox="1"/>
+          <p:nvPr userDrawn="1"/>
+        </p:nvSpPr>
+        <p:spPr>
+          <a:xfrm>
+            <a:off x="4700954" y="4232031"/>
+            <a:ext cx="0" cy="0"/>
+          </a:xfrm>
+          <a:prstGeom prst="rect">
+            <a:avLst/>
+          </a:prstGeom>
+          <a:noFill/>
+        </p:spPr>
+        <p:txBody>
+          <a:bodyPr wrap="none" lIns="0" tIns="0" rIns="0" bIns="0" rtlCol="0">
+            <a:noAutofit/>
+          </a:bodyPr>
+          <a:lstStyle/>
+          <a:p>
+            <a:endParaRPr lang="en-GB" sz="1200" b="1">
+              <a:solidFill>
+                <a:schemeClr val="accent1"/>
+              </a:solidFill>
+            </a:endParaRPr>
+          </a:p>
+        </p:txBody>
+      </p:sp>
+      <p:sp>
+        <p:nvSpPr>
+          <p:cNvPr id="10" name="Rectangle 9">
+            <a:extLst>
+              <a:ext uri="{FF2B5EF4-FFF2-40B4-BE49-F238E27FC236}">
+                <a16:creationId xmlns:a16="http://schemas.microsoft.com/office/drawing/2014/main" id="{E42CCDA4-D437-6B48-8BBD-CAC30F281160}"/>
+              </a:ext>
+            </a:extLst>
+          </p:cNvPr>
+          <p:cNvSpPr/>
+          <p:nvPr userDrawn="1"/>
+        </p:nvSpPr>
+        <p:spPr>
+          <a:xfrm>
+            <a:off x="11444644" y="6404977"/>
+            <a:ext cx="372218" cy="276999"/>
+          </a:xfrm>
+          <a:prstGeom prst="rect">
+            <a:avLst/>
+          </a:prstGeom>
+        </p:spPr>
+        <p:txBody>
+          <a:bodyPr wrap="none">
+            <a:spAutoFit/>
+          </a:bodyPr>
+          <a:lstStyle/>
+          <a:p>
+            <a:pPr algn="r"/>
+            <a:fld id="{BA3B713D-1FBB-0E4F-91D0-D2B735266E79}" type="slidenum">
+              <a:rPr lang="en-GB" sz="1200" smtClean="0">
+                <a:solidFill>
+                  <a:schemeClr val="accent6"/>
+                </a:solidFill>
+              </a:rPr>
+              <a:pPr algn="r"/>
+              <a:t>‹#›</a:t>
+            </a:fld>
+            <a:endParaRPr lang="en-GB" sz="1200" dirty="0">
+              <a:solidFill>
+                <a:schemeClr val="accent6"/>
+              </a:solidFill>
+            </a:endParaRPr>
+          </a:p>
+        </p:txBody>
+      </p:sp>
+      <p:cxnSp>
+        <p:nvCxnSpPr>
+          <p:cNvPr id="6" name="Straight Connector 5">
+            <a:extLst>
+              <a:ext uri="{FF2B5EF4-FFF2-40B4-BE49-F238E27FC236}">
+                <a16:creationId xmlns:a16="http://schemas.microsoft.com/office/drawing/2014/main" id="{CDCA3D7C-EA8C-5A4E-9010-4AC84C6EA52F}"/>
+              </a:ext>
+            </a:extLst>
+          </p:cNvPr>
+          <p:cNvCxnSpPr/>
+          <p:nvPr userDrawn="1"/>
+        </p:nvCxnSpPr>
+        <p:spPr>
+          <a:xfrm>
+            <a:off x="432000" y="324000"/>
+            <a:ext cx="432118" cy="0"/>
+          </a:xfrm>
+          <a:prstGeom prst="line">
+            <a:avLst/>
+          </a:prstGeom>
+          <a:ln w="25400">
+            <a:solidFill>
+              <a:schemeClr val="bg2"/>
+            </a:solidFill>
+          </a:ln>
+        </p:spPr>
+        <p:style>
+          <a:lnRef idx="1">
+            <a:schemeClr val="accent1"/>
+          </a:lnRef>
+          <a:fillRef idx="0">
+            <a:schemeClr val="accent1"/>
+          </a:fillRef>
+          <a:effectRef idx="0">
+            <a:schemeClr val="accent1"/>
+          </a:effectRef>
+          <a:fontRef idx="minor">
+            <a:schemeClr val="tx1"/>
+          </a:fontRef>
+        </p:style>
+      </p:cxnSp>
+      <p:cxnSp>
+        <p:nvCxnSpPr>
+          <p:cNvPr id="11" name="Straight Connector 10">
+            <a:extLst>
+              <a:ext uri="{FF2B5EF4-FFF2-40B4-BE49-F238E27FC236}">
+                <a16:creationId xmlns:a16="http://schemas.microsoft.com/office/drawing/2014/main" id="{5591C7AB-7F8B-2041-80C3-EE781F24EB94}"/>
+              </a:ext>
+            </a:extLst>
+          </p:cNvPr>
+          <p:cNvCxnSpPr>
+            <a:cxnSpLocks/>
+          </p:cNvCxnSpPr>
+          <p:nvPr userDrawn="1"/>
+        </p:nvCxnSpPr>
+        <p:spPr>
+          <a:xfrm>
+            <a:off x="432000" y="6336000"/>
+            <a:ext cx="11376000" cy="0"/>
+          </a:xfrm>
+          <a:prstGeom prst="line">
+            <a:avLst/>
+          </a:prstGeom>
+          <a:ln w="6350">
+            <a:solidFill>
+              <a:schemeClr val="accent2"/>
+            </a:solidFill>
+          </a:ln>
+        </p:spPr>
+        <p:style>
+          <a:lnRef idx="1">
+            <a:schemeClr val="accent1"/>
+          </a:lnRef>
+          <a:fillRef idx="0">
+            <a:schemeClr val="accent1"/>
+          </a:fillRef>
+          <a:effectRef idx="0">
+            <a:schemeClr val="accent1"/>
+          </a:effectRef>
+          <a:fontRef idx="minor">
+            <a:schemeClr val="tx1"/>
+          </a:fontRef>
+        </p:style>
+      </p:cxnSp>
+      <p:pic>
+        <p:nvPicPr>
+          <p:cNvPr id="12" name="Picture 11" descr="Icon&#10;&#10;Description automatically generated with medium confidence">
+            <a:extLst>
+              <a:ext uri="{FF2B5EF4-FFF2-40B4-BE49-F238E27FC236}">
+                <a16:creationId xmlns:a16="http://schemas.microsoft.com/office/drawing/2014/main" id="{25B76462-9988-504D-BEEB-4D901B000C19}"/>
+              </a:ext>
+            </a:extLst>
+          </p:cNvPr>
+          <p:cNvPicPr>
+            <a:picLocks noChangeAspect="1"/>
+          </p:cNvPicPr>
+          <p:nvPr userDrawn="1"/>
+        </p:nvPicPr>
+        <p:blipFill>
+          <a:blip r:embed="rId2"/>
+          <a:stretch>
+            <a:fillRect/>
+          </a:stretch>
+        </p:blipFill>
+        <p:spPr>
+          <a:xfrm>
+            <a:off x="347413" y="6341795"/>
+            <a:ext cx="376428" cy="376428"/>
+          </a:xfrm>
+          <a:prstGeom prst="rect">
+            <a:avLst/>
+          </a:prstGeom>
+        </p:spPr>
+      </p:pic>
+    </p:spTree>
+    <p:extLst>
+      <p:ext uri="{BB962C8B-B14F-4D97-AF65-F5344CB8AC3E}">
+        <p14:creationId xmlns:p14="http://schemas.microsoft.com/office/powerpoint/2010/main" val="2766456805"/>
+      </p:ext>
+    </p:extLst>
+  </p:cSld>
+  <p:clrMapOvr>
+    <a:masterClrMapping/>
+  </p:clrMapOvr>
+  <mc:AlternateContent xmlns:mc="http://schemas.openxmlformats.org/markup-compatibility/2006" xmlns:p14="http://schemas.microsoft.com/office/powerpoint/2010/main">
+    <mc:Choice Requires="p14">
+      <p:transition spd="med" p14:dur="700">
+        <p:fade/>
+      </p:transition>
+    </mc:Choice>
+    <mc:Fallback xmlns="">
+      <p:transition spd="med">
+        <p:fade/>
+      </p:transition>
+    </mc:Fallback>
+  </mc:AlternateContent>
+</p:sldLayout>
+</file>
+
+<file path=ppt/slideLayouts/slideLayout20.xml><?xml version="1.0" encoding="utf-8"?>
 <p:sldLayout xmlns:a="http://schemas.openxmlformats.org/drawingml/2006/main" xmlns:r="http://schemas.openxmlformats.org/officeDocument/2006/relationships" xmlns:p="http://schemas.openxmlformats.org/presentationml/2006/main" preserve="1" userDrawn="1">
   <p:cSld name="Headline and image with header 4">
     <p:spTree>
@@ -14429,7 +13506,7 @@
 </p:sldLayout>
 </file>
 
-<file path=ppt/slideLayouts/slideLayout22.xml><?xml version="1.0" encoding="utf-8"?>
+<file path=ppt/slideLayouts/slideLayout21.xml><?xml version="1.0" encoding="utf-8"?>
 <p:sldLayout xmlns:a="http://schemas.openxmlformats.org/drawingml/2006/main" xmlns:r="http://schemas.openxmlformats.org/officeDocument/2006/relationships" xmlns:p="http://schemas.openxmlformats.org/presentationml/2006/main" userDrawn="1">
   <p:cSld name="Quote and image 5">
     <p:spTree>
@@ -15182,7 +14259,7 @@
 </p:sldLayout>
 </file>
 
-<file path=ppt/slideLayouts/slideLayout23.xml><?xml version="1.0" encoding="utf-8"?>
+<file path=ppt/slideLayouts/slideLayout22.xml><?xml version="1.0" encoding="utf-8"?>
 <p:sldLayout xmlns:a="http://schemas.openxmlformats.org/drawingml/2006/main" xmlns:r="http://schemas.openxmlformats.org/officeDocument/2006/relationships" xmlns:p="http://schemas.openxmlformats.org/presentationml/2006/main" preserve="1" userDrawn="1">
   <p:cSld name="Section Divider1">
     <p:spTree>
@@ -15441,7 +14518,7 @@
 </p:sldLayout>
 </file>
 
-<file path=ppt/slideLayouts/slideLayout24.xml><?xml version="1.0" encoding="utf-8"?>
+<file path=ppt/slideLayouts/slideLayout23.xml><?xml version="1.0" encoding="utf-8"?>
 <p:sldLayout xmlns:a="http://schemas.openxmlformats.org/drawingml/2006/main" xmlns:r="http://schemas.openxmlformats.org/officeDocument/2006/relationships" xmlns:p="http://schemas.openxmlformats.org/presentationml/2006/main" preserve="1" userDrawn="1">
   <p:cSld name="Title, subhead, three columns">
     <p:spTree>
@@ -15801,7 +14878,7 @@
 </p:sldLayout>
 </file>
 
-<file path=ppt/slideLayouts/slideLayout25.xml><?xml version="1.0" encoding="utf-8"?>
+<file path=ppt/slideLayouts/slideLayout24.xml><?xml version="1.0" encoding="utf-8"?>
 <p:sldLayout xmlns:a="http://schemas.openxmlformats.org/drawingml/2006/main" xmlns:r="http://schemas.openxmlformats.org/officeDocument/2006/relationships" xmlns:p="http://schemas.openxmlformats.org/presentationml/2006/main" preserve="1" userDrawn="1">
   <p:cSld name="Title, subhead, bullets">
     <p:spTree>
@@ -16155,7 +15232,7 @@
 </p:sldLayout>
 </file>
 
-<file path=ppt/slideLayouts/slideLayout26.xml><?xml version="1.0" encoding="utf-8"?>
+<file path=ppt/slideLayouts/slideLayout25.xml><?xml version="1.0" encoding="utf-8"?>
 <p:sldLayout xmlns:a="http://schemas.openxmlformats.org/drawingml/2006/main" xmlns:r="http://schemas.openxmlformats.org/officeDocument/2006/relationships" xmlns:p="http://schemas.openxmlformats.org/presentationml/2006/main" preserve="1" userDrawn="1">
   <p:cSld name="Text slide with image">
     <p:spTree>
@@ -16516,7 +15593,7 @@
 </p:sldLayout>
 </file>
 
-<file path=ppt/slideLayouts/slideLayout27.xml><?xml version="1.0" encoding="utf-8"?>
+<file path=ppt/slideLayouts/slideLayout26.xml><?xml version="1.0" encoding="utf-8"?>
 <p:sldLayout xmlns:a="http://schemas.openxmlformats.org/drawingml/2006/main" xmlns:r="http://schemas.openxmlformats.org/officeDocument/2006/relationships" xmlns:p="http://schemas.openxmlformats.org/presentationml/2006/main" preserve="1" userDrawn="1">
   <p:cSld name="Quote accessible">
     <p:spTree>
@@ -16819,7 +15896,7 @@
 </p:sldLayout>
 </file>
 
-<file path=ppt/slideLayouts/slideLayout28.xml><?xml version="1.0" encoding="utf-8"?>
+<file path=ppt/slideLayouts/slideLayout27.xml><?xml version="1.0" encoding="utf-8"?>
 <p:sldLayout xmlns:a="http://schemas.openxmlformats.org/drawingml/2006/main" xmlns:r="http://schemas.openxmlformats.org/officeDocument/2006/relationships" xmlns:p="http://schemas.openxmlformats.org/presentationml/2006/main" userDrawn="1">
   <p:cSld name="2_Breaker Heading1-Grey-Blue-Mix">
     <p:spTree>
@@ -17563,7 +16640,7 @@
 </p:sldLayout>
 </file>
 
-<file path=ppt/slideLayouts/slideLayout29.xml><?xml version="1.0" encoding="utf-8"?>
+<file path=ppt/slideLayouts/slideLayout28.xml><?xml version="1.0" encoding="utf-8"?>
 <p:sldLayout xmlns:a="http://schemas.openxmlformats.org/drawingml/2006/main" xmlns:r="http://schemas.openxmlformats.org/officeDocument/2006/relationships" xmlns:p="http://schemas.openxmlformats.org/presentationml/2006/main" userDrawn="1">
   <p:cSld name="End Slide ACCESSIBLE">
     <p:spTree>
@@ -19868,10 +18945,10 @@
           <p:nvPr userDrawn="1"/>
         </p:nvPicPr>
         <p:blipFill>
-          <a:blip r:embed="rId3">
+          <a:blip>
             <a:extLst>
               <a:ext uri="{96DAC541-7B7A-43D3-8B79-37D633B846F1}">
-                <asvg:svgBlip xmlns:asvg="http://schemas.microsoft.com/office/drawing/2016/SVG/main" r:embed="rId4"/>
+                <asvg:svgBlip xmlns:asvg="http://schemas.microsoft.com/office/drawing/2016/SVG/main" r:embed="rId3"/>
               </a:ext>
             </a:extLst>
           </a:blip>
@@ -19892,6 +18969,370 @@
     <p:extLst>
       <p:ext uri="{BB962C8B-B14F-4D97-AF65-F5344CB8AC3E}">
         <p14:creationId xmlns:p14="http://schemas.microsoft.com/office/powerpoint/2010/main" val="1845809966"/>
+      </p:ext>
+    </p:extLst>
+  </p:cSld>
+  <p:clrMapOvr>
+    <a:masterClrMapping/>
+  </p:clrMapOvr>
+  <mc:AlternateContent xmlns:mc="http://schemas.openxmlformats.org/markup-compatibility/2006" xmlns:p14="http://schemas.microsoft.com/office/powerpoint/2010/main">
+    <mc:Choice Requires="p14">
+      <p:transition spd="med" p14:dur="700">
+        <p:fade/>
+      </p:transition>
+    </mc:Choice>
+    <mc:Fallback xmlns="">
+      <p:transition spd="med">
+        <p:fade/>
+      </p:transition>
+    </mc:Fallback>
+  </mc:AlternateContent>
+</p:sldLayout>
+</file>
+
+<file path=ppt/slideLayouts/slideLayout29.xml><?xml version="1.0" encoding="utf-8"?>
+<p:sldLayout xmlns:a="http://schemas.openxmlformats.org/drawingml/2006/main" xmlns:r="http://schemas.openxmlformats.org/officeDocument/2006/relationships" xmlns:p="http://schemas.openxmlformats.org/presentationml/2006/main" userDrawn="1">
+  <p:cSld name="Data 1">
+    <p:spTree>
+      <p:nvGrpSpPr>
+        <p:cNvPr id="1" name=""/>
+        <p:cNvGrpSpPr/>
+        <p:nvPr/>
+      </p:nvGrpSpPr>
+      <p:grpSpPr>
+        <a:xfrm>
+          <a:off x="0" y="0"/>
+          <a:ext cx="0" cy="0"/>
+          <a:chOff x="0" y="0"/>
+          <a:chExt cx="0" cy="0"/>
+        </a:xfrm>
+      </p:grpSpPr>
+      <p:sp>
+        <p:nvSpPr>
+          <p:cNvPr id="12" name="Rectangle 11">
+            <a:extLst>
+              <a:ext uri="{FF2B5EF4-FFF2-40B4-BE49-F238E27FC236}">
+                <a16:creationId xmlns:a16="http://schemas.microsoft.com/office/drawing/2014/main" id="{D3C13175-05B4-C01D-1430-C129B9285BBF}"/>
+              </a:ext>
+            </a:extLst>
+          </p:cNvPr>
+          <p:cNvSpPr/>
+          <p:nvPr userDrawn="1"/>
+        </p:nvSpPr>
+        <p:spPr>
+          <a:xfrm>
+            <a:off x="0" y="25106"/>
+            <a:ext cx="12206636" cy="6872615"/>
+          </a:xfrm>
+          <a:prstGeom prst="rect">
+            <a:avLst/>
+          </a:prstGeom>
+          <a:solidFill>
+            <a:srgbClr val="F6F8F8"/>
+          </a:solidFill>
+          <a:ln>
+            <a:noFill/>
+          </a:ln>
+        </p:spPr>
+        <p:style>
+          <a:lnRef idx="2">
+            <a:schemeClr val="accent1">
+              <a:shade val="50000"/>
+            </a:schemeClr>
+          </a:lnRef>
+          <a:fillRef idx="1">
+            <a:schemeClr val="accent1"/>
+          </a:fillRef>
+          <a:effectRef idx="0">
+            <a:schemeClr val="accent1"/>
+          </a:effectRef>
+          <a:fontRef idx="minor">
+            <a:schemeClr val="lt1"/>
+          </a:fontRef>
+        </p:style>
+        <p:txBody>
+          <a:bodyPr rtlCol="0" anchor="ctr"/>
+          <a:lstStyle/>
+          <a:p>
+            <a:pPr algn="ctr"/>
+            <a:endParaRPr lang="en-GB" dirty="0"/>
+          </a:p>
+        </p:txBody>
+      </p:sp>
+      <p:sp>
+        <p:nvSpPr>
+          <p:cNvPr id="2" name="Title 1"/>
+          <p:cNvSpPr>
+            <a:spLocks noGrp="1"/>
+          </p:cNvSpPr>
+          <p:nvPr>
+            <p:ph type="title" hasCustomPrompt="1"/>
+          </p:nvPr>
+        </p:nvSpPr>
+        <p:spPr>
+          <a:xfrm>
+            <a:off x="432000" y="432000"/>
+            <a:ext cx="11404154" cy="865186"/>
+          </a:xfrm>
+          <a:prstGeom prst="rect">
+            <a:avLst/>
+          </a:prstGeom>
+        </p:spPr>
+        <p:txBody>
+          <a:bodyPr lIns="0" tIns="0" rIns="0" bIns="0">
+            <a:normAutofit/>
+          </a:bodyPr>
+          <a:lstStyle>
+            <a:lvl1pPr>
+              <a:defRPr sz="3600" b="1">
+                <a:solidFill>
+                  <a:schemeClr val="tx1"/>
+                </a:solidFill>
+              </a:defRPr>
+            </a:lvl1pPr>
+          </a:lstStyle>
+          <a:p>
+            <a:r>
+              <a:rPr lang="en-GB" dirty="0"/>
+              <a:t>Heading</a:t>
+            </a:r>
+          </a:p>
+        </p:txBody>
+      </p:sp>
+      <p:sp>
+        <p:nvSpPr>
+          <p:cNvPr id="9" name="TextBox 8">
+            <a:extLst>
+              <a:ext uri="{FF2B5EF4-FFF2-40B4-BE49-F238E27FC236}">
+                <a16:creationId xmlns:a16="http://schemas.microsoft.com/office/drawing/2014/main" id="{990784B1-AA1E-DC4B-BEB4-EC05249AFE00}"/>
+              </a:ext>
+            </a:extLst>
+          </p:cNvPr>
+          <p:cNvSpPr txBox="1"/>
+          <p:nvPr userDrawn="1"/>
+        </p:nvSpPr>
+        <p:spPr>
+          <a:xfrm>
+            <a:off x="4700954" y="4232031"/>
+            <a:ext cx="0" cy="0"/>
+          </a:xfrm>
+          <a:prstGeom prst="rect">
+            <a:avLst/>
+          </a:prstGeom>
+          <a:noFill/>
+        </p:spPr>
+        <p:txBody>
+          <a:bodyPr wrap="none" lIns="0" tIns="0" rIns="0" bIns="0" rtlCol="0">
+            <a:noAutofit/>
+          </a:bodyPr>
+          <a:lstStyle/>
+          <a:p>
+            <a:endParaRPr lang="en-GB" sz="1200" b="1">
+              <a:solidFill>
+                <a:schemeClr val="accent1"/>
+              </a:solidFill>
+            </a:endParaRPr>
+          </a:p>
+        </p:txBody>
+      </p:sp>
+      <p:sp>
+        <p:nvSpPr>
+          <p:cNvPr id="10" name="Rectangle 9">
+            <a:extLst>
+              <a:ext uri="{FF2B5EF4-FFF2-40B4-BE49-F238E27FC236}">
+                <a16:creationId xmlns:a16="http://schemas.microsoft.com/office/drawing/2014/main" id="{FF8B4B32-B7B7-DB40-9D0C-2D4D8414C6EC}"/>
+              </a:ext>
+            </a:extLst>
+          </p:cNvPr>
+          <p:cNvSpPr/>
+          <p:nvPr userDrawn="1"/>
+        </p:nvSpPr>
+        <p:spPr>
+          <a:xfrm>
+            <a:off x="11444644" y="6404977"/>
+            <a:ext cx="372218" cy="276999"/>
+          </a:xfrm>
+          <a:prstGeom prst="rect">
+            <a:avLst/>
+          </a:prstGeom>
+        </p:spPr>
+        <p:txBody>
+          <a:bodyPr wrap="none">
+            <a:spAutoFit/>
+          </a:bodyPr>
+          <a:lstStyle/>
+          <a:p>
+            <a:pPr algn="r"/>
+            <a:fld id="{BA3B713D-1FBB-0E4F-91D0-D2B735266E79}" type="slidenum">
+              <a:rPr lang="en-GB" sz="1200" smtClean="0">
+                <a:solidFill>
+                  <a:schemeClr val="accent6"/>
+                </a:solidFill>
+              </a:rPr>
+              <a:t>‹#›</a:t>
+            </a:fld>
+            <a:endParaRPr lang="en-GB" sz="1200" dirty="0">
+              <a:solidFill>
+                <a:schemeClr val="accent6"/>
+              </a:solidFill>
+            </a:endParaRPr>
+          </a:p>
+        </p:txBody>
+      </p:sp>
+      <p:sp>
+        <p:nvSpPr>
+          <p:cNvPr id="4" name="TextBox 3">
+            <a:extLst>
+              <a:ext uri="{FF2B5EF4-FFF2-40B4-BE49-F238E27FC236}">
+                <a16:creationId xmlns:a16="http://schemas.microsoft.com/office/drawing/2014/main" id="{97C3715D-C90E-7C4B-B312-C707773A39DD}"/>
+              </a:ext>
+            </a:extLst>
+          </p:cNvPr>
+          <p:cNvSpPr txBox="1"/>
+          <p:nvPr userDrawn="1"/>
+        </p:nvSpPr>
+        <p:spPr>
+          <a:xfrm>
+            <a:off x="2232561" y="3170712"/>
+            <a:ext cx="0" cy="0"/>
+          </a:xfrm>
+          <a:prstGeom prst="rect">
+            <a:avLst/>
+          </a:prstGeom>
+          <a:noFill/>
+        </p:spPr>
+        <p:txBody>
+          <a:bodyPr wrap="none" lIns="0" tIns="0" rIns="0" bIns="0" rtlCol="0">
+            <a:noAutofit/>
+          </a:bodyPr>
+          <a:lstStyle/>
+          <a:p>
+            <a:endParaRPr lang="en-GB" sz="1200" b="1" dirty="0">
+              <a:solidFill>
+                <a:schemeClr val="accent1"/>
+              </a:solidFill>
+            </a:endParaRPr>
+          </a:p>
+        </p:txBody>
+      </p:sp>
+      <p:cxnSp>
+        <p:nvCxnSpPr>
+          <p:cNvPr id="6" name="Straight Connector 5">
+            <a:extLst>
+              <a:ext uri="{FF2B5EF4-FFF2-40B4-BE49-F238E27FC236}">
+                <a16:creationId xmlns:a16="http://schemas.microsoft.com/office/drawing/2014/main" id="{E17E9C09-C9AF-554B-B095-D19078FA6376}"/>
+              </a:ext>
+            </a:extLst>
+          </p:cNvPr>
+          <p:cNvCxnSpPr/>
+          <p:nvPr userDrawn="1"/>
+        </p:nvCxnSpPr>
+        <p:spPr>
+          <a:xfrm>
+            <a:off x="432000" y="324000"/>
+            <a:ext cx="432118" cy="0"/>
+          </a:xfrm>
+          <a:prstGeom prst="line">
+            <a:avLst/>
+          </a:prstGeom>
+          <a:ln w="25400">
+            <a:solidFill>
+              <a:schemeClr val="bg2"/>
+            </a:solidFill>
+          </a:ln>
+        </p:spPr>
+        <p:style>
+          <a:lnRef idx="1">
+            <a:schemeClr val="accent1"/>
+          </a:lnRef>
+          <a:fillRef idx="0">
+            <a:schemeClr val="accent1"/>
+          </a:fillRef>
+          <a:effectRef idx="0">
+            <a:schemeClr val="accent1"/>
+          </a:effectRef>
+          <a:fontRef idx="minor">
+            <a:schemeClr val="tx1"/>
+          </a:fontRef>
+        </p:style>
+      </p:cxnSp>
+      <p:cxnSp>
+        <p:nvCxnSpPr>
+          <p:cNvPr id="7" name="Straight Connector 6">
+            <a:extLst>
+              <a:ext uri="{FF2B5EF4-FFF2-40B4-BE49-F238E27FC236}">
+                <a16:creationId xmlns:a16="http://schemas.microsoft.com/office/drawing/2014/main" id="{8C748E8E-8B34-9246-8F9A-CF165E4332AF}"/>
+              </a:ext>
+            </a:extLst>
+          </p:cNvPr>
+          <p:cNvCxnSpPr>
+            <a:cxnSpLocks/>
+          </p:cNvCxnSpPr>
+          <p:nvPr userDrawn="1"/>
+        </p:nvCxnSpPr>
+        <p:spPr>
+          <a:xfrm>
+            <a:off x="432000" y="6336000"/>
+            <a:ext cx="11376000" cy="0"/>
+          </a:xfrm>
+          <a:prstGeom prst="line">
+            <a:avLst/>
+          </a:prstGeom>
+          <a:ln w="6350">
+            <a:solidFill>
+              <a:schemeClr val="accent2"/>
+            </a:solidFill>
+          </a:ln>
+        </p:spPr>
+        <p:style>
+          <a:lnRef idx="1">
+            <a:schemeClr val="accent1"/>
+          </a:lnRef>
+          <a:fillRef idx="0">
+            <a:schemeClr val="accent1"/>
+          </a:fillRef>
+          <a:effectRef idx="0">
+            <a:schemeClr val="accent1"/>
+          </a:effectRef>
+          <a:fontRef idx="minor">
+            <a:schemeClr val="tx1"/>
+          </a:fontRef>
+        </p:style>
+      </p:cxnSp>
+      <p:pic>
+        <p:nvPicPr>
+          <p:cNvPr id="8" name="Picture 7" descr="Icon&#10;&#10;Description automatically generated with medium confidence">
+            <a:extLst>
+              <a:ext uri="{FF2B5EF4-FFF2-40B4-BE49-F238E27FC236}">
+                <a16:creationId xmlns:a16="http://schemas.microsoft.com/office/drawing/2014/main" id="{2C5DA4F2-D5B5-1F47-ADDA-9F6CB9A2A374}"/>
+              </a:ext>
+            </a:extLst>
+          </p:cNvPr>
+          <p:cNvPicPr>
+            <a:picLocks noChangeAspect="1"/>
+          </p:cNvPicPr>
+          <p:nvPr userDrawn="1"/>
+        </p:nvPicPr>
+        <p:blipFill>
+          <a:blip r:embed="rId2"/>
+          <a:stretch>
+            <a:fillRect/>
+          </a:stretch>
+        </p:blipFill>
+        <p:spPr>
+          <a:xfrm>
+            <a:off x="347413" y="6341795"/>
+            <a:ext cx="376428" cy="376428"/>
+          </a:xfrm>
+          <a:prstGeom prst="rect">
+            <a:avLst/>
+          </a:prstGeom>
+        </p:spPr>
+      </p:pic>
+    </p:spTree>
+    <p:extLst>
+      <p:ext uri="{BB962C8B-B14F-4D97-AF65-F5344CB8AC3E}">
+        <p14:creationId xmlns:p14="http://schemas.microsoft.com/office/powerpoint/2010/main" val="1950614547"/>
       </p:ext>
     </p:extLst>
   </p:cSld>
@@ -21789,370 +21230,6 @@
     <p:extLst>
       <p:ext uri="{BB962C8B-B14F-4D97-AF65-F5344CB8AC3E}">
         <p14:creationId xmlns:p14="http://schemas.microsoft.com/office/powerpoint/2010/main" val="1909195014"/>
-      </p:ext>
-    </p:extLst>
-  </p:cSld>
-  <p:clrMapOvr>
-    <a:masterClrMapping/>
-  </p:clrMapOvr>
-  <mc:AlternateContent xmlns:mc="http://schemas.openxmlformats.org/markup-compatibility/2006" xmlns:p14="http://schemas.microsoft.com/office/powerpoint/2010/main">
-    <mc:Choice Requires="p14">
-      <p:transition spd="med" p14:dur="700">
-        <p:fade/>
-      </p:transition>
-    </mc:Choice>
-    <mc:Fallback xmlns="">
-      <p:transition spd="med">
-        <p:fade/>
-      </p:transition>
-    </mc:Fallback>
-  </mc:AlternateContent>
-</p:sldLayout>
-</file>
-
-<file path=ppt/slideLayouts/slideLayout30.xml><?xml version="1.0" encoding="utf-8"?>
-<p:sldLayout xmlns:a="http://schemas.openxmlformats.org/drawingml/2006/main" xmlns:r="http://schemas.openxmlformats.org/officeDocument/2006/relationships" xmlns:p="http://schemas.openxmlformats.org/presentationml/2006/main" userDrawn="1">
-  <p:cSld name="Data 1">
-    <p:spTree>
-      <p:nvGrpSpPr>
-        <p:cNvPr id="1" name=""/>
-        <p:cNvGrpSpPr/>
-        <p:nvPr/>
-      </p:nvGrpSpPr>
-      <p:grpSpPr>
-        <a:xfrm>
-          <a:off x="0" y="0"/>
-          <a:ext cx="0" cy="0"/>
-          <a:chOff x="0" y="0"/>
-          <a:chExt cx="0" cy="0"/>
-        </a:xfrm>
-      </p:grpSpPr>
-      <p:sp>
-        <p:nvSpPr>
-          <p:cNvPr id="12" name="Rectangle 11">
-            <a:extLst>
-              <a:ext uri="{FF2B5EF4-FFF2-40B4-BE49-F238E27FC236}">
-                <a16:creationId xmlns:a16="http://schemas.microsoft.com/office/drawing/2014/main" id="{D3C13175-05B4-C01D-1430-C129B9285BBF}"/>
-              </a:ext>
-            </a:extLst>
-          </p:cNvPr>
-          <p:cNvSpPr/>
-          <p:nvPr userDrawn="1"/>
-        </p:nvSpPr>
-        <p:spPr>
-          <a:xfrm>
-            <a:off x="0" y="25106"/>
-            <a:ext cx="12206636" cy="6872615"/>
-          </a:xfrm>
-          <a:prstGeom prst="rect">
-            <a:avLst/>
-          </a:prstGeom>
-          <a:solidFill>
-            <a:srgbClr val="F6F8F8"/>
-          </a:solidFill>
-          <a:ln>
-            <a:noFill/>
-          </a:ln>
-        </p:spPr>
-        <p:style>
-          <a:lnRef idx="2">
-            <a:schemeClr val="accent1">
-              <a:shade val="50000"/>
-            </a:schemeClr>
-          </a:lnRef>
-          <a:fillRef idx="1">
-            <a:schemeClr val="accent1"/>
-          </a:fillRef>
-          <a:effectRef idx="0">
-            <a:schemeClr val="accent1"/>
-          </a:effectRef>
-          <a:fontRef idx="minor">
-            <a:schemeClr val="lt1"/>
-          </a:fontRef>
-        </p:style>
-        <p:txBody>
-          <a:bodyPr rtlCol="0" anchor="ctr"/>
-          <a:lstStyle/>
-          <a:p>
-            <a:pPr algn="ctr"/>
-            <a:endParaRPr lang="en-GB" dirty="0"/>
-          </a:p>
-        </p:txBody>
-      </p:sp>
-      <p:sp>
-        <p:nvSpPr>
-          <p:cNvPr id="2" name="Title 1"/>
-          <p:cNvSpPr>
-            <a:spLocks noGrp="1"/>
-          </p:cNvSpPr>
-          <p:nvPr>
-            <p:ph type="title" hasCustomPrompt="1"/>
-          </p:nvPr>
-        </p:nvSpPr>
-        <p:spPr>
-          <a:xfrm>
-            <a:off x="432000" y="432000"/>
-            <a:ext cx="11404154" cy="865186"/>
-          </a:xfrm>
-          <a:prstGeom prst="rect">
-            <a:avLst/>
-          </a:prstGeom>
-        </p:spPr>
-        <p:txBody>
-          <a:bodyPr lIns="0" tIns="0" rIns="0" bIns="0">
-            <a:normAutofit/>
-          </a:bodyPr>
-          <a:lstStyle>
-            <a:lvl1pPr>
-              <a:defRPr sz="3600" b="1">
-                <a:solidFill>
-                  <a:schemeClr val="tx1"/>
-                </a:solidFill>
-              </a:defRPr>
-            </a:lvl1pPr>
-          </a:lstStyle>
-          <a:p>
-            <a:r>
-              <a:rPr lang="en-GB" dirty="0"/>
-              <a:t>Heading</a:t>
-            </a:r>
-          </a:p>
-        </p:txBody>
-      </p:sp>
-      <p:sp>
-        <p:nvSpPr>
-          <p:cNvPr id="9" name="TextBox 8">
-            <a:extLst>
-              <a:ext uri="{FF2B5EF4-FFF2-40B4-BE49-F238E27FC236}">
-                <a16:creationId xmlns:a16="http://schemas.microsoft.com/office/drawing/2014/main" id="{990784B1-AA1E-DC4B-BEB4-EC05249AFE00}"/>
-              </a:ext>
-            </a:extLst>
-          </p:cNvPr>
-          <p:cNvSpPr txBox="1"/>
-          <p:nvPr userDrawn="1"/>
-        </p:nvSpPr>
-        <p:spPr>
-          <a:xfrm>
-            <a:off x="4700954" y="4232031"/>
-            <a:ext cx="0" cy="0"/>
-          </a:xfrm>
-          <a:prstGeom prst="rect">
-            <a:avLst/>
-          </a:prstGeom>
-          <a:noFill/>
-        </p:spPr>
-        <p:txBody>
-          <a:bodyPr wrap="none" lIns="0" tIns="0" rIns="0" bIns="0" rtlCol="0">
-            <a:noAutofit/>
-          </a:bodyPr>
-          <a:lstStyle/>
-          <a:p>
-            <a:endParaRPr lang="en-GB" sz="1200" b="1">
-              <a:solidFill>
-                <a:schemeClr val="accent1"/>
-              </a:solidFill>
-            </a:endParaRPr>
-          </a:p>
-        </p:txBody>
-      </p:sp>
-      <p:sp>
-        <p:nvSpPr>
-          <p:cNvPr id="10" name="Rectangle 9">
-            <a:extLst>
-              <a:ext uri="{FF2B5EF4-FFF2-40B4-BE49-F238E27FC236}">
-                <a16:creationId xmlns:a16="http://schemas.microsoft.com/office/drawing/2014/main" id="{FF8B4B32-B7B7-DB40-9D0C-2D4D8414C6EC}"/>
-              </a:ext>
-            </a:extLst>
-          </p:cNvPr>
-          <p:cNvSpPr/>
-          <p:nvPr userDrawn="1"/>
-        </p:nvSpPr>
-        <p:spPr>
-          <a:xfrm>
-            <a:off x="11444644" y="6404977"/>
-            <a:ext cx="372218" cy="276999"/>
-          </a:xfrm>
-          <a:prstGeom prst="rect">
-            <a:avLst/>
-          </a:prstGeom>
-        </p:spPr>
-        <p:txBody>
-          <a:bodyPr wrap="none">
-            <a:spAutoFit/>
-          </a:bodyPr>
-          <a:lstStyle/>
-          <a:p>
-            <a:pPr algn="r"/>
-            <a:fld id="{BA3B713D-1FBB-0E4F-91D0-D2B735266E79}" type="slidenum">
-              <a:rPr lang="en-GB" sz="1200" smtClean="0">
-                <a:solidFill>
-                  <a:schemeClr val="accent6"/>
-                </a:solidFill>
-              </a:rPr>
-              <a:t>‹#›</a:t>
-            </a:fld>
-            <a:endParaRPr lang="en-GB" sz="1200" dirty="0">
-              <a:solidFill>
-                <a:schemeClr val="accent6"/>
-              </a:solidFill>
-            </a:endParaRPr>
-          </a:p>
-        </p:txBody>
-      </p:sp>
-      <p:sp>
-        <p:nvSpPr>
-          <p:cNvPr id="4" name="TextBox 3">
-            <a:extLst>
-              <a:ext uri="{FF2B5EF4-FFF2-40B4-BE49-F238E27FC236}">
-                <a16:creationId xmlns:a16="http://schemas.microsoft.com/office/drawing/2014/main" id="{97C3715D-C90E-7C4B-B312-C707773A39DD}"/>
-              </a:ext>
-            </a:extLst>
-          </p:cNvPr>
-          <p:cNvSpPr txBox="1"/>
-          <p:nvPr userDrawn="1"/>
-        </p:nvSpPr>
-        <p:spPr>
-          <a:xfrm>
-            <a:off x="2232561" y="3170712"/>
-            <a:ext cx="0" cy="0"/>
-          </a:xfrm>
-          <a:prstGeom prst="rect">
-            <a:avLst/>
-          </a:prstGeom>
-          <a:noFill/>
-        </p:spPr>
-        <p:txBody>
-          <a:bodyPr wrap="none" lIns="0" tIns="0" rIns="0" bIns="0" rtlCol="0">
-            <a:noAutofit/>
-          </a:bodyPr>
-          <a:lstStyle/>
-          <a:p>
-            <a:endParaRPr lang="en-GB" sz="1200" b="1" dirty="0">
-              <a:solidFill>
-                <a:schemeClr val="accent1"/>
-              </a:solidFill>
-            </a:endParaRPr>
-          </a:p>
-        </p:txBody>
-      </p:sp>
-      <p:cxnSp>
-        <p:nvCxnSpPr>
-          <p:cNvPr id="6" name="Straight Connector 5">
-            <a:extLst>
-              <a:ext uri="{FF2B5EF4-FFF2-40B4-BE49-F238E27FC236}">
-                <a16:creationId xmlns:a16="http://schemas.microsoft.com/office/drawing/2014/main" id="{E17E9C09-C9AF-554B-B095-D19078FA6376}"/>
-              </a:ext>
-            </a:extLst>
-          </p:cNvPr>
-          <p:cNvCxnSpPr/>
-          <p:nvPr userDrawn="1"/>
-        </p:nvCxnSpPr>
-        <p:spPr>
-          <a:xfrm>
-            <a:off x="432000" y="324000"/>
-            <a:ext cx="432118" cy="0"/>
-          </a:xfrm>
-          <a:prstGeom prst="line">
-            <a:avLst/>
-          </a:prstGeom>
-          <a:ln w="25400">
-            <a:solidFill>
-              <a:schemeClr val="bg2"/>
-            </a:solidFill>
-          </a:ln>
-        </p:spPr>
-        <p:style>
-          <a:lnRef idx="1">
-            <a:schemeClr val="accent1"/>
-          </a:lnRef>
-          <a:fillRef idx="0">
-            <a:schemeClr val="accent1"/>
-          </a:fillRef>
-          <a:effectRef idx="0">
-            <a:schemeClr val="accent1"/>
-          </a:effectRef>
-          <a:fontRef idx="minor">
-            <a:schemeClr val="tx1"/>
-          </a:fontRef>
-        </p:style>
-      </p:cxnSp>
-      <p:cxnSp>
-        <p:nvCxnSpPr>
-          <p:cNvPr id="7" name="Straight Connector 6">
-            <a:extLst>
-              <a:ext uri="{FF2B5EF4-FFF2-40B4-BE49-F238E27FC236}">
-                <a16:creationId xmlns:a16="http://schemas.microsoft.com/office/drawing/2014/main" id="{8C748E8E-8B34-9246-8F9A-CF165E4332AF}"/>
-              </a:ext>
-            </a:extLst>
-          </p:cNvPr>
-          <p:cNvCxnSpPr>
-            <a:cxnSpLocks/>
-          </p:cNvCxnSpPr>
-          <p:nvPr userDrawn="1"/>
-        </p:nvCxnSpPr>
-        <p:spPr>
-          <a:xfrm>
-            <a:off x="432000" y="6336000"/>
-            <a:ext cx="11376000" cy="0"/>
-          </a:xfrm>
-          <a:prstGeom prst="line">
-            <a:avLst/>
-          </a:prstGeom>
-          <a:ln w="6350">
-            <a:solidFill>
-              <a:schemeClr val="accent2"/>
-            </a:solidFill>
-          </a:ln>
-        </p:spPr>
-        <p:style>
-          <a:lnRef idx="1">
-            <a:schemeClr val="accent1"/>
-          </a:lnRef>
-          <a:fillRef idx="0">
-            <a:schemeClr val="accent1"/>
-          </a:fillRef>
-          <a:effectRef idx="0">
-            <a:schemeClr val="accent1"/>
-          </a:effectRef>
-          <a:fontRef idx="minor">
-            <a:schemeClr val="tx1"/>
-          </a:fontRef>
-        </p:style>
-      </p:cxnSp>
-      <p:pic>
-        <p:nvPicPr>
-          <p:cNvPr id="8" name="Picture 7" descr="Icon&#10;&#10;Description automatically generated with medium confidence">
-            <a:extLst>
-              <a:ext uri="{FF2B5EF4-FFF2-40B4-BE49-F238E27FC236}">
-                <a16:creationId xmlns:a16="http://schemas.microsoft.com/office/drawing/2014/main" id="{2C5DA4F2-D5B5-1F47-ADDA-9F6CB9A2A374}"/>
-              </a:ext>
-            </a:extLst>
-          </p:cNvPr>
-          <p:cNvPicPr>
-            <a:picLocks noChangeAspect="1"/>
-          </p:cNvPicPr>
-          <p:nvPr userDrawn="1"/>
-        </p:nvPicPr>
-        <p:blipFill>
-          <a:blip r:embed="rId2"/>
-          <a:stretch>
-            <a:fillRect/>
-          </a:stretch>
-        </p:blipFill>
-        <p:spPr>
-          <a:xfrm>
-            <a:off x="347413" y="6341795"/>
-            <a:ext cx="376428" cy="376428"/>
-          </a:xfrm>
-          <a:prstGeom prst="rect">
-            <a:avLst/>
-          </a:prstGeom>
-        </p:spPr>
-      </p:pic>
-    </p:spTree>
-    <p:extLst>
-      <p:ext uri="{BB962C8B-B14F-4D97-AF65-F5344CB8AC3E}">
-        <p14:creationId xmlns:p14="http://schemas.microsoft.com/office/powerpoint/2010/main" val="1950614547"/>
       </p:ext>
     </p:extLst>
   </p:cSld>
@@ -25580,7 +24657,7 @@
           <a:p>
             <a:fld id="{F24574AD-8404-48D7-8DB8-BCC9125C3396}" type="datetimeFigureOut">
               <a:rPr lang="en-GB" smtClean="0"/>
-              <a:t>17/11/2025</a:t>
+              <a:t>02/06/2026</a:t>
             </a:fld>
             <a:endParaRPr lang="en-GB"/>
           </a:p>
@@ -25700,21 +24777,20 @@
     <p:sldLayoutId id="2147483815" r:id="rId13"/>
     <p:sldLayoutId id="2147483798" r:id="rId14"/>
     <p:sldLayoutId id="2147483719" r:id="rId15"/>
-    <p:sldLayoutId id="2147483804" r:id="rId16"/>
-    <p:sldLayoutId id="2147483823" r:id="rId17"/>
-    <p:sldLayoutId id="2147483824" r:id="rId18"/>
-    <p:sldLayoutId id="2147483821" r:id="rId19"/>
-    <p:sldLayoutId id="2147483822" r:id="rId20"/>
-    <p:sldLayoutId id="2147483825" r:id="rId21"/>
-    <p:sldLayoutId id="2147483806" r:id="rId22"/>
-    <p:sldLayoutId id="2147483690" r:id="rId23"/>
-    <p:sldLayoutId id="2147483762" r:id="rId24"/>
-    <p:sldLayoutId id="2147483747" r:id="rId25"/>
-    <p:sldLayoutId id="2147483760" r:id="rId26"/>
-    <p:sldLayoutId id="2147483714" r:id="rId27"/>
-    <p:sldLayoutId id="2147483831" r:id="rId28"/>
-    <p:sldLayoutId id="2147483924" r:id="rId29"/>
-    <p:sldLayoutId id="2147483925" r:id="rId30"/>
+    <p:sldLayoutId id="2147483823" r:id="rId16"/>
+    <p:sldLayoutId id="2147483824" r:id="rId17"/>
+    <p:sldLayoutId id="2147483821" r:id="rId18"/>
+    <p:sldLayoutId id="2147483822" r:id="rId19"/>
+    <p:sldLayoutId id="2147483825" r:id="rId20"/>
+    <p:sldLayoutId id="2147483806" r:id="rId21"/>
+    <p:sldLayoutId id="2147483690" r:id="rId22"/>
+    <p:sldLayoutId id="2147483762" r:id="rId23"/>
+    <p:sldLayoutId id="2147483747" r:id="rId24"/>
+    <p:sldLayoutId id="2147483760" r:id="rId25"/>
+    <p:sldLayoutId id="2147483714" r:id="rId26"/>
+    <p:sldLayoutId id="2147483831" r:id="rId27"/>
+    <p:sldLayoutId id="2147483924" r:id="rId28"/>
+    <p:sldLayoutId id="2147483925" r:id="rId29"/>
   </p:sldLayoutIdLst>
   <mc:AlternateContent xmlns:mc="http://schemas.openxmlformats.org/markup-compatibility/2006" xmlns:p14="http://schemas.microsoft.com/office/powerpoint/2010/main">
     <mc:Choice Requires="p14">
@@ -26112,6 +25188,39 @@
           <a:p>
             <a:r>
               <a:rPr lang="en-GB" sz="6000" dirty="0"/>
+              <a:t>Being a Data Scientist in Healthcare</a:t>
+            </a:r>
+          </a:p>
+        </p:txBody>
+      </p:sp>
+      <p:sp>
+        <p:nvSpPr>
+          <p:cNvPr id="3" name="Subtitle 2">
+            <a:extLst>
+              <a:ext uri="{FF2B5EF4-FFF2-40B4-BE49-F238E27FC236}">
+                <a16:creationId xmlns:a16="http://schemas.microsoft.com/office/drawing/2014/main" id="{2AB96998-8BA0-CF4D-B57F-DEBCAD1141C5}"/>
+              </a:ext>
+            </a:extLst>
+          </p:cNvPr>
+          <p:cNvSpPr>
+            <a:spLocks noGrp="1"/>
+          </p:cNvSpPr>
+          <p:nvPr>
+            <p:ph type="subTitle" idx="1"/>
+          </p:nvPr>
+        </p:nvSpPr>
+        <p:spPr>
+          <a:xfrm>
+            <a:off x="432000" y="4019100"/>
+            <a:ext cx="7973051" cy="1024967"/>
+          </a:xfrm>
+        </p:spPr>
+        <p:txBody>
+          <a:bodyPr/>
+          <a:lstStyle/>
+          <a:p>
+            <a:r>
+              <a:rPr lang="en-GB" b="1" dirty="0"/>
               <a:t>Inspiring the Future: Pathways into Healthcare </a:t>
             </a:r>
           </a:p>
@@ -26119,39 +25228,6 @@
       </p:sp>
       <p:sp>
         <p:nvSpPr>
-          <p:cNvPr id="3" name="Subtitle 2">
-            <a:extLst>
-              <a:ext uri="{FF2B5EF4-FFF2-40B4-BE49-F238E27FC236}">
-                <a16:creationId xmlns:a16="http://schemas.microsoft.com/office/drawing/2014/main" id="{2AB96998-8BA0-CF4D-B57F-DEBCAD1141C5}"/>
-              </a:ext>
-            </a:extLst>
-          </p:cNvPr>
-          <p:cNvSpPr>
-            <a:spLocks noGrp="1"/>
-          </p:cNvSpPr>
-          <p:nvPr>
-            <p:ph type="subTitle" idx="1"/>
-          </p:nvPr>
-        </p:nvSpPr>
-        <p:spPr>
-          <a:xfrm>
-            <a:off x="432000" y="4019100"/>
-            <a:ext cx="7973051" cy="1024967"/>
-          </a:xfrm>
-        </p:spPr>
-        <p:txBody>
-          <a:bodyPr/>
-          <a:lstStyle/>
-          <a:p>
-            <a:r>
-              <a:rPr lang="en-GB" b="1" dirty="0"/>
-              <a:t>Being a Data Scientist in Healthcare</a:t>
-            </a:r>
-          </a:p>
-        </p:txBody>
-      </p:sp>
-      <p:sp>
-        <p:nvSpPr>
           <p:cNvPr id="9" name="Text Placeholder 8">
             <a:extLst>
               <a:ext uri="{FF2B5EF4-FFF2-40B4-BE49-F238E27FC236}">
@@ -26174,7 +25250,7 @@
         </p:spPr>
         <p:txBody>
           <a:bodyPr>
-            <a:normAutofit fontScale="77500" lnSpcReduction="20000"/>
+            <a:normAutofit/>
           </a:bodyPr>
           <a:lstStyle/>
           <a:p>
@@ -26184,16 +25260,16 @@
               </a:lnSpc>
             </a:pPr>
             <a:r>
+              <a:rPr lang="en-GB" dirty="0">
+                <a:hlinkClick r:id="rId3"/>
+              </a:rPr>
+              <a:t>england.datascience@nhs.net</a:t>
+            </a:r>
+            <a:r>
               <a:rPr lang="en-GB" dirty="0"/>
-              <a:t>Presented by:</a:t>
+              <a:t> </a:t>
             </a:r>
-            <a:br>
-              <a:rPr lang="en-GB" dirty="0"/>
-            </a:br>
-            <a:r>
-              <a:rPr lang="en-GB" b="1" dirty="0"/>
-              <a:t>Kenneth Quan</a:t>
-            </a:r>
+            <a:endParaRPr lang="en-GB" b="1" dirty="0"/>
           </a:p>
         </p:txBody>
       </p:sp>
@@ -26201,83 +25277,6 @@
     <p:extLst>
       <p:ext uri="{BB962C8B-B14F-4D97-AF65-F5344CB8AC3E}">
         <p14:creationId xmlns:p14="http://schemas.microsoft.com/office/powerpoint/2010/main" val="3830231407"/>
-      </p:ext>
-    </p:extLst>
-  </p:cSld>
-  <p:clrMapOvr>
-    <a:masterClrMapping/>
-  </p:clrMapOvr>
-  <mc:AlternateContent xmlns:mc="http://schemas.openxmlformats.org/markup-compatibility/2006" xmlns:p14="http://schemas.microsoft.com/office/powerpoint/2010/main">
-    <mc:Choice Requires="p14">
-      <p:transition spd="med" p14:dur="700">
-        <p:fade/>
-      </p:transition>
-    </mc:Choice>
-    <mc:Fallback xmlns="">
-      <p:transition spd="med">
-        <p:fade/>
-      </p:transition>
-    </mc:Fallback>
-  </mc:AlternateContent>
-</p:sld>
-</file>
-
-<file path=ppt/slides/slide10.xml><?xml version="1.0" encoding="utf-8"?>
-<p:sld xmlns:a="http://schemas.openxmlformats.org/drawingml/2006/main" xmlns:r="http://schemas.openxmlformats.org/officeDocument/2006/relationships" xmlns:p="http://schemas.openxmlformats.org/presentationml/2006/main">
-  <p:cSld>
-    <p:spTree>
-      <p:nvGrpSpPr>
-        <p:cNvPr id="1" name=""/>
-        <p:cNvGrpSpPr/>
-        <p:nvPr/>
-      </p:nvGrpSpPr>
-      <p:grpSpPr>
-        <a:xfrm>
-          <a:off x="0" y="0"/>
-          <a:ext cx="0" cy="0"/>
-          <a:chOff x="0" y="0"/>
-          <a:chExt cx="0" cy="0"/>
-        </a:xfrm>
-      </p:grpSpPr>
-      <p:sp>
-        <p:nvSpPr>
-          <p:cNvPr id="3" name="Title 2">
-            <a:extLst>
-              <a:ext uri="{FF2B5EF4-FFF2-40B4-BE49-F238E27FC236}">
-                <a16:creationId xmlns:a16="http://schemas.microsoft.com/office/drawing/2014/main" id="{4C3EE7C2-60FC-4F5B-8CCC-6675FD9603A1}"/>
-              </a:ext>
-            </a:extLst>
-          </p:cNvPr>
-          <p:cNvSpPr>
-            <a:spLocks noGrp="1"/>
-          </p:cNvSpPr>
-          <p:nvPr>
-            <p:ph type="title" idx="4294967295"/>
-          </p:nvPr>
-        </p:nvSpPr>
-        <p:spPr>
-          <a:xfrm>
-            <a:off x="838200" y="-1325563"/>
-            <a:ext cx="10515600" cy="1325563"/>
-          </a:xfrm>
-        </p:spPr>
-        <p:txBody>
-          <a:bodyPr vert="horz" lIns="91440" tIns="45720" rIns="91440" bIns="45720" rtlCol="0" anchor="b">
-            <a:normAutofit/>
-          </a:bodyPr>
-          <a:lstStyle/>
-          <a:p>
-            <a:r>
-              <a:rPr lang="en-GB" dirty="0"/>
-              <a:t>End slide</a:t>
-            </a:r>
-          </a:p>
-        </p:txBody>
-      </p:sp>
-    </p:spTree>
-    <p:extLst>
-      <p:ext uri="{BB962C8B-B14F-4D97-AF65-F5344CB8AC3E}">
-        <p14:creationId xmlns:p14="http://schemas.microsoft.com/office/powerpoint/2010/main" val="470626060"/>
       </p:ext>
     </p:extLst>
   </p:cSld>
@@ -26907,7 +25906,7 @@
                   </a:solidFill>
                   <a:latin typeface="Arial"/>
                 </a:rPr>
-                <a:t> Data in England</a:t>
+                <a:t> Data of all Patients</a:t>
               </a:r>
               <a:endParaRPr kumimoji="0" lang="en-US" sz="1800" b="1" i="0" u="none" strike="noStrike" kern="1200" cap="none" spc="0" normalizeH="0" baseline="0" noProof="0" dirty="0">
                 <a:ln>
@@ -26942,10 +25941,10 @@
           <p:nvPr/>
         </p:nvPicPr>
         <p:blipFill>
-          <a:blip r:embed="rId2">
+          <a:blip>
             <a:extLst>
               <a:ext uri="{96DAC541-7B7A-43D3-8B79-37D633B846F1}">
-                <asvg:svgBlip xmlns:asvg="http://schemas.microsoft.com/office/drawing/2016/SVG/main" r:embed="rId3"/>
+                <asvg:svgBlip xmlns:asvg="http://schemas.microsoft.com/office/drawing/2016/SVG/main" r:embed="rId2"/>
               </a:ext>
             </a:extLst>
           </a:blip>
@@ -27283,7 +26282,7 @@
           <p:nvPr/>
         </p:nvPicPr>
         <p:blipFill>
-          <a:blip r:embed="rId4"/>
+          <a:blip r:embed="rId3"/>
           <a:stretch>
             <a:fillRect/>
           </a:stretch>
@@ -27313,7 +26312,7 @@
           <p:nvPr/>
         </p:nvPicPr>
         <p:blipFill>
-          <a:blip r:embed="rId5"/>
+          <a:blip r:embed="rId4"/>
           <a:stretch>
             <a:fillRect/>
           </a:stretch>
@@ -27506,7 +26505,7 @@
           <a:p>
             <a:r>
               <a:rPr lang="en-GB" dirty="0"/>
-              <a:t>Example of my work</a:t>
+              <a:t>Example of work</a:t>
             </a:r>
           </a:p>
         </p:txBody>
@@ -28226,47 +27225,31 @@
               <a:t>Educated to degree level, (such as </a:t>
             </a:r>
             <a:r>
-              <a:rPr lang="en-GB" sz="2400" dirty="0">
-                <a:highlight>
-                  <a:srgbClr val="FFFF00"/>
-                </a:highlight>
-              </a:rPr>
-              <a:t>Statistics,</a:t>
+              <a:rPr lang="en-GB" sz="2400" b="1" u="sng" dirty="0"/>
+              <a:t>Statistics</a:t>
             </a:r>
             <a:r>
               <a:rPr lang="en-GB" sz="2400" dirty="0"/>
-              <a:t> </a:t>
+              <a:t>, </a:t>
             </a:r>
             <a:r>
-              <a:rPr lang="en-GB" sz="2400" dirty="0">
-                <a:highlight>
-                  <a:srgbClr val="FFFF00"/>
-                </a:highlight>
-              </a:rPr>
-              <a:t>Mathematics,</a:t>
+              <a:rPr lang="en-GB" sz="2400" b="1" u="sng" dirty="0"/>
+              <a:t>Mathematics</a:t>
             </a:r>
             <a:r>
               <a:rPr lang="en-GB" sz="2400" dirty="0"/>
-              <a:t> </a:t>
+              <a:t>, </a:t>
             </a:r>
             <a:r>
-              <a:rPr lang="en-GB" sz="2400" dirty="0">
-                <a:highlight>
-                  <a:srgbClr val="FFFF00"/>
-                </a:highlight>
-              </a:rPr>
-              <a:t>Physics </a:t>
+              <a:rPr lang="en-GB" sz="2400" b="1" u="sng" dirty="0"/>
+              <a:t>Physics</a:t>
             </a:r>
             <a:r>
               <a:rPr lang="en-GB" sz="2400" dirty="0"/>
-              <a:t>or </a:t>
+              <a:t> or </a:t>
             </a:r>
             <a:r>
-              <a:rPr lang="en-GB" sz="2400" dirty="0">
-                <a:highlight>
-                  <a:srgbClr val="FFFF00"/>
-                </a:highlight>
-              </a:rPr>
+              <a:rPr lang="en-GB" sz="2400" b="1" u="sng" dirty="0"/>
               <a:t>Computer Science</a:t>
             </a:r>
             <a:r>
@@ -28553,11 +27536,7 @@
               <a:t>Degree level equivalent </a:t>
             </a:r>
             <a:r>
-              <a:rPr lang="en-GB" sz="2400" dirty="0">
-                <a:highlight>
-                  <a:srgbClr val="FFFF00"/>
-                </a:highlight>
-              </a:rPr>
+              <a:rPr lang="en-GB" sz="2400" b="1" u="sng" dirty="0"/>
               <a:t>specialist experience</a:t>
             </a:r>
             <a:r>
@@ -28565,23 +27544,15 @@
               <a:t>, backed up by additional and </a:t>
             </a:r>
             <a:r>
-              <a:rPr lang="en-GB" sz="2400" dirty="0">
-                <a:highlight>
-                  <a:srgbClr val="FFFF00"/>
-                </a:highlight>
-              </a:rPr>
-              <a:t>continual professional development</a:t>
+              <a:rPr lang="en-GB" sz="2400" b="1" u="sng" dirty="0"/>
+              <a:t>continual professional development </a:t>
             </a:r>
             <a:r>
               <a:rPr lang="en-GB" sz="2400" dirty="0"/>
-              <a:t> and/or </a:t>
+              <a:t>and/or </a:t>
             </a:r>
             <a:r>
-              <a:rPr lang="en-GB" sz="2400" dirty="0">
-                <a:highlight>
-                  <a:srgbClr val="FFFF00"/>
-                </a:highlight>
-              </a:rPr>
+              <a:rPr lang="en-GB" sz="2400" b="1" u="sng" dirty="0"/>
               <a:t>academic study at a higher level</a:t>
             </a:r>
             <a:r>
@@ -28647,7 +27618,7 @@
           <p:nvPr>
             <p:extLst>
               <p:ext uri="{D42A27DB-BD31-4B8C-83A1-F6EECF244321}">
-                <p14:modId xmlns:p14="http://schemas.microsoft.com/office/powerpoint/2010/main" val="1708522087"/>
+                <p14:modId xmlns:p14="http://schemas.microsoft.com/office/powerpoint/2010/main" val="4134482630"/>
               </p:ext>
             </p:extLst>
           </p:nvPr>
@@ -28871,7 +27842,7 @@
                           <a:ea typeface="+mn-ea"/>
                           <a:cs typeface="+mn-cs"/>
                         </a:rPr>
-                        <a:t>: Band 2 - £11.45/hr</a:t>
+                        <a:t>: Band 2, £12.92/hr</a:t>
                       </a:r>
                     </a:p>
                   </a:txBody>
@@ -28944,7 +27915,7 @@
           <p:nvPr>
             <p:extLst>
               <p:ext uri="{D42A27DB-BD31-4B8C-83A1-F6EECF244321}">
-                <p14:modId xmlns:p14="http://schemas.microsoft.com/office/powerpoint/2010/main" val="3140164227"/>
+                <p14:modId xmlns:p14="http://schemas.microsoft.com/office/powerpoint/2010/main" val="3243941742"/>
               </p:ext>
             </p:extLst>
           </p:nvPr>
@@ -29162,7 +28133,7 @@
                           <a:ea typeface="+mn-ea"/>
                           <a:cs typeface="+mn-cs"/>
                         </a:rPr>
-                        <a:t>: Band 5 - £14.53/hr</a:t>
+                        <a:t>: Band 5, £16.40/hr</a:t>
                       </a:r>
                     </a:p>
                   </a:txBody>
@@ -29271,7 +28242,39 @@
                 <a:ea typeface="Calibri" panose="020F0502020204030204" pitchFamily="34" charset="0"/>
                 <a:cs typeface="Times New Roman" panose="02020603050405020304" pitchFamily="18" charset="0"/>
               </a:rPr>
-              <a:t>purposes and may not reflect current career opportunities in NHS England </a:t>
+              <a:t>purposes and may not reflect current career opportunities in NHS England. </a:t>
+            </a:r>
+            <a:r>
+              <a:rPr lang="en-GB" kern="100">
+                <a:latin typeface="Arial" panose="020B0604020202020204" pitchFamily="34" charset="0"/>
+                <a:ea typeface="Calibri" panose="020F0502020204030204" pitchFamily="34" charset="0"/>
+                <a:cs typeface="Times New Roman" panose="02020603050405020304" pitchFamily="18" charset="0"/>
+              </a:rPr>
+              <a:t>Pay based </a:t>
+            </a:r>
+            <a:r>
+              <a:rPr lang="en-GB" kern="100" dirty="0">
+                <a:latin typeface="Arial" panose="020B0604020202020204" pitchFamily="34" charset="0"/>
+                <a:ea typeface="Calibri" panose="020F0502020204030204" pitchFamily="34" charset="0"/>
+                <a:cs typeface="Times New Roman" panose="02020603050405020304" pitchFamily="18" charset="0"/>
+              </a:rPr>
+              <a:t>on </a:t>
+            </a:r>
+            <a:r>
+              <a:rPr lang="en-GB" kern="100" dirty="0" err="1">
+                <a:latin typeface="Arial" panose="020B0604020202020204" pitchFamily="34" charset="0"/>
+                <a:ea typeface="Calibri" panose="020F0502020204030204" pitchFamily="34" charset="0"/>
+                <a:cs typeface="Times New Roman" panose="02020603050405020304" pitchFamily="18" charset="0"/>
+              </a:rPr>
+              <a:t>AfC</a:t>
+            </a:r>
+            <a:r>
+              <a:rPr lang="en-GB" kern="100" dirty="0">
+                <a:latin typeface="Arial" panose="020B0604020202020204" pitchFamily="34" charset="0"/>
+                <a:ea typeface="Calibri" panose="020F0502020204030204" pitchFamily="34" charset="0"/>
+                <a:cs typeface="Times New Roman" panose="02020603050405020304" pitchFamily="18" charset="0"/>
+              </a:rPr>
+              <a:t> 2026/27.</a:t>
             </a:r>
             <a:endParaRPr lang="en-GB" sz="1800" kern="100" dirty="0">
               <a:effectLst/>
@@ -29420,16 +28423,12 @@
               </a:lnSpc>
             </a:pPr>
             <a:r>
-              <a:rPr lang="en-GB" sz="3200" dirty="0">
-                <a:highlight>
-                  <a:srgbClr val="FFFF00"/>
-                </a:highlight>
-              </a:rPr>
-              <a:t>Suggest novel uses </a:t>
+              <a:rPr lang="en-GB" sz="3200" b="1" u="sng" dirty="0"/>
+              <a:t>Suggest</a:t>
             </a:r>
             <a:r>
               <a:rPr lang="en-GB" sz="3200" dirty="0"/>
-              <a:t>of existing data and technology.</a:t>
+              <a:t> novel uses of existing data and technology.</a:t>
             </a:r>
           </a:p>
         </p:txBody>
@@ -29491,16 +28490,12 @@
               </a:lnSpc>
             </a:pPr>
             <a:r>
-              <a:rPr lang="en-GB" sz="3200" dirty="0">
-                <a:highlight>
-                  <a:srgbClr val="FFFF00"/>
-                </a:highlight>
-              </a:rPr>
-              <a:t>Explain the analytical evidence </a:t>
+              <a:rPr lang="en-GB" sz="3200" b="1" u="sng" dirty="0"/>
+              <a:t>Explain</a:t>
             </a:r>
             <a:r>
               <a:rPr lang="en-GB" sz="3200" dirty="0"/>
-              <a:t>resulting from own analysis</a:t>
+              <a:t> the analytical evidence resulting from own analysis</a:t>
             </a:r>
           </a:p>
         </p:txBody>
@@ -29562,16 +28557,12 @@
               </a:lnSpc>
             </a:pPr>
             <a:r>
-              <a:rPr lang="en-GB" sz="3200" dirty="0">
-                <a:highlight>
-                  <a:srgbClr val="FFFF00"/>
-                </a:highlight>
-              </a:rPr>
-              <a:t>Support other data scientists </a:t>
+              <a:rPr lang="en-GB" sz="3200" b="1" u="sng" dirty="0"/>
+              <a:t>Support</a:t>
             </a:r>
             <a:r>
               <a:rPr lang="en-GB" sz="3200" dirty="0"/>
-              <a:t>and share own knowledge &amp; expertise</a:t>
+              <a:t> other data scientists and share own knowledge &amp; expertise</a:t>
             </a:r>
           </a:p>
         </p:txBody>
@@ -29591,10 +28582,10 @@
           <p:nvPr/>
         </p:nvPicPr>
         <p:blipFill>
-          <a:blip r:embed="rId2">
+          <a:blip>
             <a:extLst>
               <a:ext uri="{96DAC541-7B7A-43D3-8B79-37D633B846F1}">
-                <asvg:svgBlip xmlns:asvg="http://schemas.microsoft.com/office/drawing/2016/SVG/main" r:embed="rId3"/>
+                <asvg:svgBlip xmlns:asvg="http://schemas.microsoft.com/office/drawing/2016/SVG/main" r:embed="rId2"/>
               </a:ext>
             </a:extLst>
           </a:blip>
@@ -29627,10 +28618,10 @@
           <p:nvPr/>
         </p:nvPicPr>
         <p:blipFill>
-          <a:blip r:embed="rId4">
+          <a:blip>
             <a:extLst>
               <a:ext uri="{96DAC541-7B7A-43D3-8B79-37D633B846F1}">
-                <asvg:svgBlip xmlns:asvg="http://schemas.microsoft.com/office/drawing/2016/SVG/main" r:embed="rId5"/>
+                <asvg:svgBlip xmlns:asvg="http://schemas.microsoft.com/office/drawing/2016/SVG/main" r:embed="rId3"/>
               </a:ext>
             </a:extLst>
           </a:blip>
@@ -29663,10 +28654,10 @@
           <p:nvPr/>
         </p:nvPicPr>
         <p:blipFill>
-          <a:blip r:embed="rId6">
+          <a:blip>
             <a:extLst>
               <a:ext uri="{96DAC541-7B7A-43D3-8B79-37D633B846F1}">
-                <asvg:svgBlip xmlns:asvg="http://schemas.microsoft.com/office/drawing/2016/SVG/main" r:embed="rId7"/>
+                <asvg:svgBlip xmlns:asvg="http://schemas.microsoft.com/office/drawing/2016/SVG/main" r:embed="rId4"/>
               </a:ext>
             </a:extLst>
           </a:blip>
@@ -29726,72 +28717,12 @@
           <a:chExt cx="0" cy="0"/>
         </a:xfrm>
       </p:grpSpPr>
-      <p:pic>
-        <p:nvPicPr>
-          <p:cNvPr id="22" name="Picture 21">
-            <a:extLst>
-              <a:ext uri="{FF2B5EF4-FFF2-40B4-BE49-F238E27FC236}">
-                <a16:creationId xmlns:a16="http://schemas.microsoft.com/office/drawing/2014/main" id="{3E5E7083-F1BC-3310-271C-5CFC033CC252}"/>
-              </a:ext>
-            </a:extLst>
-          </p:cNvPr>
-          <p:cNvPicPr>
-            <a:picLocks noChangeAspect="1"/>
-          </p:cNvPicPr>
-          <p:nvPr/>
-        </p:nvPicPr>
-        <p:blipFill>
-          <a:blip r:embed="rId2"/>
-          <a:stretch>
-            <a:fillRect/>
-          </a:stretch>
-        </p:blipFill>
-        <p:spPr>
-          <a:xfrm>
-            <a:off x="7682096" y="64487"/>
-            <a:ext cx="4669092" cy="1221888"/>
-          </a:xfrm>
-          <a:prstGeom prst="rect">
-            <a:avLst/>
-          </a:prstGeom>
-        </p:spPr>
-      </p:pic>
-      <p:pic>
-        <p:nvPicPr>
-          <p:cNvPr id="19" name="Picture 18">
-            <a:extLst>
-              <a:ext uri="{FF2B5EF4-FFF2-40B4-BE49-F238E27FC236}">
-                <a16:creationId xmlns:a16="http://schemas.microsoft.com/office/drawing/2014/main" id="{06D6345C-472D-9C2C-1DBA-6ECDDC3E4024}"/>
-              </a:ext>
-            </a:extLst>
-          </p:cNvPr>
-          <p:cNvPicPr>
-            <a:picLocks noChangeAspect="1"/>
-          </p:cNvPicPr>
-          <p:nvPr/>
-        </p:nvPicPr>
-        <p:blipFill>
-          <a:blip r:embed="rId3"/>
-          <a:stretch>
-            <a:fillRect/>
-          </a:stretch>
-        </p:blipFill>
-        <p:spPr>
-          <a:xfrm>
-            <a:off x="8663783" y="1805985"/>
-            <a:ext cx="3423562" cy="1282758"/>
-          </a:xfrm>
-          <a:prstGeom prst="rect">
-            <a:avLst/>
-          </a:prstGeom>
-        </p:spPr>
-      </p:pic>
       <p:sp>
         <p:nvSpPr>
-          <p:cNvPr id="10" name="Text Placeholder 9">
-            <a:extLst>
-              <a:ext uri="{FF2B5EF4-FFF2-40B4-BE49-F238E27FC236}">
-                <a16:creationId xmlns:a16="http://schemas.microsoft.com/office/drawing/2014/main" id="{A33A52B1-CF93-FA4B-A443-A942450F5357}"/>
+          <p:cNvPr id="3" name="Title 2">
+            <a:extLst>
+              <a:ext uri="{FF2B5EF4-FFF2-40B4-BE49-F238E27FC236}">
+                <a16:creationId xmlns:a16="http://schemas.microsoft.com/office/drawing/2014/main" id="{4C3EE7C2-60FC-4F5B-8CCC-6675FD9603A1}"/>
               </a:ext>
             </a:extLst>
           </p:cNvPr>
@@ -29799,283 +28730,32 @@
             <a:spLocks noGrp="1"/>
           </p:cNvSpPr>
           <p:nvPr>
-            <p:ph type="body" sz="quarter" idx="16"/>
+            <p:ph type="title" idx="4294967295"/>
           </p:nvPr>
         </p:nvSpPr>
-        <p:spPr/>
+        <p:spPr>
+          <a:xfrm>
+            <a:off x="838200" y="-1325563"/>
+            <a:ext cx="10515600" cy="1325563"/>
+          </a:xfrm>
+        </p:spPr>
         <p:txBody>
-          <a:bodyPr>
-            <a:normAutofit fontScale="92500" lnSpcReduction="20000"/>
+          <a:bodyPr vert="horz" lIns="91440" tIns="45720" rIns="91440" bIns="45720" rtlCol="0" anchor="b">
+            <a:normAutofit/>
           </a:bodyPr>
           <a:lstStyle/>
           <a:p>
             <a:r>
               <a:rPr lang="en-GB" dirty="0"/>
-              <a:t>What can your school do?</a:t>
+              <a:t>End slide</a:t>
             </a:r>
-          </a:p>
-        </p:txBody>
-      </p:sp>
-      <p:sp>
-        <p:nvSpPr>
-          <p:cNvPr id="8" name="Text Placeholder 7">
-            <a:extLst>
-              <a:ext uri="{FF2B5EF4-FFF2-40B4-BE49-F238E27FC236}">
-                <a16:creationId xmlns:a16="http://schemas.microsoft.com/office/drawing/2014/main" id="{F3A04492-4FB3-B24D-87D1-B6D9E2282EC8}"/>
-              </a:ext>
-            </a:extLst>
-          </p:cNvPr>
-          <p:cNvSpPr>
-            <a:spLocks noGrp="1"/>
-          </p:cNvSpPr>
-          <p:nvPr>
-            <p:ph type="body" sz="quarter" idx="14"/>
-          </p:nvPr>
-        </p:nvSpPr>
-        <p:spPr/>
-        <p:txBody>
-          <a:bodyPr/>
-          <a:lstStyle/>
-          <a:p>
-            <a:pPr marL="514350" lvl="0" indent="-514350">
-              <a:buFont typeface="+mj-lt"/>
-              <a:buAutoNum type="arabicPeriod"/>
-            </a:pPr>
-            <a:r>
-              <a:rPr lang="en-GB"/>
-              <a:t>Start a Coding </a:t>
-            </a:r>
-            <a:r>
-              <a:rPr lang="en-GB" dirty="0"/>
-              <a:t>Club</a:t>
-            </a:r>
-          </a:p>
-          <a:p>
-            <a:pPr marL="514350" lvl="0" indent="-514350">
-              <a:buFont typeface="+mj-lt"/>
-              <a:buAutoNum type="arabicPeriod"/>
-            </a:pPr>
-            <a:endParaRPr lang="en-GB" dirty="0"/>
-          </a:p>
-          <a:p>
-            <a:pPr marL="514350" lvl="0" indent="-514350">
-              <a:buFont typeface="+mj-lt"/>
-              <a:buAutoNum type="arabicPeriod"/>
-            </a:pPr>
-            <a:r>
-              <a:rPr lang="en-GB" dirty="0"/>
-              <a:t>Look for outreach from universities and research institutions in London </a:t>
-            </a:r>
-          </a:p>
-        </p:txBody>
-      </p:sp>
-      <p:pic>
-        <p:nvPicPr>
-          <p:cNvPr id="6" name="Picture 5">
-            <a:extLst>
-              <a:ext uri="{FF2B5EF4-FFF2-40B4-BE49-F238E27FC236}">
-                <a16:creationId xmlns:a16="http://schemas.microsoft.com/office/drawing/2014/main" id="{B8C26366-4824-339C-79D7-9CAB1F3ECE12}"/>
-              </a:ext>
-            </a:extLst>
-          </p:cNvPr>
-          <p:cNvPicPr>
-            <a:picLocks noChangeAspect="1"/>
-          </p:cNvPicPr>
-          <p:nvPr/>
-        </p:nvPicPr>
-        <p:blipFill rotWithShape="1">
-          <a:blip r:embed="rId4"/>
-          <a:srcRect r="44955"/>
-          <a:stretch/>
-        </p:blipFill>
-        <p:spPr>
-          <a:xfrm>
-            <a:off x="5783739" y="1314348"/>
-            <a:ext cx="3205437" cy="1981302"/>
-          </a:xfrm>
-          <a:prstGeom prst="rect">
-            <a:avLst/>
-          </a:prstGeom>
-        </p:spPr>
-      </p:pic>
-      <p:pic>
-        <p:nvPicPr>
-          <p:cNvPr id="11" name="Picture 10">
-            <a:extLst>
-              <a:ext uri="{FF2B5EF4-FFF2-40B4-BE49-F238E27FC236}">
-                <a16:creationId xmlns:a16="http://schemas.microsoft.com/office/drawing/2014/main" id="{1F382BD8-874D-A369-1826-CB3E76AEFBDB}"/>
-              </a:ext>
-            </a:extLst>
-          </p:cNvPr>
-          <p:cNvPicPr>
-            <a:picLocks noChangeAspect="1"/>
-          </p:cNvPicPr>
-          <p:nvPr/>
-        </p:nvPicPr>
-        <p:blipFill>
-          <a:blip r:embed="rId5"/>
-          <a:stretch>
-            <a:fillRect/>
-          </a:stretch>
-        </p:blipFill>
-        <p:spPr>
-          <a:xfrm>
-            <a:off x="6408262" y="3295650"/>
-            <a:ext cx="5569652" cy="1157111"/>
-          </a:xfrm>
-          <a:prstGeom prst="rect">
-            <a:avLst/>
-          </a:prstGeom>
-        </p:spPr>
-      </p:pic>
-      <p:pic>
-        <p:nvPicPr>
-          <p:cNvPr id="13" name="Picture 12">
-            <a:extLst>
-              <a:ext uri="{FF2B5EF4-FFF2-40B4-BE49-F238E27FC236}">
-                <a16:creationId xmlns:a16="http://schemas.microsoft.com/office/drawing/2014/main" id="{3B384494-85DB-6401-CE4B-FDD8E32B88E4}"/>
-              </a:ext>
-            </a:extLst>
-          </p:cNvPr>
-          <p:cNvPicPr>
-            <a:picLocks noChangeAspect="1"/>
-          </p:cNvPicPr>
-          <p:nvPr/>
-        </p:nvPicPr>
-        <p:blipFill>
-          <a:blip r:embed="rId6"/>
-          <a:stretch>
-            <a:fillRect/>
-          </a:stretch>
-        </p:blipFill>
-        <p:spPr>
-          <a:xfrm>
-            <a:off x="6215442" y="36513"/>
-            <a:ext cx="1499155" cy="1221888"/>
-          </a:xfrm>
-          <a:prstGeom prst="rect">
-            <a:avLst/>
-          </a:prstGeom>
-        </p:spPr>
-      </p:pic>
-      <p:pic>
-        <p:nvPicPr>
-          <p:cNvPr id="15" name="Picture 14">
-            <a:extLst>
-              <a:ext uri="{FF2B5EF4-FFF2-40B4-BE49-F238E27FC236}">
-                <a16:creationId xmlns:a16="http://schemas.microsoft.com/office/drawing/2014/main" id="{BB27D39B-E043-757B-5606-8C180EFE4A0F}"/>
-              </a:ext>
-            </a:extLst>
-          </p:cNvPr>
-          <p:cNvPicPr>
-            <a:picLocks noChangeAspect="1"/>
-          </p:cNvPicPr>
-          <p:nvPr/>
-        </p:nvPicPr>
-        <p:blipFill>
-          <a:blip r:embed="rId7"/>
-          <a:stretch>
-            <a:fillRect/>
-          </a:stretch>
-        </p:blipFill>
-        <p:spPr>
-          <a:xfrm>
-            <a:off x="5705475" y="4733226"/>
-            <a:ext cx="3433776" cy="1936414"/>
-          </a:xfrm>
-          <a:prstGeom prst="rect">
-            <a:avLst/>
-          </a:prstGeom>
-        </p:spPr>
-      </p:pic>
-      <p:pic>
-        <p:nvPicPr>
-          <p:cNvPr id="17" name="Picture 16">
-            <a:extLst>
-              <a:ext uri="{FF2B5EF4-FFF2-40B4-BE49-F238E27FC236}">
-                <a16:creationId xmlns:a16="http://schemas.microsoft.com/office/drawing/2014/main" id="{FB1DE414-259C-FE0D-11B1-011CA2AF6796}"/>
-              </a:ext>
-            </a:extLst>
-          </p:cNvPr>
-          <p:cNvPicPr>
-            <a:picLocks noChangeAspect="1"/>
-          </p:cNvPicPr>
-          <p:nvPr/>
-        </p:nvPicPr>
-        <p:blipFill>
-          <a:blip r:embed="rId8"/>
-          <a:stretch>
-            <a:fillRect/>
-          </a:stretch>
-        </p:blipFill>
-        <p:spPr>
-          <a:xfrm>
-            <a:off x="9394040" y="5053012"/>
-            <a:ext cx="1963048" cy="1616628"/>
-          </a:xfrm>
-          <a:prstGeom prst="rect">
-            <a:avLst/>
-          </a:prstGeom>
-        </p:spPr>
-      </p:pic>
-      <p:sp>
-        <p:nvSpPr>
-          <p:cNvPr id="20" name="TextBox 19">
-            <a:extLst>
-              <a:ext uri="{FF2B5EF4-FFF2-40B4-BE49-F238E27FC236}">
-                <a16:creationId xmlns:a16="http://schemas.microsoft.com/office/drawing/2014/main" id="{EF4125F9-6864-AEA3-30CB-F551F0FB3068}"/>
-              </a:ext>
-            </a:extLst>
-          </p:cNvPr>
-          <p:cNvSpPr txBox="1"/>
-          <p:nvPr/>
-        </p:nvSpPr>
-        <p:spPr>
-          <a:xfrm>
-            <a:off x="557301" y="5891517"/>
-            <a:ext cx="3720968" cy="966483"/>
-          </a:xfrm>
-          <a:prstGeom prst="rect">
-            <a:avLst/>
-          </a:prstGeom>
-          <a:noFill/>
-        </p:spPr>
-        <p:txBody>
-          <a:bodyPr wrap="square" rtlCol="0">
-            <a:spAutoFit/>
-          </a:bodyPr>
-          <a:lstStyle/>
-          <a:p>
-            <a:pPr>
-              <a:lnSpc>
-                <a:spcPct val="107000"/>
-              </a:lnSpc>
-              <a:spcAft>
-                <a:spcPts val="800"/>
-              </a:spcAft>
-            </a:pPr>
-            <a:r>
-              <a:rPr lang="en-GB" sz="1800" kern="100" dirty="0">
-                <a:effectLst/>
-                <a:latin typeface="Arial" panose="020B0604020202020204" pitchFamily="34" charset="0"/>
-                <a:ea typeface="Calibri" panose="020F0502020204030204" pitchFamily="34" charset="0"/>
-                <a:cs typeface="Times New Roman" panose="02020603050405020304" pitchFamily="18" charset="0"/>
-              </a:rPr>
-              <a:t>Institutions displayed are for illustrative purposes and are NOT endorsements by NHS England</a:t>
-            </a:r>
-            <a:endParaRPr lang="en-GB" sz="1800" kern="100" dirty="0">
-              <a:effectLst/>
-              <a:latin typeface="Calibri" panose="020F0502020204030204" pitchFamily="34" charset="0"/>
-              <a:ea typeface="Calibri" panose="020F0502020204030204" pitchFamily="34" charset="0"/>
-              <a:cs typeface="Times New Roman" panose="02020603050405020304" pitchFamily="18" charset="0"/>
-            </a:endParaRPr>
           </a:p>
         </p:txBody>
       </p:sp>
     </p:spTree>
     <p:extLst>
       <p:ext uri="{BB962C8B-B14F-4D97-AF65-F5344CB8AC3E}">
-        <p14:creationId xmlns:p14="http://schemas.microsoft.com/office/powerpoint/2010/main" val="2080379326"/>
+        <p14:creationId xmlns:p14="http://schemas.microsoft.com/office/powerpoint/2010/main" val="470626060"/>
       </p:ext>
     </p:extLst>
   </p:cSld>
@@ -30654,96 +29334,6 @@
 </file>
 
 <file path=customXml/item1.xml><?xml version="1.0" encoding="utf-8"?>
-<p:properties xmlns:p="http://schemas.microsoft.com/office/2006/metadata/properties" xmlns:xsi="http://www.w3.org/2001/XMLSchema-instance" xmlns:pc="http://schemas.microsoft.com/office/infopath/2007/PartnerControls">
-  <documentManagement>
-    <p4ac7e37b3be48aa8418f065aeb540e0 xmlns="2e9807c8-684d-4ce2-9798-0aa295dedadb">
-      <Terms xmlns="http://schemas.microsoft.com/office/infopath/2007/PartnerControls"/>
-    </p4ac7e37b3be48aa8418f065aeb540e0>
-    <j628e119d7e4440dadc57ef80e73f9ed xmlns="2e9807c8-684d-4ce2-9798-0aa295dedadb">
-      <Terms xmlns="http://schemas.microsoft.com/office/infopath/2007/PartnerControls"/>
-    </j628e119d7e4440dadc57ef80e73f9ed>
-    <hscicNextReviewDate xmlns="2e9807c8-684d-4ce2-9798-0aa295dedadb" xsi:nil="true"/>
-    <kf16b72b2d604d459ccf7f7fae4ace43 xmlns="2e9807c8-684d-4ce2-9798-0aa295dedadb">
-      <Terms xmlns="http://schemas.microsoft.com/office/infopath/2007/PartnerControls"/>
-    </kf16b72b2d604d459ccf7f7fae4ace43>
-    <TaxCatchAll xmlns="5668c8bc-6c30-45e9-80ca-5109d4270dfd">
-      <Value>133</Value>
-    </TaxCatchAll>
-    <jf4655f4e78d4ac1a11c19f3a13b9f1c xmlns="2e9807c8-684d-4ce2-9798-0aa295dedadb">
-      <Terms xmlns="http://schemas.microsoft.com/office/infopath/2007/PartnerControls">
-        <TermInfo xmlns="http://schemas.microsoft.com/office/infopath/2007/PartnerControls">
-          <TermName xmlns="http://schemas.microsoft.com/office/infopath/2007/PartnerControls">Presentation</TermName>
-          <TermId xmlns="http://schemas.microsoft.com/office/infopath/2007/PartnerControls">ee650e81-096d-4403-84a9-0f09614326ef</TermId>
-        </TermInfo>
-      </Terms>
-    </jf4655f4e78d4ac1a11c19f3a13b9f1c>
-    <hscicLastReviewDate xmlns="2e9807c8-684d-4ce2-9798-0aa295dedadb" xsi:nil="true"/>
-    <k5f85a19a9254bc483709d4dbf407442 xmlns="2e9807c8-684d-4ce2-9798-0aa295dedadb">
-      <Terms xmlns="http://schemas.microsoft.com/office/infopath/2007/PartnerControls"/>
-    </k5f85a19a9254bc483709d4dbf407442>
-    <_dlc_DocId xmlns="2e9807c8-684d-4ce2-9798-0aa295dedadb">MDQYE57WSUYW-1510119152-517</_dlc_DocId>
-    <_dlc_DocIdUrl xmlns="2e9807c8-684d-4ce2-9798-0aa295dedadb">
-      <Url>https://hscic365.sharepoint.com/MarketingComms/_layouts/15/DocIdRedir.aspx?ID=MDQYE57WSUYW-1510119152-517</Url>
-      <Description>MDQYE57WSUYW-1510119152-517</Description>
-    </_dlc_DocIdUrl>
-    <lcf76f155ced4ddcb4097134ff3c332f xmlns="4e4326f6-5e34-4e05-b314-006661b9c42d">
-      <Terms xmlns="http://schemas.microsoft.com/office/infopath/2007/PartnerControls"/>
-    </lcf76f155ced4ddcb4097134ff3c332f>
-  </documentManagement>
-</p:properties>
-</file>
-
-<file path=customXml/item2.xml><?xml version="1.0" encoding="utf-8"?>
-<?mso-contentType ?>
-<spe:Receivers xmlns:spe="http://schemas.microsoft.com/sharepoint/events">
-  <Receiver>
-    <Name>Document ID Generator</Name>
-    <Synchronization>Synchronous</Synchronization>
-    <Type>10001</Type>
-    <SequenceNumber>1000</SequenceNumber>
-    <Url/>
-    <Assembly>Microsoft.Office.DocumentManagement, Version=16.0.0.0, Culture=neutral, PublicKeyToken=71e9bce111e9429c</Assembly>
-    <Class>Microsoft.Office.DocumentManagement.Internal.DocIdHandler</Class>
-    <Data/>
-    <Filter/>
-  </Receiver>
-  <Receiver>
-    <Name>Document ID Generator</Name>
-    <Synchronization>Synchronous</Synchronization>
-    <Type>10002</Type>
-    <SequenceNumber>1001</SequenceNumber>
-    <Url/>
-    <Assembly>Microsoft.Office.DocumentManagement, Version=16.0.0.0, Culture=neutral, PublicKeyToken=71e9bce111e9429c</Assembly>
-    <Class>Microsoft.Office.DocumentManagement.Internal.DocIdHandler</Class>
-    <Data/>
-    <Filter/>
-  </Receiver>
-  <Receiver>
-    <Name>Document ID Generator</Name>
-    <Synchronization>Synchronous</Synchronization>
-    <Type>10004</Type>
-    <SequenceNumber>1002</SequenceNumber>
-    <Url/>
-    <Assembly>Microsoft.Office.DocumentManagement, Version=16.0.0.0, Culture=neutral, PublicKeyToken=71e9bce111e9429c</Assembly>
-    <Class>Microsoft.Office.DocumentManagement.Internal.DocIdHandler</Class>
-    <Data/>
-    <Filter/>
-  </Receiver>
-  <Receiver>
-    <Name>Document ID Generator</Name>
-    <Synchronization>Synchronous</Synchronization>
-    <Type>10006</Type>
-    <SequenceNumber>1003</SequenceNumber>
-    <Url/>
-    <Assembly>Microsoft.Office.DocumentManagement, Version=16.0.0.0, Culture=neutral, PublicKeyToken=71e9bce111e9429c</Assembly>
-    <Class>Microsoft.Office.DocumentManagement.Internal.DocIdHandler</Class>
-    <Data/>
-    <Filter/>
-  </Receiver>
-</spe:Receivers>
-</file>
-
-<file path=customXml/item3.xml><?xml version="1.0" encoding="utf-8"?>
 <ct:contentTypeSchema xmlns:ct="http://schemas.microsoft.com/office/2006/metadata/contentType" xmlns:ma="http://schemas.microsoft.com/office/2006/metadata/properties/metaAttributes" ct:_="" ma:_="" ma:contentTypeName="HSCIC Document" ma:contentTypeID="0x010100F56AC1E539A90047BC30B3C9F7C85DBF009974B1B821AB36488BB2955A9F4B5285" ma:contentTypeVersion="25" ma:contentTypeDescription="Create a new document." ma:contentTypeScope="" ma:versionID="07420608f8b6198177e3320b229a6c35">
   <xsd:schema xmlns:xsd="http://www.w3.org/2001/XMLSchema" xmlns:xs="http://www.w3.org/2001/XMLSchema" xmlns:p="http://schemas.microsoft.com/office/2006/metadata/properties" xmlns:ns2="2e9807c8-684d-4ce2-9798-0aa295dedadb" xmlns:ns3="5668c8bc-6c30-45e9-80ca-5109d4270dfd" xmlns:ns4="4e4326f6-5e34-4e05-b314-006661b9c42d" targetNamespace="http://schemas.microsoft.com/office/2006/metadata/properties" ma:root="true" ma:fieldsID="a1223214bed314a580ae0252d7427c23" ns2:_="" ns3:_="" ns4:_="">
     <xsd:import namespace="2e9807c8-684d-4ce2-9798-0aa295dedadb"/>
@@ -31082,7 +29672,7 @@
 </ct:contentTypeSchema>
 </file>
 
-<file path=customXml/item4.xml><?xml version="1.0" encoding="utf-8"?>
+<file path=customXml/item2.xml><?xml version="1.0" encoding="utf-8"?>
 <?mso-contentType ?>
 <FormTemplates xmlns="http://schemas.microsoft.com/sharepoint/v3/contenttype/forms">
   <Display>DocumentLibraryForm</Display>
@@ -31091,7 +29681,125 @@
 </FormTemplates>
 </file>
 
+<file path=customXml/item3.xml><?xml version="1.0" encoding="utf-8"?>
+<p:properties xmlns:p="http://schemas.microsoft.com/office/2006/metadata/properties" xmlns:xsi="http://www.w3.org/2001/XMLSchema-instance" xmlns:pc="http://schemas.microsoft.com/office/infopath/2007/PartnerControls">
+  <documentManagement>
+    <p4ac7e37b3be48aa8418f065aeb540e0 xmlns="2e9807c8-684d-4ce2-9798-0aa295dedadb">
+      <Terms xmlns="http://schemas.microsoft.com/office/infopath/2007/PartnerControls"/>
+    </p4ac7e37b3be48aa8418f065aeb540e0>
+    <j628e119d7e4440dadc57ef80e73f9ed xmlns="2e9807c8-684d-4ce2-9798-0aa295dedadb">
+      <Terms xmlns="http://schemas.microsoft.com/office/infopath/2007/PartnerControls"/>
+    </j628e119d7e4440dadc57ef80e73f9ed>
+    <hscicNextReviewDate xmlns="2e9807c8-684d-4ce2-9798-0aa295dedadb" xsi:nil="true"/>
+    <kf16b72b2d604d459ccf7f7fae4ace43 xmlns="2e9807c8-684d-4ce2-9798-0aa295dedadb">
+      <Terms xmlns="http://schemas.microsoft.com/office/infopath/2007/PartnerControls"/>
+    </kf16b72b2d604d459ccf7f7fae4ace43>
+    <TaxCatchAll xmlns="5668c8bc-6c30-45e9-80ca-5109d4270dfd">
+      <Value>133</Value>
+    </TaxCatchAll>
+    <jf4655f4e78d4ac1a11c19f3a13b9f1c xmlns="2e9807c8-684d-4ce2-9798-0aa295dedadb">
+      <Terms xmlns="http://schemas.microsoft.com/office/infopath/2007/PartnerControls">
+        <TermInfo xmlns="http://schemas.microsoft.com/office/infopath/2007/PartnerControls">
+          <TermName xmlns="http://schemas.microsoft.com/office/infopath/2007/PartnerControls">Presentation</TermName>
+          <TermId xmlns="http://schemas.microsoft.com/office/infopath/2007/PartnerControls">ee650e81-096d-4403-84a9-0f09614326ef</TermId>
+        </TermInfo>
+      </Terms>
+    </jf4655f4e78d4ac1a11c19f3a13b9f1c>
+    <hscicLastReviewDate xmlns="2e9807c8-684d-4ce2-9798-0aa295dedadb" xsi:nil="true"/>
+    <k5f85a19a9254bc483709d4dbf407442 xmlns="2e9807c8-684d-4ce2-9798-0aa295dedadb">
+      <Terms xmlns="http://schemas.microsoft.com/office/infopath/2007/PartnerControls"/>
+    </k5f85a19a9254bc483709d4dbf407442>
+    <_dlc_DocId xmlns="2e9807c8-684d-4ce2-9798-0aa295dedadb">MDQYE57WSUYW-1510119152-517</_dlc_DocId>
+    <_dlc_DocIdUrl xmlns="2e9807c8-684d-4ce2-9798-0aa295dedadb">
+      <Url>https://hscic365.sharepoint.com/MarketingComms/_layouts/15/DocIdRedir.aspx?ID=MDQYE57WSUYW-1510119152-517</Url>
+      <Description>MDQYE57WSUYW-1510119152-517</Description>
+    </_dlc_DocIdUrl>
+    <lcf76f155ced4ddcb4097134ff3c332f xmlns="4e4326f6-5e34-4e05-b314-006661b9c42d">
+      <Terms xmlns="http://schemas.microsoft.com/office/infopath/2007/PartnerControls"/>
+    </lcf76f155ced4ddcb4097134ff3c332f>
+  </documentManagement>
+</p:properties>
+</file>
+
+<file path=customXml/item4.xml><?xml version="1.0" encoding="utf-8"?>
+<?mso-contentType ?>
+<spe:Receivers xmlns:spe="http://schemas.microsoft.com/sharepoint/events">
+  <Receiver>
+    <Name>Document ID Generator</Name>
+    <Synchronization>Synchronous</Synchronization>
+    <Type>10001</Type>
+    <SequenceNumber>1000</SequenceNumber>
+    <Url/>
+    <Assembly>Microsoft.Office.DocumentManagement, Version=16.0.0.0, Culture=neutral, PublicKeyToken=71e9bce111e9429c</Assembly>
+    <Class>Microsoft.Office.DocumentManagement.Internal.DocIdHandler</Class>
+    <Data/>
+    <Filter/>
+  </Receiver>
+  <Receiver>
+    <Name>Document ID Generator</Name>
+    <Synchronization>Synchronous</Synchronization>
+    <Type>10002</Type>
+    <SequenceNumber>1001</SequenceNumber>
+    <Url/>
+    <Assembly>Microsoft.Office.DocumentManagement, Version=16.0.0.0, Culture=neutral, PublicKeyToken=71e9bce111e9429c</Assembly>
+    <Class>Microsoft.Office.DocumentManagement.Internal.DocIdHandler</Class>
+    <Data/>
+    <Filter/>
+  </Receiver>
+  <Receiver>
+    <Name>Document ID Generator</Name>
+    <Synchronization>Synchronous</Synchronization>
+    <Type>10004</Type>
+    <SequenceNumber>1002</SequenceNumber>
+    <Url/>
+    <Assembly>Microsoft.Office.DocumentManagement, Version=16.0.0.0, Culture=neutral, PublicKeyToken=71e9bce111e9429c</Assembly>
+    <Class>Microsoft.Office.DocumentManagement.Internal.DocIdHandler</Class>
+    <Data/>
+    <Filter/>
+  </Receiver>
+  <Receiver>
+    <Name>Document ID Generator</Name>
+    <Synchronization>Synchronous</Synchronization>
+    <Type>10006</Type>
+    <SequenceNumber>1003</SequenceNumber>
+    <Url/>
+    <Assembly>Microsoft.Office.DocumentManagement, Version=16.0.0.0, Culture=neutral, PublicKeyToken=71e9bce111e9429c</Assembly>
+    <Class>Microsoft.Office.DocumentManagement.Internal.DocIdHandler</Class>
+    <Data/>
+    <Filter/>
+  </Receiver>
+</spe:Receivers>
+</file>
+
 <file path=customXml/itemProps1.xml><?xml version="1.0" encoding="utf-8"?>
+<ds:datastoreItem xmlns:ds="http://schemas.openxmlformats.org/officeDocument/2006/customXml" ds:itemID="{FE9D80B6-5927-4462-885B-FD85DD379F1C}">
+  <ds:schemaRefs>
+    <ds:schemaRef ds:uri="http://schemas.microsoft.com/office/2006/metadata/contentType"/>
+    <ds:schemaRef ds:uri="http://schemas.microsoft.com/office/2006/metadata/properties/metaAttributes"/>
+    <ds:schemaRef ds:uri="http://www.w3.org/2001/XMLSchema"/>
+    <ds:schemaRef ds:uri="http://schemas.microsoft.com/office/2006/metadata/properties"/>
+    <ds:schemaRef ds:uri="2e9807c8-684d-4ce2-9798-0aa295dedadb"/>
+    <ds:schemaRef ds:uri="5668c8bc-6c30-45e9-80ca-5109d4270dfd"/>
+    <ds:schemaRef ds:uri="4e4326f6-5e34-4e05-b314-006661b9c42d"/>
+    <ds:schemaRef ds:uri="http://schemas.microsoft.com/office/2006/documentManagement/types"/>
+    <ds:schemaRef ds:uri="http://schemas.microsoft.com/office/infopath/2007/PartnerControls"/>
+    <ds:schemaRef ds:uri="http://schemas.openxmlformats.org/package/2006/metadata/core-properties"/>
+    <ds:schemaRef ds:uri="http://purl.org/dc/elements/1.1/"/>
+    <ds:schemaRef ds:uri="http://purl.org/dc/terms/"/>
+    <ds:schemaRef ds:uri="http://schemas.microsoft.com/internal/obd"/>
+  </ds:schemaRefs>
+</ds:datastoreItem>
+</file>
+
+<file path=customXml/itemProps2.xml><?xml version="1.0" encoding="utf-8"?>
+<ds:datastoreItem xmlns:ds="http://schemas.openxmlformats.org/officeDocument/2006/customXml" ds:itemID="{B7B6D4F5-ECA0-4A22-A4DD-3335756FD664}">
+  <ds:schemaRefs>
+    <ds:schemaRef ds:uri="http://schemas.microsoft.com/sharepoint/v3/contenttype/forms"/>
+  </ds:schemaRefs>
+</ds:datastoreItem>
+</file>
+
+<file path=customXml/itemProps3.xml><?xml version="1.0" encoding="utf-8"?>
 <ds:datastoreItem xmlns:ds="http://schemas.openxmlformats.org/officeDocument/2006/customXml" ds:itemID="{A12B3C52-C4E5-4003-8240-632FDE102EAB}">
   <ds:schemaRefs>
     <ds:schemaRef ds:uri="http://schemas.microsoft.com/office/infopath/2007/PartnerControls"/>
@@ -31111,38 +29819,10 @@
 </ds:datastoreItem>
 </file>
 
-<file path=customXml/itemProps2.xml><?xml version="1.0" encoding="utf-8"?>
+<file path=customXml/itemProps4.xml><?xml version="1.0" encoding="utf-8"?>
 <ds:datastoreItem xmlns:ds="http://schemas.openxmlformats.org/officeDocument/2006/customXml" ds:itemID="{297AB09D-1961-4090-8FB6-6E54D7E00154}">
   <ds:schemaRefs>
     <ds:schemaRef ds:uri="http://schemas.microsoft.com/sharepoint/events"/>
   </ds:schemaRefs>
 </ds:datastoreItem>
-</file>
-
-<file path=customXml/itemProps3.xml><?xml version="1.0" encoding="utf-8"?>
-<ds:datastoreItem xmlns:ds="http://schemas.openxmlformats.org/officeDocument/2006/customXml" ds:itemID="{FE9D80B6-5927-4462-885B-FD85DD379F1C}">
-  <ds:schemaRefs>
-    <ds:schemaRef ds:uri="http://schemas.microsoft.com/office/2006/metadata/contentType"/>
-    <ds:schemaRef ds:uri="http://schemas.microsoft.com/office/2006/metadata/properties/metaAttributes"/>
-    <ds:schemaRef ds:uri="http://www.w3.org/2001/XMLSchema"/>
-    <ds:schemaRef ds:uri="http://schemas.microsoft.com/office/2006/metadata/properties"/>
-    <ds:schemaRef ds:uri="2e9807c8-684d-4ce2-9798-0aa295dedadb"/>
-    <ds:schemaRef ds:uri="5668c8bc-6c30-45e9-80ca-5109d4270dfd"/>
-    <ds:schemaRef ds:uri="4e4326f6-5e34-4e05-b314-006661b9c42d"/>
-    <ds:schemaRef ds:uri="http://schemas.microsoft.com/office/2006/documentManagement/types"/>
-    <ds:schemaRef ds:uri="http://schemas.microsoft.com/office/infopath/2007/PartnerControls"/>
-    <ds:schemaRef ds:uri="http://schemas.openxmlformats.org/package/2006/metadata/core-properties"/>
-    <ds:schemaRef ds:uri="http://purl.org/dc/elements/1.1/"/>
-    <ds:schemaRef ds:uri="http://purl.org/dc/terms/"/>
-    <ds:schemaRef ds:uri="http://schemas.microsoft.com/internal/obd"/>
-  </ds:schemaRefs>
-</ds:datastoreItem>
-</file>
-
-<file path=customXml/itemProps4.xml><?xml version="1.0" encoding="utf-8"?>
-<ds:datastoreItem xmlns:ds="http://schemas.openxmlformats.org/officeDocument/2006/customXml" ds:itemID="{B7B6D4F5-ECA0-4A22-A4DD-3335756FD664}">
-  <ds:schemaRefs>
-    <ds:schemaRef ds:uri="http://schemas.microsoft.com/sharepoint/v3/contenttype/forms"/>
-  </ds:schemaRefs>
-</ds:datastoreItem>
 </file>
--- a/All_materials/20230528_School_outreach/Outreach.pptx
+++ b/All_materials/20230528_School_outreach/Outreach.pptx
@@ -138,183 +138,20 @@
 <file path=ppt/changesInfos/changesInfo1.xml><?xml version="1.0" encoding="utf-8"?>
 <pc:chgInfo xmlns:a="http://schemas.openxmlformats.org/drawingml/2006/main" xmlns:r="http://schemas.openxmlformats.org/officeDocument/2006/relationships" xmlns:ac="http://schemas.microsoft.com/office/drawing/2013/main/command" xmlns:pc="http://schemas.microsoft.com/office/powerpoint/2013/main/command">
   <pc:docChgLst>
-    <pc:chgData name="QUAN, Kenneth (NHS ENGLAND)" userId="95065793-f978-4ba4-bbf9-569df750104a" providerId="ADAL" clId="{065F1351-36F9-48D8-BE8E-FBCB121BCDBE}"/>
-    <pc:docChg chg="undo custSel delSld modSld">
-      <pc:chgData name="QUAN, Kenneth (NHS ENGLAND)" userId="95065793-f978-4ba4-bbf9-569df750104a" providerId="ADAL" clId="{065F1351-36F9-48D8-BE8E-FBCB121BCDBE}" dt="2026-05-15T10:41:24.581" v="157" actId="47"/>
+    <pc:chgData name="QUAN, Kenneth (NHS ENGLAND)" userId="95065793-f978-4ba4-bbf9-569df750104a" providerId="ADAL" clId="{314DC861-081D-4D43-B8AE-4D73C31C07D7}"/>
+    <pc:docChg chg="modSld">
+      <pc:chgData name="QUAN, Kenneth (NHS ENGLAND)" userId="95065793-f978-4ba4-bbf9-569df750104a" providerId="ADAL" clId="{314DC861-081D-4D43-B8AE-4D73C31C07D7}" dt="2026-06-18T14:46:03.888" v="58" actId="20577"/>
       <pc:docMkLst>
         <pc:docMk/>
       </pc:docMkLst>
       <pc:sldChg chg="modSp mod">
-        <pc:chgData name="QUAN, Kenneth (NHS ENGLAND)" userId="95065793-f978-4ba4-bbf9-569df750104a" providerId="ADAL" clId="{065F1351-36F9-48D8-BE8E-FBCB121BCDBE}" dt="2026-05-15T10:00:23.867" v="40" actId="20577"/>
-        <pc:sldMkLst>
-          <pc:docMk/>
-          <pc:sldMk cId="3830231407" sldId="1923"/>
-        </pc:sldMkLst>
-        <pc:spChg chg="mod">
-          <ac:chgData name="QUAN, Kenneth (NHS ENGLAND)" userId="95065793-f978-4ba4-bbf9-569df750104a" providerId="ADAL" clId="{065F1351-36F9-48D8-BE8E-FBCB121BCDBE}" dt="2026-05-15T09:59:54.772" v="36" actId="20577"/>
-          <ac:spMkLst>
-            <pc:docMk/>
-            <pc:sldMk cId="3830231407" sldId="1923"/>
-            <ac:spMk id="2" creationId="{623499A9-ADAE-F54A-B49E-F294E7BCE9E8}"/>
-          </ac:spMkLst>
-        </pc:spChg>
-        <pc:spChg chg="mod">
-          <ac:chgData name="QUAN, Kenneth (NHS ENGLAND)" userId="95065793-f978-4ba4-bbf9-569df750104a" providerId="ADAL" clId="{065F1351-36F9-48D8-BE8E-FBCB121BCDBE}" dt="2026-05-15T10:00:01.293" v="37"/>
-          <ac:spMkLst>
-            <pc:docMk/>
-            <pc:sldMk cId="3830231407" sldId="1923"/>
-            <ac:spMk id="3" creationId="{2AB96998-8BA0-CF4D-B57F-DEBCAD1141C5}"/>
-          </ac:spMkLst>
-        </pc:spChg>
-        <pc:spChg chg="mod">
-          <ac:chgData name="QUAN, Kenneth (NHS ENGLAND)" userId="95065793-f978-4ba4-bbf9-569df750104a" providerId="ADAL" clId="{065F1351-36F9-48D8-BE8E-FBCB121BCDBE}" dt="2026-05-15T10:00:23.867" v="40" actId="20577"/>
-          <ac:spMkLst>
-            <pc:docMk/>
-            <pc:sldMk cId="3830231407" sldId="1923"/>
-            <ac:spMk id="9" creationId="{E4F63B5F-2944-6B41-9332-74DB2CCA6FCA}"/>
-          </ac:spMkLst>
-        </pc:spChg>
-      </pc:sldChg>
-      <pc:sldChg chg="modSp mod">
-        <pc:chgData name="QUAN, Kenneth (NHS ENGLAND)" userId="95065793-f978-4ba4-bbf9-569df750104a" providerId="ADAL" clId="{065F1351-36F9-48D8-BE8E-FBCB121BCDBE}" dt="2026-05-15T09:59:35.342" v="33" actId="20577"/>
+        <pc:chgData name="QUAN, Kenneth (NHS ENGLAND)" userId="95065793-f978-4ba4-bbf9-569df750104a" providerId="ADAL" clId="{314DC861-081D-4D43-B8AE-4D73C31C07D7}" dt="2026-06-18T14:46:03.888" v="58" actId="20577"/>
         <pc:sldMkLst>
           <pc:docMk/>
           <pc:sldMk cId="230310781" sldId="2145707269"/>
         </pc:sldMkLst>
         <pc:spChg chg="mod">
-          <ac:chgData name="QUAN, Kenneth (NHS ENGLAND)" userId="95065793-f978-4ba4-bbf9-569df750104a" providerId="ADAL" clId="{065F1351-36F9-48D8-BE8E-FBCB121BCDBE}" dt="2026-05-15T09:59:35.342" v="33" actId="20577"/>
-          <ac:spMkLst>
-            <pc:docMk/>
-            <pc:sldMk cId="230310781" sldId="2145707269"/>
-            <ac:spMk id="54" creationId="{C8DE7AD2-D274-4121-A246-2F79C9BD3400}"/>
-          </ac:spMkLst>
-        </pc:spChg>
-      </pc:sldChg>
-      <pc:sldChg chg="modSp mod">
-        <pc:chgData name="QUAN, Kenneth (NHS ENGLAND)" userId="95065793-f978-4ba4-bbf9-569df750104a" providerId="ADAL" clId="{065F1351-36F9-48D8-BE8E-FBCB121BCDBE}" dt="2026-05-15T10:23:24.903" v="41" actId="20577"/>
-        <pc:sldMkLst>
-          <pc:docMk/>
-          <pc:sldMk cId="914888462" sldId="2145707270"/>
-        </pc:sldMkLst>
-        <pc:spChg chg="mod">
-          <ac:chgData name="QUAN, Kenneth (NHS ENGLAND)" userId="95065793-f978-4ba4-bbf9-569df750104a" providerId="ADAL" clId="{065F1351-36F9-48D8-BE8E-FBCB121BCDBE}" dt="2026-05-15T10:23:24.903" v="41" actId="20577"/>
-          <ac:spMkLst>
-            <pc:docMk/>
-            <pc:sldMk cId="914888462" sldId="2145707270"/>
-            <ac:spMk id="13" creationId="{598E524B-F6FA-F142-B71B-23326E628FE2}"/>
-          </ac:spMkLst>
-        </pc:spChg>
-      </pc:sldChg>
-      <pc:sldChg chg="modSp mod">
-        <pc:chgData name="QUAN, Kenneth (NHS ENGLAND)" userId="95065793-f978-4ba4-bbf9-569df750104a" providerId="ADAL" clId="{065F1351-36F9-48D8-BE8E-FBCB121BCDBE}" dt="2026-05-15T10:28:11.066" v="111"/>
-        <pc:sldMkLst>
-          <pc:docMk/>
-          <pc:sldMk cId="3686196430" sldId="2145707272"/>
-        </pc:sldMkLst>
-        <pc:spChg chg="mod">
-          <ac:chgData name="QUAN, Kenneth (NHS ENGLAND)" userId="95065793-f978-4ba4-bbf9-569df750104a" providerId="ADAL" clId="{065F1351-36F9-48D8-BE8E-FBCB121BCDBE}" dt="2026-05-15T10:24:57.733" v="76" actId="115"/>
-          <ac:spMkLst>
-            <pc:docMk/>
-            <pc:sldMk cId="3686196430" sldId="2145707272"/>
-            <ac:spMk id="9" creationId="{F9F6492B-0A61-7040-89C7-A6104116E80B}"/>
-          </ac:spMkLst>
-        </pc:spChg>
-        <pc:spChg chg="mod">
-          <ac:chgData name="QUAN, Kenneth (NHS ENGLAND)" userId="95065793-f978-4ba4-bbf9-569df750104a" providerId="ADAL" clId="{065F1351-36F9-48D8-BE8E-FBCB121BCDBE}" dt="2026-05-15T10:25:31.054" v="85" actId="13926"/>
-          <ac:spMkLst>
-            <pc:docMk/>
-            <pc:sldMk cId="3686196430" sldId="2145707272"/>
-            <ac:spMk id="11" creationId="{99BE8F26-1565-8745-82ED-69ADF059BB80}"/>
-          </ac:spMkLst>
-        </pc:spChg>
-        <pc:spChg chg="mod">
-          <ac:chgData name="QUAN, Kenneth (NHS ENGLAND)" userId="95065793-f978-4ba4-bbf9-569df750104a" providerId="ADAL" clId="{065F1351-36F9-48D8-BE8E-FBCB121BCDBE}" dt="2026-05-15T10:27:39.251" v="102" actId="1037"/>
-          <ac:spMkLst>
-            <pc:docMk/>
-            <pc:sldMk cId="3686196430" sldId="2145707272"/>
-            <ac:spMk id="18" creationId="{D9AB7454-1CA7-69C4-ED16-2A1ECD1A3AD9}"/>
-          </ac:spMkLst>
-        </pc:spChg>
-        <pc:spChg chg="mod">
-          <ac:chgData name="QUAN, Kenneth (NHS ENGLAND)" userId="95065793-f978-4ba4-bbf9-569df750104a" providerId="ADAL" clId="{065F1351-36F9-48D8-BE8E-FBCB121BCDBE}" dt="2026-05-15T10:27:39.251" v="102" actId="1037"/>
-          <ac:spMkLst>
-            <pc:docMk/>
-            <pc:sldMk cId="3686196430" sldId="2145707272"/>
-            <ac:spMk id="23" creationId="{6317C261-60AA-A38B-DB36-09BCCF8071C4}"/>
-          </ac:spMkLst>
-        </pc:spChg>
-        <pc:graphicFrameChg chg="mod modGraphic">
-          <ac:chgData name="QUAN, Kenneth (NHS ENGLAND)" userId="95065793-f978-4ba4-bbf9-569df750104a" providerId="ADAL" clId="{065F1351-36F9-48D8-BE8E-FBCB121BCDBE}" dt="2026-05-15T10:27:52.207" v="107" actId="20577"/>
-          <ac:graphicFrameMkLst>
-            <pc:docMk/>
-            <pc:sldMk cId="3686196430" sldId="2145707272"/>
-            <ac:graphicFrameMk id="21" creationId="{9577B1BE-56B2-AD18-00D0-C8FD2E74C774}"/>
-          </ac:graphicFrameMkLst>
-        </pc:graphicFrameChg>
-        <pc:graphicFrameChg chg="mod modGraphic">
-          <ac:chgData name="QUAN, Kenneth (NHS ENGLAND)" userId="95065793-f978-4ba4-bbf9-569df750104a" providerId="ADAL" clId="{065F1351-36F9-48D8-BE8E-FBCB121BCDBE}" dt="2026-05-15T10:28:11.066" v="111"/>
-          <ac:graphicFrameMkLst>
-            <pc:docMk/>
-            <pc:sldMk cId="3686196430" sldId="2145707272"/>
-            <ac:graphicFrameMk id="22" creationId="{AD3C039E-F8B8-1CC8-E2B5-EB05185B37EB}"/>
-          </ac:graphicFrameMkLst>
-        </pc:graphicFrameChg>
-      </pc:sldChg>
-      <pc:sldChg chg="modSp mod">
-        <pc:chgData name="QUAN, Kenneth (NHS ENGLAND)" userId="95065793-f978-4ba4-bbf9-569df750104a" providerId="ADAL" clId="{065F1351-36F9-48D8-BE8E-FBCB121BCDBE}" dt="2026-05-15T10:40:37.150" v="156" actId="115"/>
-        <pc:sldMkLst>
-          <pc:docMk/>
-          <pc:sldMk cId="3245685508" sldId="2145707281"/>
-        </pc:sldMkLst>
-        <pc:spChg chg="mod">
-          <ac:chgData name="QUAN, Kenneth (NHS ENGLAND)" userId="95065793-f978-4ba4-bbf9-569df750104a" providerId="ADAL" clId="{065F1351-36F9-48D8-BE8E-FBCB121BCDBE}" dt="2026-05-15T10:40:19.798" v="150" actId="115"/>
-          <ac:spMkLst>
-            <pc:docMk/>
-            <pc:sldMk cId="3245685508" sldId="2145707281"/>
-            <ac:spMk id="3" creationId="{7D5DC6DE-4CC6-384C-9943-60C1476E4858}"/>
-          </ac:spMkLst>
-        </pc:spChg>
-        <pc:spChg chg="mod">
-          <ac:chgData name="QUAN, Kenneth (NHS ENGLAND)" userId="95065793-f978-4ba4-bbf9-569df750104a" providerId="ADAL" clId="{065F1351-36F9-48D8-BE8E-FBCB121BCDBE}" dt="2026-05-15T10:40:28.302" v="153" actId="115"/>
-          <ac:spMkLst>
-            <pc:docMk/>
-            <pc:sldMk cId="3245685508" sldId="2145707281"/>
-            <ac:spMk id="4" creationId="{21F0801A-07C5-2C40-A3F1-CAD1B3CCBB94}"/>
-          </ac:spMkLst>
-        </pc:spChg>
-        <pc:spChg chg="mod">
-          <ac:chgData name="QUAN, Kenneth (NHS ENGLAND)" userId="95065793-f978-4ba4-bbf9-569df750104a" providerId="ADAL" clId="{065F1351-36F9-48D8-BE8E-FBCB121BCDBE}" dt="2026-05-15T10:40:37.150" v="156" actId="115"/>
-          <ac:spMkLst>
-            <pc:docMk/>
-            <pc:sldMk cId="3245685508" sldId="2145707281"/>
-            <ac:spMk id="5" creationId="{FC870246-F5B2-0444-9560-50AA6A44115A}"/>
-          </ac:spMkLst>
-        </pc:spChg>
-      </pc:sldChg>
-      <pc:sldMasterChg chg="delSldLayout">
-        <pc:chgData name="QUAN, Kenneth (NHS ENGLAND)" userId="95065793-f978-4ba4-bbf9-569df750104a" providerId="ADAL" clId="{065F1351-36F9-48D8-BE8E-FBCB121BCDBE}" dt="2026-05-15T10:41:24.581" v="157" actId="47"/>
-        <pc:sldMasterMkLst>
-          <pc:docMk/>
-          <pc:sldMasterMk cId="945044896" sldId="2147483773"/>
-        </pc:sldMasterMkLst>
-      </pc:sldMasterChg>
-    </pc:docChg>
-  </pc:docChgLst>
-  <pc:docChgLst>
-    <pc:chgData name="QUAN, Kenneth (NHS ENGLAND)" userId="95065793-f978-4ba4-bbf9-569df750104a" providerId="ADAL" clId="{314DC861-081D-4D43-B8AE-4D73C31C07D7}"/>
-    <pc:docChg chg="modSld">
-      <pc:chgData name="QUAN, Kenneth (NHS ENGLAND)" userId="95065793-f978-4ba4-bbf9-569df750104a" providerId="ADAL" clId="{314DC861-081D-4D43-B8AE-4D73C31C07D7}" dt="2026-06-02T08:39:49.389" v="53" actId="20577"/>
-      <pc:docMkLst>
-        <pc:docMk/>
-      </pc:docMkLst>
-      <pc:sldChg chg="modSp mod">
-        <pc:chgData name="QUAN, Kenneth (NHS ENGLAND)" userId="95065793-f978-4ba4-bbf9-569df750104a" providerId="ADAL" clId="{314DC861-081D-4D43-B8AE-4D73C31C07D7}" dt="2026-06-02T08:26:59.664" v="0" actId="20577"/>
-        <pc:sldMkLst>
-          <pc:docMk/>
-          <pc:sldMk cId="230310781" sldId="2145707269"/>
-        </pc:sldMkLst>
-        <pc:spChg chg="mod">
-          <ac:chgData name="QUAN, Kenneth (NHS ENGLAND)" userId="95065793-f978-4ba4-bbf9-569df750104a" providerId="ADAL" clId="{314DC861-081D-4D43-B8AE-4D73C31C07D7}" dt="2026-06-02T08:26:59.664" v="0" actId="20577"/>
+          <ac:chgData name="QUAN, Kenneth (NHS ENGLAND)" userId="95065793-f978-4ba4-bbf9-569df750104a" providerId="ADAL" clId="{314DC861-081D-4D43-B8AE-4D73C31C07D7}" dt="2026-06-18T14:46:03.888" v="58" actId="20577"/>
           <ac:spMkLst>
             <pc:docMk/>
             <pc:sldMk cId="230310781" sldId="2145707269"/>
@@ -424,7 +261,7 @@
           <a:p>
             <a:fld id="{E9EED4C3-48B6-4E4A-9B0F-8051E56348DC}" type="datetimeFigureOut">
               <a:rPr lang="en-GB" smtClean="0"/>
-              <a:t>02/06/2026</a:t>
+              <a:t>18/06/2026</a:t>
             </a:fld>
             <a:endParaRPr lang="en-GB"/>
           </a:p>
@@ -24657,7 +24494,7 @@
           <a:p>
             <a:fld id="{F24574AD-8404-48D7-8DB8-BCC9125C3396}" type="datetimeFigureOut">
               <a:rPr lang="en-GB" smtClean="0"/>
-              <a:t>02/06/2026</a:t>
+              <a:t>18/06/2026</a:t>
             </a:fld>
             <a:endParaRPr lang="en-GB"/>
           </a:p>
@@ -25906,7 +25743,25 @@
                   </a:solidFill>
                   <a:latin typeface="Arial"/>
                 </a:rPr>
-                <a:t> Data of all Patients</a:t>
+                <a:t> </a:t>
+              </a:r>
+              <a:r>
+                <a:rPr lang="en-US" b="1">
+                  <a:solidFill>
+                    <a:srgbClr val="FFFFFF"/>
+                  </a:solidFill>
+                  <a:latin typeface="Arial"/>
+                </a:rPr>
+                <a:t>Data for </a:t>
+              </a:r>
+              <a:r>
+                <a:rPr lang="en-US" b="1" dirty="0">
+                  <a:solidFill>
+                    <a:srgbClr val="FFFFFF"/>
+                  </a:solidFill>
+                  <a:latin typeface="Arial"/>
+                </a:rPr>
+                <a:t>all Patients</a:t>
               </a:r>
               <a:endParaRPr kumimoji="0" lang="en-US" sz="1800" b="1" i="0" u="none" strike="noStrike" kern="1200" cap="none" spc="0" normalizeH="0" baseline="0" noProof="0" dirty="0">
                 <a:ln>
@@ -29334,6 +29189,55 @@
 </file>
 
 <file path=customXml/item1.xml><?xml version="1.0" encoding="utf-8"?>
+<p:properties xmlns:p="http://schemas.microsoft.com/office/2006/metadata/properties" xmlns:xsi="http://www.w3.org/2001/XMLSchema-instance" xmlns:pc="http://schemas.microsoft.com/office/infopath/2007/PartnerControls">
+  <documentManagement>
+    <p4ac7e37b3be48aa8418f065aeb540e0 xmlns="2e9807c8-684d-4ce2-9798-0aa295dedadb">
+      <Terms xmlns="http://schemas.microsoft.com/office/infopath/2007/PartnerControls"/>
+    </p4ac7e37b3be48aa8418f065aeb540e0>
+    <j628e119d7e4440dadc57ef80e73f9ed xmlns="2e9807c8-684d-4ce2-9798-0aa295dedadb">
+      <Terms xmlns="http://schemas.microsoft.com/office/infopath/2007/PartnerControls"/>
+    </j628e119d7e4440dadc57ef80e73f9ed>
+    <hscicNextReviewDate xmlns="2e9807c8-684d-4ce2-9798-0aa295dedadb" xsi:nil="true"/>
+    <kf16b72b2d604d459ccf7f7fae4ace43 xmlns="2e9807c8-684d-4ce2-9798-0aa295dedadb">
+      <Terms xmlns="http://schemas.microsoft.com/office/infopath/2007/PartnerControls"/>
+    </kf16b72b2d604d459ccf7f7fae4ace43>
+    <TaxCatchAll xmlns="5668c8bc-6c30-45e9-80ca-5109d4270dfd">
+      <Value>133</Value>
+    </TaxCatchAll>
+    <jf4655f4e78d4ac1a11c19f3a13b9f1c xmlns="2e9807c8-684d-4ce2-9798-0aa295dedadb">
+      <Terms xmlns="http://schemas.microsoft.com/office/infopath/2007/PartnerControls">
+        <TermInfo xmlns="http://schemas.microsoft.com/office/infopath/2007/PartnerControls">
+          <TermName xmlns="http://schemas.microsoft.com/office/infopath/2007/PartnerControls">Presentation</TermName>
+          <TermId xmlns="http://schemas.microsoft.com/office/infopath/2007/PartnerControls">ee650e81-096d-4403-84a9-0f09614326ef</TermId>
+        </TermInfo>
+      </Terms>
+    </jf4655f4e78d4ac1a11c19f3a13b9f1c>
+    <hscicLastReviewDate xmlns="2e9807c8-684d-4ce2-9798-0aa295dedadb" xsi:nil="true"/>
+    <k5f85a19a9254bc483709d4dbf407442 xmlns="2e9807c8-684d-4ce2-9798-0aa295dedadb">
+      <Terms xmlns="http://schemas.microsoft.com/office/infopath/2007/PartnerControls"/>
+    </k5f85a19a9254bc483709d4dbf407442>
+    <_dlc_DocId xmlns="2e9807c8-684d-4ce2-9798-0aa295dedadb">MDQYE57WSUYW-1510119152-517</_dlc_DocId>
+    <_dlc_DocIdUrl xmlns="2e9807c8-684d-4ce2-9798-0aa295dedadb">
+      <Url>https://hscic365.sharepoint.com/MarketingComms/_layouts/15/DocIdRedir.aspx?ID=MDQYE57WSUYW-1510119152-517</Url>
+      <Description>MDQYE57WSUYW-1510119152-517</Description>
+    </_dlc_DocIdUrl>
+    <lcf76f155ced4ddcb4097134ff3c332f xmlns="4e4326f6-5e34-4e05-b314-006661b9c42d">
+      <Terms xmlns="http://schemas.microsoft.com/office/infopath/2007/PartnerControls"/>
+    </lcf76f155ced4ddcb4097134ff3c332f>
+  </documentManagement>
+</p:properties>
+</file>
+
+<file path=customXml/item2.xml><?xml version="1.0" encoding="utf-8"?>
+<?mso-contentType ?>
+<FormTemplates xmlns="http://schemas.microsoft.com/sharepoint/v3/contenttype/forms">
+  <Display>DocumentLibraryForm</Display>
+  <Edit>DocumentLibraryForm</Edit>
+  <New>DocumentLibraryForm</New>
+</FormTemplates>
+</file>
+
+<file path=customXml/item3.xml><?xml version="1.0" encoding="utf-8"?>
 <ct:contentTypeSchema xmlns:ct="http://schemas.microsoft.com/office/2006/metadata/contentType" xmlns:ma="http://schemas.microsoft.com/office/2006/metadata/properties/metaAttributes" ct:_="" ma:_="" ma:contentTypeName="HSCIC Document" ma:contentTypeID="0x010100F56AC1E539A90047BC30B3C9F7C85DBF009974B1B821AB36488BB2955A9F4B5285" ma:contentTypeVersion="25" ma:contentTypeDescription="Create a new document." ma:contentTypeScope="" ma:versionID="07420608f8b6198177e3320b229a6c35">
   <xsd:schema xmlns:xsd="http://www.w3.org/2001/XMLSchema" xmlns:xs="http://www.w3.org/2001/XMLSchema" xmlns:p="http://schemas.microsoft.com/office/2006/metadata/properties" xmlns:ns2="2e9807c8-684d-4ce2-9798-0aa295dedadb" xmlns:ns3="5668c8bc-6c30-45e9-80ca-5109d4270dfd" xmlns:ns4="4e4326f6-5e34-4e05-b314-006661b9c42d" targetNamespace="http://schemas.microsoft.com/office/2006/metadata/properties" ma:root="true" ma:fieldsID="a1223214bed314a580ae0252d7427c23" ns2:_="" ns3:_="" ns4:_="">
     <xsd:import namespace="2e9807c8-684d-4ce2-9798-0aa295dedadb"/>
@@ -29672,55 +29576,6 @@
 </ct:contentTypeSchema>
 </file>
 
-<file path=customXml/item2.xml><?xml version="1.0" encoding="utf-8"?>
-<?mso-contentType ?>
-<FormTemplates xmlns="http://schemas.microsoft.com/sharepoint/v3/contenttype/forms">
-  <Display>DocumentLibraryForm</Display>
-  <Edit>DocumentLibraryForm</Edit>
-  <New>DocumentLibraryForm</New>
-</FormTemplates>
-</file>
-
-<file path=customXml/item3.xml><?xml version="1.0" encoding="utf-8"?>
-<p:properties xmlns:p="http://schemas.microsoft.com/office/2006/metadata/properties" xmlns:xsi="http://www.w3.org/2001/XMLSchema-instance" xmlns:pc="http://schemas.microsoft.com/office/infopath/2007/PartnerControls">
-  <documentManagement>
-    <p4ac7e37b3be48aa8418f065aeb540e0 xmlns="2e9807c8-684d-4ce2-9798-0aa295dedadb">
-      <Terms xmlns="http://schemas.microsoft.com/office/infopath/2007/PartnerControls"/>
-    </p4ac7e37b3be48aa8418f065aeb540e0>
-    <j628e119d7e4440dadc57ef80e73f9ed xmlns="2e9807c8-684d-4ce2-9798-0aa295dedadb">
-      <Terms xmlns="http://schemas.microsoft.com/office/infopath/2007/PartnerControls"/>
-    </j628e119d7e4440dadc57ef80e73f9ed>
-    <hscicNextReviewDate xmlns="2e9807c8-684d-4ce2-9798-0aa295dedadb" xsi:nil="true"/>
-    <kf16b72b2d604d459ccf7f7fae4ace43 xmlns="2e9807c8-684d-4ce2-9798-0aa295dedadb">
-      <Terms xmlns="http://schemas.microsoft.com/office/infopath/2007/PartnerControls"/>
-    </kf16b72b2d604d459ccf7f7fae4ace43>
-    <TaxCatchAll xmlns="5668c8bc-6c30-45e9-80ca-5109d4270dfd">
-      <Value>133</Value>
-    </TaxCatchAll>
-    <jf4655f4e78d4ac1a11c19f3a13b9f1c xmlns="2e9807c8-684d-4ce2-9798-0aa295dedadb">
-      <Terms xmlns="http://schemas.microsoft.com/office/infopath/2007/PartnerControls">
-        <TermInfo xmlns="http://schemas.microsoft.com/office/infopath/2007/PartnerControls">
-          <TermName xmlns="http://schemas.microsoft.com/office/infopath/2007/PartnerControls">Presentation</TermName>
-          <TermId xmlns="http://schemas.microsoft.com/office/infopath/2007/PartnerControls">ee650e81-096d-4403-84a9-0f09614326ef</TermId>
-        </TermInfo>
-      </Terms>
-    </jf4655f4e78d4ac1a11c19f3a13b9f1c>
-    <hscicLastReviewDate xmlns="2e9807c8-684d-4ce2-9798-0aa295dedadb" xsi:nil="true"/>
-    <k5f85a19a9254bc483709d4dbf407442 xmlns="2e9807c8-684d-4ce2-9798-0aa295dedadb">
-      <Terms xmlns="http://schemas.microsoft.com/office/infopath/2007/PartnerControls"/>
-    </k5f85a19a9254bc483709d4dbf407442>
-    <_dlc_DocId xmlns="2e9807c8-684d-4ce2-9798-0aa295dedadb">MDQYE57WSUYW-1510119152-517</_dlc_DocId>
-    <_dlc_DocIdUrl xmlns="2e9807c8-684d-4ce2-9798-0aa295dedadb">
-      <Url>https://hscic365.sharepoint.com/MarketingComms/_layouts/15/DocIdRedir.aspx?ID=MDQYE57WSUYW-1510119152-517</Url>
-      <Description>MDQYE57WSUYW-1510119152-517</Description>
-    </_dlc_DocIdUrl>
-    <lcf76f155ced4ddcb4097134ff3c332f xmlns="4e4326f6-5e34-4e05-b314-006661b9c42d">
-      <Terms xmlns="http://schemas.microsoft.com/office/infopath/2007/PartnerControls"/>
-    </lcf76f155ced4ddcb4097134ff3c332f>
-  </documentManagement>
-</p:properties>
-</file>
-
 <file path=customXml/item4.xml><?xml version="1.0" encoding="utf-8"?>
 <?mso-contentType ?>
 <spe:Receivers xmlns:spe="http://schemas.microsoft.com/sharepoint/events">
@@ -29772,6 +29627,34 @@
 </file>
 
 <file path=customXml/itemProps1.xml><?xml version="1.0" encoding="utf-8"?>
+<ds:datastoreItem xmlns:ds="http://schemas.openxmlformats.org/officeDocument/2006/customXml" ds:itemID="{A12B3C52-C4E5-4003-8240-632FDE102EAB}">
+  <ds:schemaRefs>
+    <ds:schemaRef ds:uri="http://schemas.microsoft.com/office/infopath/2007/PartnerControls"/>
+    <ds:schemaRef ds:uri="3aa42f08-e708-46fa-8873-ef4bebe479f0"/>
+    <ds:schemaRef ds:uri="http://purl.org/dc/terms/"/>
+    <ds:schemaRef ds:uri="http://purl.org/dc/dcmitype/"/>
+    <ds:schemaRef ds:uri="http://purl.org/dc/elements/1.1/"/>
+    <ds:schemaRef ds:uri="http://schemas.microsoft.com/office/2006/documentManagement/types"/>
+    <ds:schemaRef ds:uri="http://www.w3.org/XML/1998/namespace"/>
+    <ds:schemaRef ds:uri="http://schemas.openxmlformats.org/package/2006/metadata/core-properties"/>
+    <ds:schemaRef ds:uri="28964cdc-6461-4632-bf5a-ecc56702e60f"/>
+    <ds:schemaRef ds:uri="http://schemas.microsoft.com/office/2006/metadata/properties"/>
+    <ds:schemaRef ds:uri="2e9807c8-684d-4ce2-9798-0aa295dedadb"/>
+    <ds:schemaRef ds:uri="5668c8bc-6c30-45e9-80ca-5109d4270dfd"/>
+    <ds:schemaRef ds:uri="4e4326f6-5e34-4e05-b314-006661b9c42d"/>
+  </ds:schemaRefs>
+</ds:datastoreItem>
+</file>
+
+<file path=customXml/itemProps2.xml><?xml version="1.0" encoding="utf-8"?>
+<ds:datastoreItem xmlns:ds="http://schemas.openxmlformats.org/officeDocument/2006/customXml" ds:itemID="{B7B6D4F5-ECA0-4A22-A4DD-3335756FD664}">
+  <ds:schemaRefs>
+    <ds:schemaRef ds:uri="http://schemas.microsoft.com/sharepoint/v3/contenttype/forms"/>
+  </ds:schemaRefs>
+</ds:datastoreItem>
+</file>
+
+<file path=customXml/itemProps3.xml><?xml version="1.0" encoding="utf-8"?>
 <ds:datastoreItem xmlns:ds="http://schemas.openxmlformats.org/officeDocument/2006/customXml" ds:itemID="{FE9D80B6-5927-4462-885B-FD85DD379F1C}">
   <ds:schemaRefs>
     <ds:schemaRef ds:uri="http://schemas.microsoft.com/office/2006/metadata/contentType"/>
@@ -29791,34 +29674,6 @@
 </ds:datastoreItem>
 </file>
 
-<file path=customXml/itemProps2.xml><?xml version="1.0" encoding="utf-8"?>
-<ds:datastoreItem xmlns:ds="http://schemas.openxmlformats.org/officeDocument/2006/customXml" ds:itemID="{B7B6D4F5-ECA0-4A22-A4DD-3335756FD664}">
-  <ds:schemaRefs>
-    <ds:schemaRef ds:uri="http://schemas.microsoft.com/sharepoint/v3/contenttype/forms"/>
-  </ds:schemaRefs>
-</ds:datastoreItem>
-</file>
-
-<file path=customXml/itemProps3.xml><?xml version="1.0" encoding="utf-8"?>
-<ds:datastoreItem xmlns:ds="http://schemas.openxmlformats.org/officeDocument/2006/customXml" ds:itemID="{A12B3C52-C4E5-4003-8240-632FDE102EAB}">
-  <ds:schemaRefs>
-    <ds:schemaRef ds:uri="http://schemas.microsoft.com/office/infopath/2007/PartnerControls"/>
-    <ds:schemaRef ds:uri="3aa42f08-e708-46fa-8873-ef4bebe479f0"/>
-    <ds:schemaRef ds:uri="http://purl.org/dc/terms/"/>
-    <ds:schemaRef ds:uri="http://purl.org/dc/dcmitype/"/>
-    <ds:schemaRef ds:uri="http://purl.org/dc/elements/1.1/"/>
-    <ds:schemaRef ds:uri="http://schemas.microsoft.com/office/2006/documentManagement/types"/>
-    <ds:schemaRef ds:uri="http://www.w3.org/XML/1998/namespace"/>
-    <ds:schemaRef ds:uri="http://schemas.openxmlformats.org/package/2006/metadata/core-properties"/>
-    <ds:schemaRef ds:uri="28964cdc-6461-4632-bf5a-ecc56702e60f"/>
-    <ds:schemaRef ds:uri="http://schemas.microsoft.com/office/2006/metadata/properties"/>
-    <ds:schemaRef ds:uri="2e9807c8-684d-4ce2-9798-0aa295dedadb"/>
-    <ds:schemaRef ds:uri="5668c8bc-6c30-45e9-80ca-5109d4270dfd"/>
-    <ds:schemaRef ds:uri="4e4326f6-5e34-4e05-b314-006661b9c42d"/>
-  </ds:schemaRefs>
-</ds:datastoreItem>
-</file>
-
 <file path=customXml/itemProps4.xml><?xml version="1.0" encoding="utf-8"?>
 <ds:datastoreItem xmlns:ds="http://schemas.openxmlformats.org/officeDocument/2006/customXml" ds:itemID="{297AB09D-1961-4090-8FB6-6E54D7E00154}">
   <ds:schemaRefs>
